--- a/examples/aham-ppt-v6.1-demo.pptx
+++ b/examples/aham-ppt-v6.1-demo.pptx
@@ -13,6 +13,9 @@
     <p:sldId id="261" r:id="rId12"/>
     <p:sldId id="262" r:id="rId13"/>
     <p:sldId id="263" r:id="rId14"/>
+    <p:sldId id="264" r:id="rId15"/>
+    <p:sldId id="265" r:id="rId16"/>
+    <p:sldId id="266" r:id="rId17"/>
   </p:sldIdLst>
   <p:sldSz cx="12192000" cy="6858000" type="screen4x3"/>
   <p:notesSz cx="6858000" cy="9144000"/>
@@ -3965,6 +3968,2442 @@
 </p:sld>
 </file>
 
+<file path=ppt/slides/slide10.xml><?xml version="1.0" encoding="utf-8"?>
+<p:sld xmlns:a="http://schemas.openxmlformats.org/drawingml/2006/main" xmlns:r="http://schemas.openxmlformats.org/officeDocument/2006/relationships" xmlns:p="http://schemas.openxmlformats.org/presentationml/2006/main">
+  <p:cSld>
+    <p:spTree>
+      <p:nvGrpSpPr>
+        <p:cNvPr id="1" name=""/>
+        <p:cNvGrpSpPr/>
+        <p:nvPr/>
+      </p:nvGrpSpPr>
+      <p:grpSpPr>
+        <a:xfrm>
+          <a:off x="0" y="0"/>
+          <a:ext cx="0" cy="0"/>
+          <a:chOff x="0" y="0"/>
+          <a:chExt cx="0" cy="0"/>
+        </a:xfrm>
+      </p:grpSpPr>
+      <p:sp>
+        <p:nvSpPr>
+          <p:cNvPr id="2" name="Rectangle 2"/>
+          <p:cNvSpPr/>
+          <p:nvPr/>
+        </p:nvSpPr>
+        <p:spPr>
+          <a:xfrm>
+            <a:off x="0" y="0"/>
+            <a:ext cx="12192000" cy="6858000"/>
+          </a:xfrm>
+          <a:prstGeom prst="rect">
+            <a:avLst/>
+          </a:prstGeom>
+          <a:solidFill>
+            <a:srgbClr val="FFFFFF"/>
+          </a:solidFill>
+          <a:ln>
+            <a:noFill/>
+          </a:ln>
+        </p:spPr>
+      </p:sp>
+      <p:sp>
+        <p:nvSpPr>
+          <p:cNvPr id="3" name="TextBox 3"/>
+          <p:cNvSpPr txBox="1"/>
+          <p:nvPr/>
+        </p:nvSpPr>
+        <p:spPr>
+          <a:xfrm>
+            <a:off x="370522" y="139541"/>
+            <a:ext cx="882467" cy="167640"/>
+          </a:xfrm>
+          <a:prstGeom prst="rect">
+            <a:avLst/>
+          </a:prstGeom>
+          <a:noFill/>
+          <a:ln>
+            <a:noFill/>
+          </a:ln>
+        </p:spPr>
+        <p:txBody>
+          <a:bodyPr wrap="none" lIns="0" tIns="0" rIns="0" bIns="0" anchor="t" anchorCtr="0">
+            <a:spAutoFit/>
+          </a:bodyPr>
+          <a:lstStyle/>
+          <a:p>
+            <a:pPr algn="l"/>
+            <a:r>
+              <a:rPr lang="zh-CN" sz="825" dirty="0">
+                <a:solidFill>
+                  <a:srgbClr val="9B9B9B"/>
+                </a:solidFill>
+                <a:latin typeface="Inter"/>
+                <a:ea typeface="Microsoft YaHei"/>
+                <a:cs typeface="Inter"/>
+              </a:rPr>
+              <a:t>改善方案 · 决策</a:t>
+            </a:r>
+          </a:p>
+        </p:txBody>
+      </p:sp>
+      <p:sp>
+        <p:nvSpPr>
+          <p:cNvPr id="4" name="Rectangle 4"/>
+          <p:cNvSpPr/>
+          <p:nvPr/>
+        </p:nvSpPr>
+        <p:spPr>
+          <a:xfrm>
+            <a:off x="11410950" y="152400"/>
+            <a:ext cx="85725" cy="85725"/>
+          </a:xfrm>
+          <a:prstGeom prst="rect">
+            <a:avLst/>
+          </a:prstGeom>
+          <a:solidFill>
+            <a:srgbClr val="336EE8"/>
+          </a:solidFill>
+          <a:ln>
+            <a:noFill/>
+          </a:ln>
+        </p:spPr>
+      </p:sp>
+      <p:sp>
+        <p:nvSpPr>
+          <p:cNvPr id="5" name="TextBox 5"/>
+          <p:cNvSpPr txBox="1"/>
+          <p:nvPr/>
+        </p:nvSpPr>
+        <p:spPr>
+          <a:xfrm>
+            <a:off x="11468329" y="131445"/>
+            <a:ext cx="354101" cy="182880"/>
+          </a:xfrm>
+          <a:prstGeom prst="rect">
+            <a:avLst/>
+          </a:prstGeom>
+          <a:noFill/>
+          <a:ln>
+            <a:noFill/>
+          </a:ln>
+        </p:spPr>
+        <p:txBody>
+          <a:bodyPr wrap="none" lIns="0" tIns="0" rIns="0" bIns="0" anchor="t" anchorCtr="0">
+            <a:spAutoFit/>
+          </a:bodyPr>
+          <a:lstStyle/>
+          <a:p>
+            <a:pPr algn="r"/>
+            <a:r>
+              <a:rPr lang="zh-CN" sz="900" b="1" dirty="0">
+                <a:solidFill>
+                  <a:srgbClr val="262626"/>
+                </a:solidFill>
+                <a:latin typeface="Inter"/>
+                <a:ea typeface="Microsoft YaHei"/>
+                <a:cs typeface="Inter"/>
+              </a:rPr>
+              <a:t>Aham</a:t>
+            </a:r>
+          </a:p>
+        </p:txBody>
+      </p:sp>
+      <p:sp>
+        <p:nvSpPr>
+          <p:cNvPr id="6" name="Line 6"/>
+          <p:cNvSpPr/>
+          <p:nvPr/>
+        </p:nvSpPr>
+        <p:spPr>
+          <a:xfrm>
+            <a:off x="381000" y="304800"/>
+            <a:ext cx="11430000" cy="9525"/>
+          </a:xfrm>
+          <a:custGeom>
+            <a:avLst/>
+            <a:gdLst/>
+            <a:ahLst/>
+            <a:cxnLst/>
+            <a:rect l="l" t="t" r="r" b="b"/>
+            <a:pathLst>
+              <a:path w="11430000" h="9525">
+                <a:moveTo>
+                  <a:pt x="0" y="0"/>
+                </a:moveTo>
+                <a:lnTo>
+                  <a:pt x="11430000" y="0"/>
+                </a:lnTo>
+              </a:path>
+            </a:pathLst>
+          </a:custGeom>
+          <a:noFill/>
+          <a:ln w="9525">
+            <a:solidFill>
+              <a:srgbClr val="E7E7E7"/>
+            </a:solidFill>
+          </a:ln>
+        </p:spPr>
+      </p:sp>
+      <p:sp>
+        <p:nvSpPr>
+          <p:cNvPr id="7" name="TextBox 7"/>
+          <p:cNvSpPr txBox="1"/>
+          <p:nvPr/>
+        </p:nvSpPr>
+        <p:spPr>
+          <a:xfrm>
+            <a:off x="350520" y="483870"/>
+            <a:ext cx="7145846" cy="487680"/>
+          </a:xfrm>
+          <a:prstGeom prst="rect">
+            <a:avLst/>
+          </a:prstGeom>
+          <a:noFill/>
+          <a:ln>
+            <a:noFill/>
+          </a:ln>
+        </p:spPr>
+        <p:txBody>
+          <a:bodyPr wrap="none" lIns="0" tIns="0" rIns="0" bIns="0" anchor="t" anchorCtr="0">
+            <a:spAutoFit/>
+          </a:bodyPr>
+          <a:lstStyle/>
+          <a:p>
+            <a:pPr algn="l"/>
+            <a:r>
+              <a:rPr lang="zh-CN" sz="2400" b="1" dirty="0">
+                <a:solidFill>
+                  <a:srgbClr val="262626"/>
+                </a:solidFill>
+                <a:latin typeface="Inter"/>
+                <a:ea typeface="Microsoft YaHei"/>
+                <a:cs typeface="Inter"/>
+              </a:rPr>
+              <a:t>维持现状年损 ¥420 万，立即改善 12 周回本</a:t>
+            </a:r>
+          </a:p>
+        </p:txBody>
+      </p:sp>
+      <p:sp>
+        <p:nvSpPr>
+          <p:cNvPr id="8" name="Line 8"/>
+          <p:cNvSpPr/>
+          <p:nvPr/>
+        </p:nvSpPr>
+        <p:spPr>
+          <a:xfrm>
+            <a:off x="381000" y="895350"/>
+            <a:ext cx="11430000" cy="9525"/>
+          </a:xfrm>
+          <a:custGeom>
+            <a:avLst/>
+            <a:gdLst/>
+            <a:ahLst/>
+            <a:cxnLst/>
+            <a:rect l="l" t="t" r="r" b="b"/>
+            <a:pathLst>
+              <a:path w="11430000" h="9525">
+                <a:moveTo>
+                  <a:pt x="0" y="0"/>
+                </a:moveTo>
+                <a:lnTo>
+                  <a:pt x="11430000" y="0"/>
+                </a:lnTo>
+              </a:path>
+            </a:pathLst>
+          </a:custGeom>
+          <a:noFill/>
+          <a:ln w="9525">
+            <a:solidFill>
+              <a:srgbClr val="E7E7E7"/>
+            </a:solidFill>
+          </a:ln>
+        </p:spPr>
+      </p:sp>
+      <p:sp>
+        <p:nvSpPr>
+          <p:cNvPr id="9" name="Line 9"/>
+          <p:cNvSpPr/>
+          <p:nvPr/>
+        </p:nvSpPr>
+        <p:spPr>
+          <a:xfrm>
+            <a:off x="381000" y="6572250"/>
+            <a:ext cx="11430000" cy="9525"/>
+          </a:xfrm>
+          <a:custGeom>
+            <a:avLst/>
+            <a:gdLst/>
+            <a:ahLst/>
+            <a:cxnLst/>
+            <a:rect l="l" t="t" r="r" b="b"/>
+            <a:pathLst>
+              <a:path w="11430000" h="9525">
+                <a:moveTo>
+                  <a:pt x="0" y="0"/>
+                </a:moveTo>
+                <a:lnTo>
+                  <a:pt x="11430000" y="0"/>
+                </a:lnTo>
+              </a:path>
+            </a:pathLst>
+          </a:custGeom>
+          <a:noFill/>
+          <a:ln w="9525">
+            <a:solidFill>
+              <a:srgbClr val="E7E7E7"/>
+            </a:solidFill>
+          </a:ln>
+        </p:spPr>
+      </p:sp>
+      <p:sp>
+        <p:nvSpPr>
+          <p:cNvPr id="10" name="TextBox 10"/>
+          <p:cNvSpPr txBox="1"/>
+          <p:nvPr/>
+        </p:nvSpPr>
+        <p:spPr>
+          <a:xfrm>
+            <a:off x="370522" y="6664166"/>
+            <a:ext cx="864394" cy="167640"/>
+          </a:xfrm>
+          <a:prstGeom prst="rect">
+            <a:avLst/>
+          </a:prstGeom>
+          <a:noFill/>
+          <a:ln>
+            <a:noFill/>
+          </a:ln>
+        </p:spPr>
+        <p:txBody>
+          <a:bodyPr wrap="none" lIns="0" tIns="0" rIns="0" bIns="0" anchor="t" anchorCtr="0">
+            <a:spAutoFit/>
+          </a:bodyPr>
+          <a:lstStyle/>
+          <a:p>
+            <a:pPr algn="l"/>
+            <a:r>
+              <a:rPr lang="zh-CN" sz="825" dirty="0">
+                <a:solidFill>
+                  <a:srgbClr val="9B9B9B"/>
+                </a:solidFill>
+                <a:latin typeface="Inter"/>
+                <a:ea typeface="Microsoft YaHei"/>
+                <a:cs typeface="Inter"/>
+              </a:rPr>
+              <a:t>来源：内部测算</a:t>
+            </a:r>
+          </a:p>
+        </p:txBody>
+      </p:sp>
+      <p:sp>
+        <p:nvSpPr>
+          <p:cNvPr id="11" name="TextBox 11"/>
+          <p:cNvSpPr txBox="1"/>
+          <p:nvPr/>
+        </p:nvSpPr>
+        <p:spPr>
+          <a:xfrm>
+            <a:off x="11487245" y="6664166"/>
+            <a:ext cx="334232" cy="167640"/>
+          </a:xfrm>
+          <a:prstGeom prst="rect">
+            <a:avLst/>
+          </a:prstGeom>
+          <a:noFill/>
+          <a:ln>
+            <a:noFill/>
+          </a:ln>
+        </p:spPr>
+        <p:txBody>
+          <a:bodyPr wrap="none" lIns="0" tIns="0" rIns="0" bIns="0" anchor="t" anchorCtr="0">
+            <a:spAutoFit/>
+          </a:bodyPr>
+          <a:lstStyle/>
+          <a:p>
+            <a:pPr algn="r"/>
+            <a:r>
+              <a:rPr lang="zh-CN" sz="825" dirty="0">
+                <a:solidFill>
+                  <a:srgbClr val="9B9B9B"/>
+                </a:solidFill>
+                <a:latin typeface="JetBrains Mono"/>
+                <a:ea typeface="Microsoft YaHei"/>
+                <a:cs typeface="JetBrains Mono"/>
+              </a:rPr>
+              <a:t>10 / 11</a:t>
+            </a:r>
+          </a:p>
+        </p:txBody>
+      </p:sp>
+      <p:sp>
+        <p:nvSpPr>
+          <p:cNvPr id="12" name="Rectangle 12"/>
+          <p:cNvSpPr/>
+          <p:nvPr/>
+        </p:nvSpPr>
+        <p:spPr>
+          <a:xfrm>
+            <a:off x="6286500" y="1428750"/>
+            <a:ext cx="5524500" cy="4114800"/>
+          </a:xfrm>
+          <a:prstGeom prst="rect">
+            <a:avLst/>
+          </a:prstGeom>
+          <a:solidFill>
+            <a:srgbClr val="F3F3F3"/>
+          </a:solidFill>
+          <a:ln>
+            <a:noFill/>
+          </a:ln>
+        </p:spPr>
+      </p:sp>
+      <p:sp>
+        <p:nvSpPr>
+          <p:cNvPr id="13" name="TextBox 13"/>
+          <p:cNvSpPr txBox="1"/>
+          <p:nvPr/>
+        </p:nvSpPr>
+        <p:spPr>
+          <a:xfrm>
+            <a:off x="645795" y="1707832"/>
+            <a:ext cx="1054036" cy="335280"/>
+          </a:xfrm>
+          <a:prstGeom prst="rect">
+            <a:avLst/>
+          </a:prstGeom>
+          <a:noFill/>
+          <a:ln>
+            <a:noFill/>
+          </a:ln>
+        </p:spPr>
+        <p:txBody>
+          <a:bodyPr wrap="none" lIns="0" tIns="0" rIns="0" bIns="0" anchor="t" anchorCtr="0">
+            <a:spAutoFit/>
+          </a:bodyPr>
+          <a:lstStyle/>
+          <a:p>
+            <a:pPr algn="l"/>
+            <a:r>
+              <a:rPr lang="zh-CN" sz="1650" b="1" dirty="0">
+                <a:solidFill>
+                  <a:srgbClr val="262626"/>
+                </a:solidFill>
+                <a:latin typeface="Inter"/>
+                <a:ea typeface="Microsoft YaHei"/>
+                <a:cs typeface="Inter"/>
+              </a:rPr>
+              <a:t>维持现状</a:t>
+            </a:r>
+          </a:p>
+        </p:txBody>
+      </p:sp>
+      <p:sp>
+        <p:nvSpPr>
+          <p:cNvPr id="14" name="TextBox 14"/>
+          <p:cNvSpPr txBox="1"/>
+          <p:nvPr/>
+        </p:nvSpPr>
+        <p:spPr>
+          <a:xfrm>
+            <a:off x="655320" y="2017395"/>
+            <a:ext cx="732663" cy="182880"/>
+          </a:xfrm>
+          <a:prstGeom prst="rect">
+            <a:avLst/>
+          </a:prstGeom>
+          <a:noFill/>
+          <a:ln>
+            <a:noFill/>
+          </a:ln>
+        </p:spPr>
+        <p:txBody>
+          <a:bodyPr wrap="none" lIns="0" tIns="0" rIns="0" bIns="0" anchor="t" anchorCtr="0">
+            <a:spAutoFit/>
+          </a:bodyPr>
+          <a:lstStyle/>
+          <a:p>
+            <a:pPr algn="l"/>
+            <a:r>
+              <a:rPr lang="zh-CN" sz="900" dirty="0">
+                <a:solidFill>
+                  <a:srgbClr val="9B9B9B"/>
+                </a:solidFill>
+                <a:latin typeface="Inter"/>
+                <a:ea typeface="Microsoft YaHei"/>
+                <a:cs typeface="Inter"/>
+              </a:rPr>
+              <a:t>DO NOTHING</a:t>
+            </a:r>
+          </a:p>
+        </p:txBody>
+      </p:sp>
+      <p:sp>
+        <p:nvSpPr>
+          <p:cNvPr id="15" name="TextBox 15"/>
+          <p:cNvSpPr txBox="1"/>
+          <p:nvPr/>
+        </p:nvSpPr>
+        <p:spPr>
+          <a:xfrm>
+            <a:off x="6646545" y="1707832"/>
+            <a:ext cx="1054036" cy="335280"/>
+          </a:xfrm>
+          <a:prstGeom prst="rect">
+            <a:avLst/>
+          </a:prstGeom>
+          <a:noFill/>
+          <a:ln>
+            <a:noFill/>
+          </a:ln>
+        </p:spPr>
+        <p:txBody>
+          <a:bodyPr wrap="none" lIns="0" tIns="0" rIns="0" bIns="0" anchor="t" anchorCtr="0">
+            <a:spAutoFit/>
+          </a:bodyPr>
+          <a:lstStyle/>
+          <a:p>
+            <a:pPr algn="l"/>
+            <a:r>
+              <a:rPr lang="zh-CN" sz="1650" b="1" dirty="0">
+                <a:solidFill>
+                  <a:srgbClr val="262626"/>
+                </a:solidFill>
+                <a:latin typeface="Inter"/>
+                <a:ea typeface="Microsoft YaHei"/>
+                <a:cs typeface="Inter"/>
+              </a:rPr>
+              <a:t>立即改善</a:t>
+            </a:r>
+          </a:p>
+        </p:txBody>
+      </p:sp>
+      <p:sp>
+        <p:nvSpPr>
+          <p:cNvPr id="16" name="TextBox 16"/>
+          <p:cNvSpPr txBox="1"/>
+          <p:nvPr/>
+        </p:nvSpPr>
+        <p:spPr>
+          <a:xfrm>
+            <a:off x="7797165" y="1772602"/>
+            <a:ext cx="348710" cy="213360"/>
+          </a:xfrm>
+          <a:prstGeom prst="rect">
+            <a:avLst/>
+          </a:prstGeom>
+          <a:noFill/>
+          <a:ln>
+            <a:noFill/>
+          </a:ln>
+        </p:spPr>
+        <p:txBody>
+          <a:bodyPr wrap="none" lIns="0" tIns="0" rIns="0" bIns="0" anchor="t" anchorCtr="0">
+            <a:spAutoFit/>
+          </a:bodyPr>
+          <a:lstStyle/>
+          <a:p>
+            <a:pPr algn="l"/>
+            <a:r>
+              <a:rPr lang="zh-CN" sz="1050" b="1" dirty="0">
+                <a:solidFill>
+                  <a:srgbClr val="336EE8"/>
+                </a:solidFill>
+                <a:latin typeface="Inter"/>
+                <a:ea typeface="Microsoft YaHei"/>
+                <a:cs typeface="Inter"/>
+              </a:rPr>
+              <a:t>推荐</a:t>
+            </a:r>
+          </a:p>
+        </p:txBody>
+      </p:sp>
+      <p:sp>
+        <p:nvSpPr>
+          <p:cNvPr id="17" name="Rectangle 17"/>
+          <p:cNvSpPr/>
+          <p:nvPr/>
+        </p:nvSpPr>
+        <p:spPr>
+          <a:xfrm>
+            <a:off x="7810500" y="1962150"/>
+            <a:ext cx="381000" cy="19050"/>
+          </a:xfrm>
+          <a:prstGeom prst="rect">
+            <a:avLst/>
+          </a:prstGeom>
+          <a:solidFill>
+            <a:srgbClr val="336EE8"/>
+          </a:solidFill>
+          <a:ln>
+            <a:noFill/>
+          </a:ln>
+        </p:spPr>
+      </p:sp>
+      <p:sp>
+        <p:nvSpPr>
+          <p:cNvPr id="18" name="TextBox 18"/>
+          <p:cNvSpPr txBox="1"/>
+          <p:nvPr/>
+        </p:nvSpPr>
+        <p:spPr>
+          <a:xfrm>
+            <a:off x="6656070" y="2017395"/>
+            <a:ext cx="548640" cy="182880"/>
+          </a:xfrm>
+          <a:prstGeom prst="rect">
+            <a:avLst/>
+          </a:prstGeom>
+          <a:noFill/>
+          <a:ln>
+            <a:noFill/>
+          </a:ln>
+        </p:spPr>
+        <p:txBody>
+          <a:bodyPr wrap="none" lIns="0" tIns="0" rIns="0" bIns="0" anchor="t" anchorCtr="0">
+            <a:spAutoFit/>
+          </a:bodyPr>
+          <a:lstStyle/>
+          <a:p>
+            <a:pPr algn="l"/>
+            <a:r>
+              <a:rPr lang="zh-CN" sz="900" dirty="0">
+                <a:solidFill>
+                  <a:srgbClr val="9B9B9B"/>
+                </a:solidFill>
+                <a:latin typeface="Inter"/>
+                <a:ea typeface="Microsoft YaHei"/>
+                <a:cs typeface="Inter"/>
+              </a:rPr>
+              <a:t>ACT NOW</a:t>
+            </a:r>
+          </a:p>
+        </p:txBody>
+      </p:sp>
+      <p:sp>
+        <p:nvSpPr>
+          <p:cNvPr id="19" name="Ellipse 19"/>
+          <p:cNvSpPr/>
+          <p:nvPr/>
+        </p:nvSpPr>
+        <p:spPr>
+          <a:xfrm>
+            <a:off x="5848350" y="1714500"/>
+            <a:ext cx="495300" cy="495300"/>
+          </a:xfrm>
+          <a:prstGeom prst="ellipse">
+            <a:avLst/>
+          </a:prstGeom>
+          <a:solidFill>
+            <a:srgbClr val="FFFFFF"/>
+          </a:solidFill>
+          <a:ln w="14288">
+            <a:solidFill>
+              <a:srgbClr val="E7E7E7"/>
+            </a:solidFill>
+          </a:ln>
+        </p:spPr>
+      </p:sp>
+      <p:sp>
+        <p:nvSpPr>
+          <p:cNvPr id="20" name="TextBox 20"/>
+          <p:cNvSpPr txBox="1"/>
+          <p:nvPr/>
+        </p:nvSpPr>
+        <p:spPr>
+          <a:xfrm>
+            <a:off x="5979547" y="1899285"/>
+            <a:ext cx="232905" cy="243840"/>
+          </a:xfrm>
+          <a:prstGeom prst="rect">
+            <a:avLst/>
+          </a:prstGeom>
+          <a:noFill/>
+          <a:ln>
+            <a:noFill/>
+          </a:ln>
+        </p:spPr>
+        <p:txBody>
+          <a:bodyPr wrap="none" lIns="0" tIns="0" rIns="0" bIns="0" anchor="t" anchorCtr="0">
+            <a:spAutoFit/>
+          </a:bodyPr>
+          <a:lstStyle/>
+          <a:p>
+            <a:pPr algn="ctr"/>
+            <a:r>
+              <a:rPr lang="zh-CN" sz="1200" b="1" dirty="0">
+                <a:solidFill>
+                  <a:srgbClr val="9B9B9B"/>
+                </a:solidFill>
+                <a:latin typeface="Inter"/>
+                <a:ea typeface="Microsoft YaHei"/>
+                <a:cs typeface="Inter"/>
+              </a:rPr>
+              <a:t>VS</a:t>
+            </a:r>
+          </a:p>
+        </p:txBody>
+      </p:sp>
+      <p:sp>
+        <p:nvSpPr>
+          <p:cNvPr id="21" name="TextBox 21"/>
+          <p:cNvSpPr txBox="1"/>
+          <p:nvPr/>
+        </p:nvSpPr>
+        <p:spPr>
+          <a:xfrm>
+            <a:off x="653415" y="2706052"/>
+            <a:ext cx="663083" cy="213360"/>
+          </a:xfrm>
+          <a:prstGeom prst="rect">
+            <a:avLst/>
+          </a:prstGeom>
+          <a:noFill/>
+          <a:ln>
+            <a:noFill/>
+          </a:ln>
+        </p:spPr>
+        <p:txBody>
+          <a:bodyPr wrap="none" lIns="0" tIns="0" rIns="0" bIns="0" anchor="t" anchorCtr="0">
+            <a:spAutoFit/>
+          </a:bodyPr>
+          <a:lstStyle/>
+          <a:p>
+            <a:pPr algn="l"/>
+            <a:r>
+              <a:rPr lang="zh-CN" sz="1050" dirty="0">
+                <a:solidFill>
+                  <a:srgbClr val="6E6E6E"/>
+                </a:solidFill>
+                <a:latin typeface="Inter"/>
+                <a:ea typeface="Microsoft YaHei"/>
+                <a:cs typeface="Inter"/>
+              </a:rPr>
+              <a:t>综合 OEE</a:t>
+            </a:r>
+          </a:p>
+        </p:txBody>
+      </p:sp>
+      <p:sp>
+        <p:nvSpPr>
+          <p:cNvPr id="22" name="Ellipse 22"/>
+          <p:cNvSpPr/>
+          <p:nvPr/>
+        </p:nvSpPr>
+        <p:spPr>
+          <a:xfrm>
+            <a:off x="2686050" y="2733675"/>
+            <a:ext cx="76200" cy="76200"/>
+          </a:xfrm>
+          <a:prstGeom prst="ellipse">
+            <a:avLst/>
+          </a:prstGeom>
+          <a:solidFill>
+            <a:srgbClr val="9E3D31"/>
+          </a:solidFill>
+          <a:ln>
+            <a:noFill/>
+          </a:ln>
+        </p:spPr>
+      </p:sp>
+      <p:sp>
+        <p:nvSpPr>
+          <p:cNvPr id="23" name="TextBox 23"/>
+          <p:cNvSpPr txBox="1"/>
+          <p:nvPr/>
+        </p:nvSpPr>
+        <p:spPr>
+          <a:xfrm>
+            <a:off x="2860358" y="2681764"/>
+            <a:ext cx="293084" cy="259080"/>
+          </a:xfrm>
+          <a:prstGeom prst="rect">
+            <a:avLst/>
+          </a:prstGeom>
+          <a:noFill/>
+          <a:ln>
+            <a:noFill/>
+          </a:ln>
+        </p:spPr>
+        <p:txBody>
+          <a:bodyPr wrap="none" lIns="0" tIns="0" rIns="0" bIns="0" anchor="t" anchorCtr="0">
+            <a:spAutoFit/>
+          </a:bodyPr>
+          <a:lstStyle/>
+          <a:p>
+            <a:pPr algn="l"/>
+            <a:r>
+              <a:rPr lang="zh-CN" sz="1275" dirty="0">
+                <a:solidFill>
+                  <a:srgbClr val="262626"/>
+                </a:solidFill>
+                <a:latin typeface="JetBrains Mono"/>
+                <a:ea typeface="Microsoft YaHei"/>
+                <a:cs typeface="JetBrains Mono"/>
+              </a:rPr>
+              <a:t>71%</a:t>
+            </a:r>
+          </a:p>
+        </p:txBody>
+      </p:sp>
+      <p:sp>
+        <p:nvSpPr>
+          <p:cNvPr id="24" name="TextBox 24"/>
+          <p:cNvSpPr txBox="1"/>
+          <p:nvPr/>
+        </p:nvSpPr>
+        <p:spPr>
+          <a:xfrm>
+            <a:off x="6654165" y="2706052"/>
+            <a:ext cx="663083" cy="213360"/>
+          </a:xfrm>
+          <a:prstGeom prst="rect">
+            <a:avLst/>
+          </a:prstGeom>
+          <a:noFill/>
+          <a:ln>
+            <a:noFill/>
+          </a:ln>
+        </p:spPr>
+        <p:txBody>
+          <a:bodyPr wrap="none" lIns="0" tIns="0" rIns="0" bIns="0" anchor="t" anchorCtr="0">
+            <a:spAutoFit/>
+          </a:bodyPr>
+          <a:lstStyle/>
+          <a:p>
+            <a:pPr algn="l"/>
+            <a:r>
+              <a:rPr lang="zh-CN" sz="1050" dirty="0">
+                <a:solidFill>
+                  <a:srgbClr val="6E6E6E"/>
+                </a:solidFill>
+                <a:latin typeface="Inter"/>
+                <a:ea typeface="Microsoft YaHei"/>
+                <a:cs typeface="Inter"/>
+              </a:rPr>
+              <a:t>综合 OEE</a:t>
+            </a:r>
+          </a:p>
+        </p:txBody>
+      </p:sp>
+      <p:sp>
+        <p:nvSpPr>
+          <p:cNvPr id="25" name="Ellipse 25"/>
+          <p:cNvSpPr/>
+          <p:nvPr/>
+        </p:nvSpPr>
+        <p:spPr>
+          <a:xfrm>
+            <a:off x="8686800" y="2733675"/>
+            <a:ext cx="76200" cy="76200"/>
+          </a:xfrm>
+          <a:prstGeom prst="ellipse">
+            <a:avLst/>
+          </a:prstGeom>
+          <a:solidFill>
+            <a:srgbClr val="5A7A60"/>
+          </a:solidFill>
+          <a:ln>
+            <a:noFill/>
+          </a:ln>
+        </p:spPr>
+      </p:sp>
+      <p:sp>
+        <p:nvSpPr>
+          <p:cNvPr id="26" name="TextBox 26"/>
+          <p:cNvSpPr txBox="1"/>
+          <p:nvPr/>
+        </p:nvSpPr>
+        <p:spPr>
+          <a:xfrm>
+            <a:off x="8861108" y="2681764"/>
+            <a:ext cx="442055" cy="259080"/>
+          </a:xfrm>
+          <a:prstGeom prst="rect">
+            <a:avLst/>
+          </a:prstGeom>
+          <a:noFill/>
+          <a:ln>
+            <a:noFill/>
+          </a:ln>
+        </p:spPr>
+        <p:txBody>
+          <a:bodyPr wrap="none" lIns="0" tIns="0" rIns="0" bIns="0" anchor="t" anchorCtr="0">
+            <a:spAutoFit/>
+          </a:bodyPr>
+          <a:lstStyle/>
+          <a:p>
+            <a:pPr algn="l"/>
+            <a:r>
+              <a:rPr lang="zh-CN" sz="1275" dirty="0">
+                <a:solidFill>
+                  <a:srgbClr val="262626"/>
+                </a:solidFill>
+                <a:latin typeface="JetBrains Mono"/>
+                <a:ea typeface="Microsoft YaHei"/>
+                <a:cs typeface="JetBrains Mono"/>
+              </a:rPr>
+              <a:t>85%+</a:t>
+            </a:r>
+          </a:p>
+        </p:txBody>
+      </p:sp>
+      <p:sp>
+        <p:nvSpPr>
+          <p:cNvPr id="27" name="Line 27"/>
+          <p:cNvSpPr/>
+          <p:nvPr/>
+        </p:nvSpPr>
+        <p:spPr>
+          <a:xfrm>
+            <a:off x="666750" y="2990850"/>
+            <a:ext cx="5048250" cy="9525"/>
+          </a:xfrm>
+          <a:custGeom>
+            <a:avLst/>
+            <a:gdLst/>
+            <a:ahLst/>
+            <a:cxnLst/>
+            <a:rect l="l" t="t" r="r" b="b"/>
+            <a:pathLst>
+              <a:path w="5048250" h="9525">
+                <a:moveTo>
+                  <a:pt x="0" y="0"/>
+                </a:moveTo>
+                <a:lnTo>
+                  <a:pt x="5048250" y="0"/>
+                </a:lnTo>
+              </a:path>
+            </a:pathLst>
+          </a:custGeom>
+          <a:noFill/>
+          <a:ln w="7144">
+            <a:solidFill>
+              <a:srgbClr val="E7E7E7"/>
+            </a:solidFill>
+          </a:ln>
+        </p:spPr>
+      </p:sp>
+      <p:sp>
+        <p:nvSpPr>
+          <p:cNvPr id="28" name="Line 28"/>
+          <p:cNvSpPr/>
+          <p:nvPr/>
+        </p:nvSpPr>
+        <p:spPr>
+          <a:xfrm>
+            <a:off x="6667500" y="2990850"/>
+            <a:ext cx="4914900" cy="9525"/>
+          </a:xfrm>
+          <a:custGeom>
+            <a:avLst/>
+            <a:gdLst/>
+            <a:ahLst/>
+            <a:cxnLst/>
+            <a:rect l="l" t="t" r="r" b="b"/>
+            <a:pathLst>
+              <a:path w="4914900" h="9525">
+                <a:moveTo>
+                  <a:pt x="0" y="0"/>
+                </a:moveTo>
+                <a:lnTo>
+                  <a:pt x="4914900" y="0"/>
+                </a:lnTo>
+              </a:path>
+            </a:pathLst>
+          </a:custGeom>
+          <a:noFill/>
+          <a:ln w="7144">
+            <a:solidFill>
+              <a:srgbClr val="E7E7E7"/>
+            </a:solidFill>
+          </a:ln>
+        </p:spPr>
+      </p:sp>
+      <p:sp>
+        <p:nvSpPr>
+          <p:cNvPr id="29" name="TextBox 29"/>
+          <p:cNvSpPr txBox="1"/>
+          <p:nvPr/>
+        </p:nvSpPr>
+        <p:spPr>
+          <a:xfrm>
+            <a:off x="653415" y="3239452"/>
+            <a:ext cx="793432" cy="213360"/>
+          </a:xfrm>
+          <a:prstGeom prst="rect">
+            <a:avLst/>
+          </a:prstGeom>
+          <a:noFill/>
+          <a:ln>
+            <a:noFill/>
+          </a:ln>
+        </p:spPr>
+        <p:txBody>
+          <a:bodyPr wrap="none" lIns="0" tIns="0" rIns="0" bIns="0" anchor="t" anchorCtr="0">
+            <a:spAutoFit/>
+          </a:bodyPr>
+          <a:lstStyle/>
+          <a:p>
+            <a:pPr algn="l"/>
+            <a:r>
+              <a:rPr lang="zh-CN" sz="1050" dirty="0">
+                <a:solidFill>
+                  <a:srgbClr val="6E6E6E"/>
+                </a:solidFill>
+                <a:latin typeface="Inter"/>
+                <a:ea typeface="Microsoft YaHei"/>
+                <a:cs typeface="Inter"/>
+              </a:rPr>
+              <a:t>年停机损失</a:t>
+            </a:r>
+          </a:p>
+        </p:txBody>
+      </p:sp>
+      <p:sp>
+        <p:nvSpPr>
+          <p:cNvPr id="30" name="Ellipse 30"/>
+          <p:cNvSpPr/>
+          <p:nvPr/>
+        </p:nvSpPr>
+        <p:spPr>
+          <a:xfrm>
+            <a:off x="2686050" y="3267075"/>
+            <a:ext cx="76200" cy="76200"/>
+          </a:xfrm>
+          <a:prstGeom prst="ellipse">
+            <a:avLst/>
+          </a:prstGeom>
+          <a:solidFill>
+            <a:srgbClr val="9E3D31"/>
+          </a:solidFill>
+          <a:ln>
+            <a:noFill/>
+          </a:ln>
+        </p:spPr>
+      </p:sp>
+      <p:sp>
+        <p:nvSpPr>
+          <p:cNvPr id="31" name="TextBox 31"/>
+          <p:cNvSpPr txBox="1"/>
+          <p:nvPr/>
+        </p:nvSpPr>
+        <p:spPr>
+          <a:xfrm>
+            <a:off x="2860358" y="3215164"/>
+            <a:ext cx="684133" cy="259080"/>
+          </a:xfrm>
+          <a:prstGeom prst="rect">
+            <a:avLst/>
+          </a:prstGeom>
+          <a:noFill/>
+          <a:ln>
+            <a:noFill/>
+          </a:ln>
+        </p:spPr>
+        <p:txBody>
+          <a:bodyPr wrap="none" lIns="0" tIns="0" rIns="0" bIns="0" anchor="t" anchorCtr="0">
+            <a:spAutoFit/>
+          </a:bodyPr>
+          <a:lstStyle/>
+          <a:p>
+            <a:pPr algn="l"/>
+            <a:r>
+              <a:rPr lang="zh-CN" sz="1275" dirty="0">
+                <a:solidFill>
+                  <a:srgbClr val="262626"/>
+                </a:solidFill>
+                <a:latin typeface="Inter"/>
+                <a:ea typeface="Microsoft YaHei"/>
+                <a:cs typeface="Inter"/>
+              </a:rPr>
+              <a:t>¥420 万</a:t>
+            </a:r>
+          </a:p>
+        </p:txBody>
+      </p:sp>
+      <p:sp>
+        <p:nvSpPr>
+          <p:cNvPr id="32" name="TextBox 32"/>
+          <p:cNvSpPr txBox="1"/>
+          <p:nvPr/>
+        </p:nvSpPr>
+        <p:spPr>
+          <a:xfrm>
+            <a:off x="6654165" y="3239452"/>
+            <a:ext cx="793432" cy="213360"/>
+          </a:xfrm>
+          <a:prstGeom prst="rect">
+            <a:avLst/>
+          </a:prstGeom>
+          <a:noFill/>
+          <a:ln>
+            <a:noFill/>
+          </a:ln>
+        </p:spPr>
+        <p:txBody>
+          <a:bodyPr wrap="none" lIns="0" tIns="0" rIns="0" bIns="0" anchor="t" anchorCtr="0">
+            <a:spAutoFit/>
+          </a:bodyPr>
+          <a:lstStyle/>
+          <a:p>
+            <a:pPr algn="l"/>
+            <a:r>
+              <a:rPr lang="zh-CN" sz="1050" dirty="0">
+                <a:solidFill>
+                  <a:srgbClr val="6E6E6E"/>
+                </a:solidFill>
+                <a:latin typeface="Inter"/>
+                <a:ea typeface="Microsoft YaHei"/>
+                <a:cs typeface="Inter"/>
+              </a:rPr>
+              <a:t>年停机损失</a:t>
+            </a:r>
+          </a:p>
+        </p:txBody>
+      </p:sp>
+      <p:sp>
+        <p:nvSpPr>
+          <p:cNvPr id="33" name="Ellipse 33"/>
+          <p:cNvSpPr/>
+          <p:nvPr/>
+        </p:nvSpPr>
+        <p:spPr>
+          <a:xfrm>
+            <a:off x="8686800" y="3267075"/>
+            <a:ext cx="76200" cy="76200"/>
+          </a:xfrm>
+          <a:prstGeom prst="ellipse">
+            <a:avLst/>
+          </a:prstGeom>
+          <a:solidFill>
+            <a:srgbClr val="5A7A60"/>
+          </a:solidFill>
+          <a:ln>
+            <a:noFill/>
+          </a:ln>
+        </p:spPr>
+      </p:sp>
+      <p:sp>
+        <p:nvSpPr>
+          <p:cNvPr id="34" name="TextBox 34"/>
+          <p:cNvSpPr txBox="1"/>
+          <p:nvPr/>
+        </p:nvSpPr>
+        <p:spPr>
+          <a:xfrm>
+            <a:off x="8861108" y="3215164"/>
+            <a:ext cx="926211" cy="259080"/>
+          </a:xfrm>
+          <a:prstGeom prst="rect">
+            <a:avLst/>
+          </a:prstGeom>
+          <a:noFill/>
+          <a:ln>
+            <a:noFill/>
+          </a:ln>
+        </p:spPr>
+        <p:txBody>
+          <a:bodyPr wrap="none" lIns="0" tIns="0" rIns="0" bIns="0" anchor="t" anchorCtr="0">
+            <a:spAutoFit/>
+          </a:bodyPr>
+          <a:lstStyle/>
+          <a:p>
+            <a:pPr algn="l"/>
+            <a:r>
+              <a:rPr lang="zh-CN" sz="1275" dirty="0">
+                <a:solidFill>
+                  <a:srgbClr val="262626"/>
+                </a:solidFill>
+                <a:latin typeface="Inter"/>
+                <a:ea typeface="Microsoft YaHei"/>
+                <a:cs typeface="Inter"/>
+              </a:rPr>
+              <a:t>省 ¥340 万</a:t>
+            </a:r>
+          </a:p>
+        </p:txBody>
+      </p:sp>
+      <p:sp>
+        <p:nvSpPr>
+          <p:cNvPr id="35" name="Line 35"/>
+          <p:cNvSpPr/>
+          <p:nvPr/>
+        </p:nvSpPr>
+        <p:spPr>
+          <a:xfrm>
+            <a:off x="666750" y="3524250"/>
+            <a:ext cx="5048250" cy="9525"/>
+          </a:xfrm>
+          <a:custGeom>
+            <a:avLst/>
+            <a:gdLst/>
+            <a:ahLst/>
+            <a:cxnLst/>
+            <a:rect l="l" t="t" r="r" b="b"/>
+            <a:pathLst>
+              <a:path w="5048250" h="9525">
+                <a:moveTo>
+                  <a:pt x="0" y="0"/>
+                </a:moveTo>
+                <a:lnTo>
+                  <a:pt x="5048250" y="0"/>
+                </a:lnTo>
+              </a:path>
+            </a:pathLst>
+          </a:custGeom>
+          <a:noFill/>
+          <a:ln w="7144">
+            <a:solidFill>
+              <a:srgbClr val="E7E7E7"/>
+            </a:solidFill>
+          </a:ln>
+        </p:spPr>
+      </p:sp>
+      <p:sp>
+        <p:nvSpPr>
+          <p:cNvPr id="36" name="Line 36"/>
+          <p:cNvSpPr/>
+          <p:nvPr/>
+        </p:nvSpPr>
+        <p:spPr>
+          <a:xfrm>
+            <a:off x="6667500" y="3524250"/>
+            <a:ext cx="4914900" cy="9525"/>
+          </a:xfrm>
+          <a:custGeom>
+            <a:avLst/>
+            <a:gdLst/>
+            <a:ahLst/>
+            <a:cxnLst/>
+            <a:rect l="l" t="t" r="r" b="b"/>
+            <a:pathLst>
+              <a:path w="4914900" h="9525">
+                <a:moveTo>
+                  <a:pt x="0" y="0"/>
+                </a:moveTo>
+                <a:lnTo>
+                  <a:pt x="4914900" y="0"/>
+                </a:lnTo>
+              </a:path>
+            </a:pathLst>
+          </a:custGeom>
+          <a:noFill/>
+          <a:ln w="7144">
+            <a:solidFill>
+              <a:srgbClr val="E7E7E7"/>
+            </a:solidFill>
+          </a:ln>
+        </p:spPr>
+      </p:sp>
+      <p:sp>
+        <p:nvSpPr>
+          <p:cNvPr id="37" name="TextBox 37"/>
+          <p:cNvSpPr txBox="1"/>
+          <p:nvPr/>
+        </p:nvSpPr>
+        <p:spPr>
+          <a:xfrm>
+            <a:off x="653415" y="3772852"/>
+            <a:ext cx="640080" cy="213360"/>
+          </a:xfrm>
+          <a:prstGeom prst="rect">
+            <a:avLst/>
+          </a:prstGeom>
+          <a:noFill/>
+          <a:ln>
+            <a:noFill/>
+          </a:ln>
+        </p:spPr>
+        <p:txBody>
+          <a:bodyPr wrap="none" lIns="0" tIns="0" rIns="0" bIns="0" anchor="t" anchorCtr="0">
+            <a:spAutoFit/>
+          </a:bodyPr>
+          <a:lstStyle/>
+          <a:p>
+            <a:pPr algn="l"/>
+            <a:r>
+              <a:rPr lang="zh-CN" sz="1050" dirty="0">
+                <a:solidFill>
+                  <a:srgbClr val="6E6E6E"/>
+                </a:solidFill>
+                <a:latin typeface="Inter"/>
+                <a:ea typeface="Microsoft YaHei"/>
+                <a:cs typeface="Inter"/>
+              </a:rPr>
+              <a:t>效率趋势</a:t>
+            </a:r>
+          </a:p>
+        </p:txBody>
+      </p:sp>
+      <p:sp>
+        <p:nvSpPr>
+          <p:cNvPr id="38" name="Ellipse 38"/>
+          <p:cNvSpPr/>
+          <p:nvPr/>
+        </p:nvSpPr>
+        <p:spPr>
+          <a:xfrm>
+            <a:off x="2686050" y="3800475"/>
+            <a:ext cx="76200" cy="76200"/>
+          </a:xfrm>
+          <a:prstGeom prst="ellipse">
+            <a:avLst/>
+          </a:prstGeom>
+          <a:solidFill>
+            <a:srgbClr val="9E3D31"/>
+          </a:solidFill>
+          <a:ln>
+            <a:noFill/>
+          </a:ln>
+        </p:spPr>
+      </p:sp>
+      <p:sp>
+        <p:nvSpPr>
+          <p:cNvPr id="39" name="TextBox 39"/>
+          <p:cNvSpPr txBox="1"/>
+          <p:nvPr/>
+        </p:nvSpPr>
+        <p:spPr>
+          <a:xfrm>
+            <a:off x="2860358" y="3748564"/>
+            <a:ext cx="777240" cy="259080"/>
+          </a:xfrm>
+          <a:prstGeom prst="rect">
+            <a:avLst/>
+          </a:prstGeom>
+          <a:noFill/>
+          <a:ln>
+            <a:noFill/>
+          </a:ln>
+        </p:spPr>
+        <p:txBody>
+          <a:bodyPr wrap="none" lIns="0" tIns="0" rIns="0" bIns="0" anchor="t" anchorCtr="0">
+            <a:spAutoFit/>
+          </a:bodyPr>
+          <a:lstStyle/>
+          <a:p>
+            <a:pPr algn="l"/>
+            <a:r>
+              <a:rPr lang="zh-CN" sz="1275" dirty="0">
+                <a:solidFill>
+                  <a:srgbClr val="262626"/>
+                </a:solidFill>
+                <a:latin typeface="Inter"/>
+                <a:ea typeface="Microsoft YaHei"/>
+                <a:cs typeface="Inter"/>
+              </a:rPr>
+              <a:t>持续下滑</a:t>
+            </a:r>
+          </a:p>
+        </p:txBody>
+      </p:sp>
+      <p:sp>
+        <p:nvSpPr>
+          <p:cNvPr id="40" name="TextBox 40"/>
+          <p:cNvSpPr txBox="1"/>
+          <p:nvPr/>
+        </p:nvSpPr>
+        <p:spPr>
+          <a:xfrm>
+            <a:off x="6654165" y="3772852"/>
+            <a:ext cx="640080" cy="213360"/>
+          </a:xfrm>
+          <a:prstGeom prst="rect">
+            <a:avLst/>
+          </a:prstGeom>
+          <a:noFill/>
+          <a:ln>
+            <a:noFill/>
+          </a:ln>
+        </p:spPr>
+        <p:txBody>
+          <a:bodyPr wrap="none" lIns="0" tIns="0" rIns="0" bIns="0" anchor="t" anchorCtr="0">
+            <a:spAutoFit/>
+          </a:bodyPr>
+          <a:lstStyle/>
+          <a:p>
+            <a:pPr algn="l"/>
+            <a:r>
+              <a:rPr lang="zh-CN" sz="1050" dirty="0">
+                <a:solidFill>
+                  <a:srgbClr val="6E6E6E"/>
+                </a:solidFill>
+                <a:latin typeface="Inter"/>
+                <a:ea typeface="Microsoft YaHei"/>
+                <a:cs typeface="Inter"/>
+              </a:rPr>
+              <a:t>效率趋势</a:t>
+            </a:r>
+          </a:p>
+        </p:txBody>
+      </p:sp>
+      <p:sp>
+        <p:nvSpPr>
+          <p:cNvPr id="41" name="Ellipse 41"/>
+          <p:cNvSpPr/>
+          <p:nvPr/>
+        </p:nvSpPr>
+        <p:spPr>
+          <a:xfrm>
+            <a:off x="8686800" y="3800475"/>
+            <a:ext cx="76200" cy="76200"/>
+          </a:xfrm>
+          <a:prstGeom prst="ellipse">
+            <a:avLst/>
+          </a:prstGeom>
+          <a:solidFill>
+            <a:srgbClr val="5A7A60"/>
+          </a:solidFill>
+          <a:ln>
+            <a:noFill/>
+          </a:ln>
+        </p:spPr>
+      </p:sp>
+      <p:sp>
+        <p:nvSpPr>
+          <p:cNvPr id="42" name="TextBox 42"/>
+          <p:cNvSpPr txBox="1"/>
+          <p:nvPr/>
+        </p:nvSpPr>
+        <p:spPr>
+          <a:xfrm>
+            <a:off x="8861108" y="3748564"/>
+            <a:ext cx="805172" cy="259080"/>
+          </a:xfrm>
+          <a:prstGeom prst="rect">
+            <a:avLst/>
+          </a:prstGeom>
+          <a:noFill/>
+          <a:ln>
+            <a:noFill/>
+          </a:ln>
+        </p:spPr>
+        <p:txBody>
+          <a:bodyPr wrap="none" lIns="0" tIns="0" rIns="0" bIns="0" anchor="t" anchorCtr="0">
+            <a:spAutoFit/>
+          </a:bodyPr>
+          <a:lstStyle/>
+          <a:p>
+            <a:pPr algn="l"/>
+            <a:r>
+              <a:rPr lang="zh-CN" sz="1275" dirty="0">
+                <a:solidFill>
+                  <a:srgbClr val="262626"/>
+                </a:solidFill>
+                <a:latin typeface="Inter"/>
+                <a:ea typeface="Microsoft YaHei"/>
+                <a:cs typeface="Inter"/>
+              </a:rPr>
+              <a:t>12 周回本</a:t>
+            </a:r>
+          </a:p>
+        </p:txBody>
+      </p:sp>
+      <p:sp>
+        <p:nvSpPr>
+          <p:cNvPr id="43" name="Line 43"/>
+          <p:cNvSpPr/>
+          <p:nvPr/>
+        </p:nvSpPr>
+        <p:spPr>
+          <a:xfrm>
+            <a:off x="666750" y="4057650"/>
+            <a:ext cx="5048250" cy="9525"/>
+          </a:xfrm>
+          <a:custGeom>
+            <a:avLst/>
+            <a:gdLst/>
+            <a:ahLst/>
+            <a:cxnLst/>
+            <a:rect l="l" t="t" r="r" b="b"/>
+            <a:pathLst>
+              <a:path w="5048250" h="9525">
+                <a:moveTo>
+                  <a:pt x="0" y="0"/>
+                </a:moveTo>
+                <a:lnTo>
+                  <a:pt x="5048250" y="0"/>
+                </a:lnTo>
+              </a:path>
+            </a:pathLst>
+          </a:custGeom>
+          <a:noFill/>
+          <a:ln w="7144">
+            <a:solidFill>
+              <a:srgbClr val="E7E7E7"/>
+            </a:solidFill>
+          </a:ln>
+        </p:spPr>
+      </p:sp>
+      <p:sp>
+        <p:nvSpPr>
+          <p:cNvPr id="44" name="Line 44"/>
+          <p:cNvSpPr/>
+          <p:nvPr/>
+        </p:nvSpPr>
+        <p:spPr>
+          <a:xfrm>
+            <a:off x="6667500" y="4057650"/>
+            <a:ext cx="4914900" cy="9525"/>
+          </a:xfrm>
+          <a:custGeom>
+            <a:avLst/>
+            <a:gdLst/>
+            <a:ahLst/>
+            <a:cxnLst/>
+            <a:rect l="l" t="t" r="r" b="b"/>
+            <a:pathLst>
+              <a:path w="4914900" h="9525">
+                <a:moveTo>
+                  <a:pt x="0" y="0"/>
+                </a:moveTo>
+                <a:lnTo>
+                  <a:pt x="4914900" y="0"/>
+                </a:lnTo>
+              </a:path>
+            </a:pathLst>
+          </a:custGeom>
+          <a:noFill/>
+          <a:ln w="7144">
+            <a:solidFill>
+              <a:srgbClr val="E7E7E7"/>
+            </a:solidFill>
+          </a:ln>
+        </p:spPr>
+      </p:sp>
+      <p:sp>
+        <p:nvSpPr>
+          <p:cNvPr id="45" name="TextBox 45"/>
+          <p:cNvSpPr txBox="1"/>
+          <p:nvPr/>
+        </p:nvSpPr>
+        <p:spPr>
+          <a:xfrm>
+            <a:off x="653415" y="4306252"/>
+            <a:ext cx="640080" cy="213360"/>
+          </a:xfrm>
+          <a:prstGeom prst="rect">
+            <a:avLst/>
+          </a:prstGeom>
+          <a:noFill/>
+          <a:ln>
+            <a:noFill/>
+          </a:ln>
+        </p:spPr>
+        <p:txBody>
+          <a:bodyPr wrap="none" lIns="0" tIns="0" rIns="0" bIns="0" anchor="t" anchorCtr="0">
+            <a:spAutoFit/>
+          </a:bodyPr>
+          <a:lstStyle/>
+          <a:p>
+            <a:pPr algn="l"/>
+            <a:r>
+              <a:rPr lang="zh-CN" sz="1050" dirty="0">
+                <a:solidFill>
+                  <a:srgbClr val="6E6E6E"/>
+                </a:solidFill>
+                <a:latin typeface="Inter"/>
+                <a:ea typeface="Microsoft YaHei"/>
+                <a:cs typeface="Inter"/>
+              </a:rPr>
+              <a:t>实施风险</a:t>
+            </a:r>
+          </a:p>
+        </p:txBody>
+      </p:sp>
+      <p:sp>
+        <p:nvSpPr>
+          <p:cNvPr id="46" name="Ellipse 46"/>
+          <p:cNvSpPr/>
+          <p:nvPr/>
+        </p:nvSpPr>
+        <p:spPr>
+          <a:xfrm>
+            <a:off x="2686050" y="4333875"/>
+            <a:ext cx="76200" cy="76200"/>
+          </a:xfrm>
+          <a:prstGeom prst="ellipse">
+            <a:avLst/>
+          </a:prstGeom>
+          <a:solidFill>
+            <a:srgbClr val="8A7333"/>
+          </a:solidFill>
+          <a:ln>
+            <a:noFill/>
+          </a:ln>
+        </p:spPr>
+      </p:sp>
+      <p:sp>
+        <p:nvSpPr>
+          <p:cNvPr id="47" name="TextBox 47"/>
+          <p:cNvSpPr txBox="1"/>
+          <p:nvPr/>
+        </p:nvSpPr>
+        <p:spPr>
+          <a:xfrm>
+            <a:off x="2860358" y="4281964"/>
+            <a:ext cx="777240" cy="259080"/>
+          </a:xfrm>
+          <a:prstGeom prst="rect">
+            <a:avLst/>
+          </a:prstGeom>
+          <a:noFill/>
+          <a:ln>
+            <a:noFill/>
+          </a:ln>
+        </p:spPr>
+        <p:txBody>
+          <a:bodyPr wrap="none" lIns="0" tIns="0" rIns="0" bIns="0" anchor="t" anchorCtr="0">
+            <a:spAutoFit/>
+          </a:bodyPr>
+          <a:lstStyle/>
+          <a:p>
+            <a:pPr algn="l"/>
+            <a:r>
+              <a:rPr lang="zh-CN" sz="1275" dirty="0">
+                <a:solidFill>
+                  <a:srgbClr val="262626"/>
+                </a:solidFill>
+                <a:latin typeface="Inter"/>
+                <a:ea typeface="Microsoft YaHei"/>
+                <a:cs typeface="Inter"/>
+              </a:rPr>
+              <a:t>风险累积</a:t>
+            </a:r>
+          </a:p>
+        </p:txBody>
+      </p:sp>
+      <p:sp>
+        <p:nvSpPr>
+          <p:cNvPr id="48" name="TextBox 48"/>
+          <p:cNvSpPr txBox="1"/>
+          <p:nvPr/>
+        </p:nvSpPr>
+        <p:spPr>
+          <a:xfrm>
+            <a:off x="6654165" y="4306252"/>
+            <a:ext cx="640080" cy="213360"/>
+          </a:xfrm>
+          <a:prstGeom prst="rect">
+            <a:avLst/>
+          </a:prstGeom>
+          <a:noFill/>
+          <a:ln>
+            <a:noFill/>
+          </a:ln>
+        </p:spPr>
+        <p:txBody>
+          <a:bodyPr wrap="none" lIns="0" tIns="0" rIns="0" bIns="0" anchor="t" anchorCtr="0">
+            <a:spAutoFit/>
+          </a:bodyPr>
+          <a:lstStyle/>
+          <a:p>
+            <a:pPr algn="l"/>
+            <a:r>
+              <a:rPr lang="zh-CN" sz="1050" dirty="0">
+                <a:solidFill>
+                  <a:srgbClr val="6E6E6E"/>
+                </a:solidFill>
+                <a:latin typeface="Inter"/>
+                <a:ea typeface="Microsoft YaHei"/>
+                <a:cs typeface="Inter"/>
+              </a:rPr>
+              <a:t>实施风险</a:t>
+            </a:r>
+          </a:p>
+        </p:txBody>
+      </p:sp>
+      <p:sp>
+        <p:nvSpPr>
+          <p:cNvPr id="49" name="Ellipse 49"/>
+          <p:cNvSpPr/>
+          <p:nvPr/>
+        </p:nvSpPr>
+        <p:spPr>
+          <a:xfrm>
+            <a:off x="8686800" y="4333875"/>
+            <a:ext cx="76200" cy="76200"/>
+          </a:xfrm>
+          <a:prstGeom prst="ellipse">
+            <a:avLst/>
+          </a:prstGeom>
+          <a:solidFill>
+            <a:srgbClr val="5A7A60"/>
+          </a:solidFill>
+          <a:ln>
+            <a:noFill/>
+          </a:ln>
+        </p:spPr>
+      </p:sp>
+      <p:sp>
+        <p:nvSpPr>
+          <p:cNvPr id="50" name="TextBox 50"/>
+          <p:cNvSpPr txBox="1"/>
+          <p:nvPr/>
+        </p:nvSpPr>
+        <p:spPr>
+          <a:xfrm>
+            <a:off x="8861108" y="4281964"/>
+            <a:ext cx="777240" cy="259080"/>
+          </a:xfrm>
+          <a:prstGeom prst="rect">
+            <a:avLst/>
+          </a:prstGeom>
+          <a:noFill/>
+          <a:ln>
+            <a:noFill/>
+          </a:ln>
+        </p:spPr>
+        <p:txBody>
+          <a:bodyPr wrap="none" lIns="0" tIns="0" rIns="0" bIns="0" anchor="t" anchorCtr="0">
+            <a:spAutoFit/>
+          </a:bodyPr>
+          <a:lstStyle/>
+          <a:p>
+            <a:pPr algn="l"/>
+            <a:r>
+              <a:rPr lang="zh-CN" sz="1275" dirty="0">
+                <a:solidFill>
+                  <a:srgbClr val="262626"/>
+                </a:solidFill>
+                <a:latin typeface="Inter"/>
+                <a:ea typeface="Microsoft YaHei"/>
+                <a:cs typeface="Inter"/>
+              </a:rPr>
+              <a:t>中等可控</a:t>
+            </a:r>
+          </a:p>
+        </p:txBody>
+      </p:sp>
+      <p:sp>
+        <p:nvSpPr>
+          <p:cNvPr id="51" name="Line 51"/>
+          <p:cNvSpPr/>
+          <p:nvPr/>
+        </p:nvSpPr>
+        <p:spPr>
+          <a:xfrm>
+            <a:off x="666750" y="4591050"/>
+            <a:ext cx="5048250" cy="9525"/>
+          </a:xfrm>
+          <a:custGeom>
+            <a:avLst/>
+            <a:gdLst/>
+            <a:ahLst/>
+            <a:cxnLst/>
+            <a:rect l="l" t="t" r="r" b="b"/>
+            <a:pathLst>
+              <a:path w="5048250" h="9525">
+                <a:moveTo>
+                  <a:pt x="0" y="0"/>
+                </a:moveTo>
+                <a:lnTo>
+                  <a:pt x="5048250" y="0"/>
+                </a:lnTo>
+              </a:path>
+            </a:pathLst>
+          </a:custGeom>
+          <a:noFill/>
+          <a:ln w="7144">
+            <a:solidFill>
+              <a:srgbClr val="E7E7E7"/>
+            </a:solidFill>
+          </a:ln>
+        </p:spPr>
+      </p:sp>
+      <p:sp>
+        <p:nvSpPr>
+          <p:cNvPr id="52" name="Line 52"/>
+          <p:cNvSpPr/>
+          <p:nvPr/>
+        </p:nvSpPr>
+        <p:spPr>
+          <a:xfrm>
+            <a:off x="6667500" y="4591050"/>
+            <a:ext cx="4914900" cy="9525"/>
+          </a:xfrm>
+          <a:custGeom>
+            <a:avLst/>
+            <a:gdLst/>
+            <a:ahLst/>
+            <a:cxnLst/>
+            <a:rect l="l" t="t" r="r" b="b"/>
+            <a:pathLst>
+              <a:path w="4914900" h="9525">
+                <a:moveTo>
+                  <a:pt x="0" y="0"/>
+                </a:moveTo>
+                <a:lnTo>
+                  <a:pt x="4914900" y="0"/>
+                </a:lnTo>
+              </a:path>
+            </a:pathLst>
+          </a:custGeom>
+          <a:noFill/>
+          <a:ln w="7144">
+            <a:solidFill>
+              <a:srgbClr val="E7E7E7"/>
+            </a:solidFill>
+          </a:ln>
+        </p:spPr>
+      </p:sp>
+      <p:sp>
+        <p:nvSpPr>
+          <p:cNvPr id="53" name="TextBox 53"/>
+          <p:cNvSpPr txBox="1"/>
+          <p:nvPr/>
+        </p:nvSpPr>
+        <p:spPr>
+          <a:xfrm>
+            <a:off x="653415" y="4839652"/>
+            <a:ext cx="663083" cy="213360"/>
+          </a:xfrm>
+          <a:prstGeom prst="rect">
+            <a:avLst/>
+          </a:prstGeom>
+          <a:noFill/>
+          <a:ln>
+            <a:noFill/>
+          </a:ln>
+        </p:spPr>
+        <p:txBody>
+          <a:bodyPr wrap="none" lIns="0" tIns="0" rIns="0" bIns="0" anchor="t" anchorCtr="0">
+            <a:spAutoFit/>
+          </a:bodyPr>
+          <a:lstStyle/>
+          <a:p>
+            <a:pPr algn="l"/>
+            <a:r>
+              <a:rPr lang="zh-CN" sz="1050" dirty="0">
+                <a:solidFill>
+                  <a:srgbClr val="6E6E6E"/>
+                </a:solidFill>
+                <a:latin typeface="Inter"/>
+                <a:ea typeface="Microsoft YaHei"/>
+                <a:cs typeface="Inter"/>
+              </a:rPr>
+              <a:t>12 个月后</a:t>
+            </a:r>
+          </a:p>
+        </p:txBody>
+      </p:sp>
+      <p:sp>
+        <p:nvSpPr>
+          <p:cNvPr id="54" name="Ellipse 54"/>
+          <p:cNvSpPr/>
+          <p:nvPr/>
+        </p:nvSpPr>
+        <p:spPr>
+          <a:xfrm>
+            <a:off x="2686050" y="4867275"/>
+            <a:ext cx="76200" cy="76200"/>
+          </a:xfrm>
+          <a:prstGeom prst="ellipse">
+            <a:avLst/>
+          </a:prstGeom>
+          <a:solidFill>
+            <a:srgbClr val="9E3D31"/>
+          </a:solidFill>
+          <a:ln>
+            <a:noFill/>
+          </a:ln>
+        </p:spPr>
+      </p:sp>
+      <p:sp>
+        <p:nvSpPr>
+          <p:cNvPr id="55" name="TextBox 55"/>
+          <p:cNvSpPr txBox="1"/>
+          <p:nvPr/>
+        </p:nvSpPr>
+        <p:spPr>
+          <a:xfrm>
+            <a:off x="2860358" y="4815364"/>
+            <a:ext cx="963454" cy="259080"/>
+          </a:xfrm>
+          <a:prstGeom prst="rect">
+            <a:avLst/>
+          </a:prstGeom>
+          <a:noFill/>
+          <a:ln>
+            <a:noFill/>
+          </a:ln>
+        </p:spPr>
+        <p:txBody>
+          <a:bodyPr wrap="none" lIns="0" tIns="0" rIns="0" bIns="0" anchor="t" anchorCtr="0">
+            <a:spAutoFit/>
+          </a:bodyPr>
+          <a:lstStyle/>
+          <a:p>
+            <a:pPr algn="l"/>
+            <a:r>
+              <a:rPr lang="zh-CN" sz="1275" dirty="0">
+                <a:solidFill>
+                  <a:srgbClr val="262626"/>
+                </a:solidFill>
+                <a:latin typeface="Inter"/>
+                <a:ea typeface="Microsoft YaHei"/>
+                <a:cs typeface="Inter"/>
+              </a:rPr>
+              <a:t>进一步恶化</a:t>
+            </a:r>
+          </a:p>
+        </p:txBody>
+      </p:sp>
+      <p:sp>
+        <p:nvSpPr>
+          <p:cNvPr id="56" name="TextBox 56"/>
+          <p:cNvSpPr txBox="1"/>
+          <p:nvPr/>
+        </p:nvSpPr>
+        <p:spPr>
+          <a:xfrm>
+            <a:off x="6654165" y="4839652"/>
+            <a:ext cx="663083" cy="213360"/>
+          </a:xfrm>
+          <a:prstGeom prst="rect">
+            <a:avLst/>
+          </a:prstGeom>
+          <a:noFill/>
+          <a:ln>
+            <a:noFill/>
+          </a:ln>
+        </p:spPr>
+        <p:txBody>
+          <a:bodyPr wrap="none" lIns="0" tIns="0" rIns="0" bIns="0" anchor="t" anchorCtr="0">
+            <a:spAutoFit/>
+          </a:bodyPr>
+          <a:lstStyle/>
+          <a:p>
+            <a:pPr algn="l"/>
+            <a:r>
+              <a:rPr lang="zh-CN" sz="1050" dirty="0">
+                <a:solidFill>
+                  <a:srgbClr val="6E6E6E"/>
+                </a:solidFill>
+                <a:latin typeface="Inter"/>
+                <a:ea typeface="Microsoft YaHei"/>
+                <a:cs typeface="Inter"/>
+              </a:rPr>
+              <a:t>12 个月后</a:t>
+            </a:r>
+          </a:p>
+        </p:txBody>
+      </p:sp>
+      <p:sp>
+        <p:nvSpPr>
+          <p:cNvPr id="57" name="Ellipse 57"/>
+          <p:cNvSpPr/>
+          <p:nvPr/>
+        </p:nvSpPr>
+        <p:spPr>
+          <a:xfrm>
+            <a:off x="8686800" y="4867275"/>
+            <a:ext cx="76200" cy="76200"/>
+          </a:xfrm>
+          <a:prstGeom prst="ellipse">
+            <a:avLst/>
+          </a:prstGeom>
+          <a:solidFill>
+            <a:srgbClr val="5A7A60"/>
+          </a:solidFill>
+          <a:ln>
+            <a:noFill/>
+          </a:ln>
+        </p:spPr>
+      </p:sp>
+      <p:sp>
+        <p:nvSpPr>
+          <p:cNvPr id="58" name="TextBox 58"/>
+          <p:cNvSpPr txBox="1"/>
+          <p:nvPr/>
+        </p:nvSpPr>
+        <p:spPr>
+          <a:xfrm>
+            <a:off x="8861108" y="4815364"/>
+            <a:ext cx="1149668" cy="259080"/>
+          </a:xfrm>
+          <a:prstGeom prst="rect">
+            <a:avLst/>
+          </a:prstGeom>
+          <a:noFill/>
+          <a:ln>
+            <a:noFill/>
+          </a:ln>
+        </p:spPr>
+        <p:txBody>
+          <a:bodyPr wrap="none" lIns="0" tIns="0" rIns="0" bIns="0" anchor="t" anchorCtr="0">
+            <a:spAutoFit/>
+          </a:bodyPr>
+          <a:lstStyle/>
+          <a:p>
+            <a:pPr algn="l"/>
+            <a:r>
+              <a:rPr lang="zh-CN" sz="1275" dirty="0">
+                <a:solidFill>
+                  <a:srgbClr val="262626"/>
+                </a:solidFill>
+                <a:latin typeface="Inter"/>
+                <a:ea typeface="Microsoft YaHei"/>
+                <a:cs typeface="Inter"/>
+              </a:rPr>
+              <a:t>进入良性循环</a:t>
+            </a:r>
+          </a:p>
+        </p:txBody>
+      </p:sp>
+      <p:sp>
+        <p:nvSpPr>
+          <p:cNvPr id="59" name="Line 59"/>
+          <p:cNvSpPr/>
+          <p:nvPr/>
+        </p:nvSpPr>
+        <p:spPr>
+          <a:xfrm>
+            <a:off x="666750" y="5124450"/>
+            <a:ext cx="5048250" cy="9525"/>
+          </a:xfrm>
+          <a:custGeom>
+            <a:avLst/>
+            <a:gdLst/>
+            <a:ahLst/>
+            <a:cxnLst/>
+            <a:rect l="l" t="t" r="r" b="b"/>
+            <a:pathLst>
+              <a:path w="5048250" h="9525">
+                <a:moveTo>
+                  <a:pt x="0" y="0"/>
+                </a:moveTo>
+                <a:lnTo>
+                  <a:pt x="5048250" y="0"/>
+                </a:lnTo>
+              </a:path>
+            </a:pathLst>
+          </a:custGeom>
+          <a:noFill/>
+          <a:ln w="7144">
+            <a:solidFill>
+              <a:srgbClr val="E7E7E7"/>
+            </a:solidFill>
+          </a:ln>
+        </p:spPr>
+      </p:sp>
+      <p:sp>
+        <p:nvSpPr>
+          <p:cNvPr id="60" name="Line 60"/>
+          <p:cNvSpPr/>
+          <p:nvPr/>
+        </p:nvSpPr>
+        <p:spPr>
+          <a:xfrm>
+            <a:off x="6667500" y="5124450"/>
+            <a:ext cx="4914900" cy="9525"/>
+          </a:xfrm>
+          <a:custGeom>
+            <a:avLst/>
+            <a:gdLst/>
+            <a:ahLst/>
+            <a:cxnLst/>
+            <a:rect l="l" t="t" r="r" b="b"/>
+            <a:pathLst>
+              <a:path w="4914900" h="9525">
+                <a:moveTo>
+                  <a:pt x="0" y="0"/>
+                </a:moveTo>
+                <a:lnTo>
+                  <a:pt x="4914900" y="0"/>
+                </a:lnTo>
+              </a:path>
+            </a:pathLst>
+          </a:custGeom>
+          <a:noFill/>
+          <a:ln w="7144">
+            <a:solidFill>
+              <a:srgbClr val="E7E7E7"/>
+            </a:solidFill>
+          </a:ln>
+        </p:spPr>
+      </p:sp>
+      <p:sp>
+        <p:nvSpPr>
+          <p:cNvPr id="61" name="Ellipse 61"/>
+          <p:cNvSpPr/>
+          <p:nvPr/>
+        </p:nvSpPr>
+        <p:spPr>
+          <a:xfrm>
+            <a:off x="390525" y="5934075"/>
+            <a:ext cx="57150" cy="57150"/>
+          </a:xfrm>
+          <a:prstGeom prst="ellipse">
+            <a:avLst/>
+          </a:prstGeom>
+          <a:solidFill>
+            <a:srgbClr val="336EE8"/>
+          </a:solidFill>
+          <a:ln>
+            <a:noFill/>
+          </a:ln>
+        </p:spPr>
+      </p:sp>
+      <p:sp>
+        <p:nvSpPr>
+          <p:cNvPr id="62" name="TextBox 62"/>
+          <p:cNvSpPr txBox="1"/>
+          <p:nvPr/>
+        </p:nvSpPr>
+        <p:spPr>
+          <a:xfrm>
+            <a:off x="557212" y="5898356"/>
+            <a:ext cx="5401389" cy="228600"/>
+          </a:xfrm>
+          <a:prstGeom prst="rect">
+            <a:avLst/>
+          </a:prstGeom>
+          <a:noFill/>
+          <a:ln>
+            <a:noFill/>
+          </a:ln>
+        </p:spPr>
+        <p:txBody>
+          <a:bodyPr wrap="none" lIns="0" tIns="0" rIns="0" bIns="0" anchor="t" anchorCtr="0">
+            <a:spAutoFit/>
+          </a:bodyPr>
+          <a:lstStyle/>
+          <a:p>
+            <a:pPr algn="l"/>
+            <a:r>
+              <a:rPr lang="zh-CN" sz="1125" dirty="0">
+                <a:solidFill>
+                  <a:srgbClr val="262626"/>
+                </a:solidFill>
+                <a:latin typeface="Inter"/>
+                <a:ea typeface="Microsoft YaHei"/>
+                <a:cs typeface="Inter"/>
+              </a:rPr>
+              <a:t>同样 12 周：要么继续亏 ¥420 万/年，要么省下 ¥340 万——选择显而易见。</a:t>
+            </a:r>
+          </a:p>
+        </p:txBody>
+      </p:sp>
+    </p:spTree>
+  </p:cSld>
+  <p:clrMapOvr>
+    <a:masterClrMapping/>
+  </p:clrMapOvr>
+</p:sld>
+</file>
+
+<file path=ppt/slides/slide11.xml><?xml version="1.0" encoding="utf-8"?>
+<p:sld xmlns:a="http://schemas.openxmlformats.org/drawingml/2006/main" xmlns:r="http://schemas.openxmlformats.org/officeDocument/2006/relationships" xmlns:p="http://schemas.openxmlformats.org/presentationml/2006/main">
+  <p:cSld>
+    <p:spTree>
+      <p:nvGrpSpPr>
+        <p:cNvPr id="1" name=""/>
+        <p:cNvGrpSpPr/>
+        <p:nvPr/>
+      </p:nvGrpSpPr>
+      <p:grpSpPr>
+        <a:xfrm>
+          <a:off x="0" y="0"/>
+          <a:ext cx="0" cy="0"/>
+          <a:chOff x="0" y="0"/>
+          <a:chExt cx="0" cy="0"/>
+        </a:xfrm>
+      </p:grpSpPr>
+      <p:sp>
+        <p:nvSpPr>
+          <p:cNvPr id="2" name="Rectangle 2"/>
+          <p:cNvSpPr/>
+          <p:nvPr/>
+        </p:nvSpPr>
+        <p:spPr>
+          <a:xfrm>
+            <a:off x="0" y="0"/>
+            <a:ext cx="12192000" cy="6858000"/>
+          </a:xfrm>
+          <a:prstGeom prst="rect">
+            <a:avLst/>
+          </a:prstGeom>
+          <a:solidFill>
+            <a:srgbClr val="1C1C1C"/>
+          </a:solidFill>
+          <a:ln>
+            <a:noFill/>
+          </a:ln>
+        </p:spPr>
+      </p:sp>
+      <p:sp>
+        <p:nvSpPr>
+          <p:cNvPr id="3" name="TextBox 3"/>
+          <p:cNvSpPr txBox="1"/>
+          <p:nvPr/>
+        </p:nvSpPr>
+        <p:spPr>
+          <a:xfrm>
+            <a:off x="368618" y="656749"/>
+            <a:ext cx="1270754" cy="198120"/>
+          </a:xfrm>
+          <a:prstGeom prst="rect">
+            <a:avLst/>
+          </a:prstGeom>
+          <a:noFill/>
+          <a:ln>
+            <a:noFill/>
+          </a:ln>
+        </p:spPr>
+        <p:txBody>
+          <a:bodyPr wrap="none" lIns="0" tIns="0" rIns="0" bIns="0" anchor="t" anchorCtr="0">
+            <a:spAutoFit/>
+          </a:bodyPr>
+          <a:lstStyle/>
+          <a:p>
+            <a:pPr algn="l"/>
+            <a:r>
+              <a:rPr lang="zh-CN" sz="975" dirty="0">
+                <a:solidFill>
+                  <a:srgbClr val="767676"/>
+                </a:solidFill>
+                <a:latin typeface="Inter"/>
+                <a:ea typeface="Microsoft YaHei"/>
+                <a:cs typeface="Inter"/>
+              </a:rPr>
+              <a:t>PART 03 — 改善方案</a:t>
+            </a:r>
+          </a:p>
+        </p:txBody>
+      </p:sp>
+      <p:sp>
+        <p:nvSpPr>
+          <p:cNvPr id="4" name="TextBox 4"/>
+          <p:cNvSpPr txBox="1"/>
+          <p:nvPr/>
+        </p:nvSpPr>
+        <p:spPr>
+          <a:xfrm>
+            <a:off x="339090" y="2806065"/>
+            <a:ext cx="4638389" cy="670560"/>
+          </a:xfrm>
+          <a:prstGeom prst="rect">
+            <a:avLst/>
+          </a:prstGeom>
+          <a:noFill/>
+          <a:ln>
+            <a:noFill/>
+          </a:ln>
+        </p:spPr>
+        <p:txBody>
+          <a:bodyPr wrap="none" lIns="0" tIns="0" rIns="0" bIns="0" anchor="t" anchorCtr="0">
+            <a:spAutoFit/>
+          </a:bodyPr>
+          <a:lstStyle/>
+          <a:p>
+            <a:pPr algn="l"/>
+            <a:r>
+              <a:rPr lang="zh-CN" sz="3300" b="1" dirty="0">
+                <a:solidFill>
+                  <a:srgbClr val="F5F5F5"/>
+                </a:solidFill>
+                <a:latin typeface="Inter"/>
+                <a:ea typeface="Microsoft YaHei"/>
+                <a:cs typeface="Inter"/>
+              </a:rPr>
+              <a:t>已经看清问题在哪，</a:t>
+            </a:r>
+          </a:p>
+        </p:txBody>
+      </p:sp>
+      <p:sp>
+        <p:nvSpPr>
+          <p:cNvPr id="5" name="TextBox 5"/>
+          <p:cNvSpPr txBox="1"/>
+          <p:nvPr/>
+        </p:nvSpPr>
+        <p:spPr>
+          <a:xfrm>
+            <a:off x="339090" y="3472815"/>
+            <a:ext cx="5650516" cy="670560"/>
+          </a:xfrm>
+          <a:prstGeom prst="rect">
+            <a:avLst/>
+          </a:prstGeom>
+          <a:noFill/>
+          <a:ln>
+            <a:noFill/>
+          </a:ln>
+        </p:spPr>
+        <p:txBody>
+          <a:bodyPr wrap="none" lIns="0" tIns="0" rIns="0" bIns="0" anchor="t" anchorCtr="0">
+            <a:spAutoFit/>
+          </a:bodyPr>
+          <a:lstStyle/>
+          <a:p>
+            <a:pPr algn="l"/>
+            <a:r>
+              <a:rPr lang="zh-CN" sz="3300" b="1" dirty="0">
+                <a:solidFill>
+                  <a:srgbClr val="F5F5F5"/>
+                </a:solidFill>
+                <a:latin typeface="Inter"/>
+                <a:ea typeface="Microsoft YaHei"/>
+                <a:cs typeface="Inter"/>
+              </a:rPr>
+              <a:t>接下来是怎么把它解决。</a:t>
+            </a:r>
+          </a:p>
+        </p:txBody>
+      </p:sp>
+      <p:sp>
+        <p:nvSpPr>
+          <p:cNvPr id="6" name="Rectangle 6"/>
+          <p:cNvSpPr/>
+          <p:nvPr/>
+        </p:nvSpPr>
+        <p:spPr>
+          <a:xfrm>
+            <a:off x="400050" y="4114800"/>
+            <a:ext cx="1104900" cy="28575"/>
+          </a:xfrm>
+          <a:prstGeom prst="rect">
+            <a:avLst/>
+          </a:prstGeom>
+          <a:solidFill>
+            <a:srgbClr val="5C8BED"/>
+          </a:solidFill>
+          <a:ln>
+            <a:noFill/>
+          </a:ln>
+        </p:spPr>
+      </p:sp>
+      <p:sp>
+        <p:nvSpPr>
+          <p:cNvPr id="7" name="TextBox 7"/>
+          <p:cNvSpPr txBox="1"/>
+          <p:nvPr/>
+        </p:nvSpPr>
+        <p:spPr>
+          <a:xfrm>
+            <a:off x="363855" y="4426268"/>
+            <a:ext cx="4450842" cy="274320"/>
+          </a:xfrm>
+          <a:prstGeom prst="rect">
+            <a:avLst/>
+          </a:prstGeom>
+          <a:noFill/>
+          <a:ln>
+            <a:noFill/>
+          </a:ln>
+        </p:spPr>
+        <p:txBody>
+          <a:bodyPr wrap="none" lIns="0" tIns="0" rIns="0" bIns="0" anchor="t" anchorCtr="0">
+            <a:spAutoFit/>
+          </a:bodyPr>
+          <a:lstStyle/>
+          <a:p>
+            <a:pPr algn="l"/>
+            <a:r>
+              <a:rPr lang="zh-CN" sz="1350" dirty="0">
+                <a:solidFill>
+                  <a:srgbClr val="A8A8A8"/>
+                </a:solidFill>
+                <a:latin typeface="Inter"/>
+                <a:ea typeface="Microsoft YaHei"/>
+                <a:cs typeface="Inter"/>
+              </a:rPr>
+              <a:t>从根因到闭环：方案选型、体系架构、90 天落地。</a:t>
+            </a:r>
+          </a:p>
+        </p:txBody>
+      </p:sp>
+      <p:sp>
+        <p:nvSpPr>
+          <p:cNvPr id="8" name="TextBox 8"/>
+          <p:cNvSpPr txBox="1"/>
+          <p:nvPr/>
+        </p:nvSpPr>
+        <p:spPr>
+          <a:xfrm>
+            <a:off x="370522" y="6578441"/>
+            <a:ext cx="1171646" cy="167640"/>
+          </a:xfrm>
+          <a:prstGeom prst="rect">
+            <a:avLst/>
+          </a:prstGeom>
+          <a:noFill/>
+          <a:ln>
+            <a:noFill/>
+          </a:ln>
+        </p:spPr>
+        <p:txBody>
+          <a:bodyPr wrap="none" lIns="0" tIns="0" rIns="0" bIns="0" anchor="t" anchorCtr="0">
+            <a:spAutoFit/>
+          </a:bodyPr>
+          <a:lstStyle/>
+          <a:p>
+            <a:pPr algn="l"/>
+            <a:r>
+              <a:rPr lang="zh-CN" sz="825" dirty="0">
+                <a:solidFill>
+                  <a:srgbClr val="767676"/>
+                </a:solidFill>
+                <a:latin typeface="Inter"/>
+                <a:ea typeface="Microsoft YaHei"/>
+                <a:cs typeface="Inter"/>
+              </a:rPr>
+              <a:t>Aham · 运营改善咨询</a:t>
+            </a:r>
+          </a:p>
+        </p:txBody>
+      </p:sp>
+      <p:sp>
+        <p:nvSpPr>
+          <p:cNvPr id="9" name="TextBox 9"/>
+          <p:cNvSpPr txBox="1"/>
+          <p:nvPr/>
+        </p:nvSpPr>
+        <p:spPr>
+          <a:xfrm>
+            <a:off x="11517368" y="6578441"/>
+            <a:ext cx="304109" cy="167640"/>
+          </a:xfrm>
+          <a:prstGeom prst="rect">
+            <a:avLst/>
+          </a:prstGeom>
+          <a:noFill/>
+          <a:ln>
+            <a:noFill/>
+          </a:ln>
+        </p:spPr>
+        <p:txBody>
+          <a:bodyPr wrap="none" lIns="0" tIns="0" rIns="0" bIns="0" anchor="t" anchorCtr="0">
+            <a:spAutoFit/>
+          </a:bodyPr>
+          <a:lstStyle/>
+          <a:p>
+            <a:pPr algn="r"/>
+            <a:r>
+              <a:rPr lang="zh-CN" sz="825" dirty="0">
+                <a:solidFill>
+                  <a:srgbClr val="767676"/>
+                </a:solidFill>
+                <a:latin typeface="JetBrains Mono"/>
+                <a:ea typeface="Microsoft YaHei"/>
+                <a:cs typeface="JetBrains Mono"/>
+              </a:rPr>
+              <a:t>11 / 11</a:t>
+            </a:r>
+          </a:p>
+        </p:txBody>
+      </p:sp>
+    </p:spTree>
+  </p:cSld>
+  <p:clrMapOvr>
+    <a:masterClrMapping/>
+  </p:clrMapOvr>
+</p:sld>
+</file>
+
 <file path=ppt/slides/slide2.xml><?xml version="1.0" encoding="utf-8"?>
 <p:sld xmlns:a="http://schemas.openxmlformats.org/drawingml/2006/main" xmlns:r="http://schemas.openxmlformats.org/officeDocument/2006/relationships" xmlns:p="http://schemas.openxmlformats.org/presentationml/2006/main">
   <p:cSld>
@@ -4302,8 +6741,8 @@
         </p:nvSpPr>
         <p:spPr>
           <a:xfrm>
-            <a:off x="11396877" y="6664166"/>
-            <a:ext cx="424601" cy="167640"/>
+            <a:off x="11457122" y="6664166"/>
+            <a:ext cx="364355" cy="167640"/>
           </a:xfrm>
           <a:prstGeom prst="rect">
             <a:avLst/>
@@ -4329,7 +6768,7 @@
                 <a:ea typeface="Microsoft YaHei"/>
                 <a:cs typeface="JetBrains Mono"/>
               </a:rPr>
-              <a:t>02 / 08</a:t>
+              <a:t>02 / 11</a:t>
             </a:r>
           </a:p>
         </p:txBody>
@@ -7605,8 +10044,8 @@
         </p:nvSpPr>
         <p:spPr>
           <a:xfrm>
-            <a:off x="11396877" y="6664166"/>
-            <a:ext cx="424601" cy="167640"/>
+            <a:off x="11457122" y="6664166"/>
+            <a:ext cx="364355" cy="167640"/>
           </a:xfrm>
           <a:prstGeom prst="rect">
             <a:avLst/>
@@ -7632,7 +10071,7 @@
                 <a:ea typeface="Microsoft YaHei"/>
                 <a:cs typeface="JetBrains Mono"/>
               </a:rPr>
-              <a:t>03 / 08</a:t>
+              <a:t>03 / 11</a:t>
             </a:r>
           </a:p>
         </p:txBody>
@@ -9870,8 +12309,8 @@
         </p:nvSpPr>
         <p:spPr>
           <a:xfrm>
-            <a:off x="11396877" y="6664166"/>
-            <a:ext cx="424601" cy="167640"/>
+            <a:off x="11457122" y="6664166"/>
+            <a:ext cx="364355" cy="167640"/>
           </a:xfrm>
           <a:prstGeom prst="rect">
             <a:avLst/>
@@ -9897,7 +12336,7 @@
                 <a:ea typeface="Microsoft YaHei"/>
                 <a:cs typeface="JetBrains Mono"/>
               </a:rPr>
-              <a:t>04 / 08</a:t>
+              <a:t>04 / 11</a:t>
             </a:r>
           </a:p>
         </p:txBody>
@@ -12096,8 +14535,8 @@
         </p:nvSpPr>
         <p:spPr>
           <a:xfrm>
-            <a:off x="11396877" y="6664166"/>
-            <a:ext cx="424601" cy="167640"/>
+            <a:off x="11457122" y="6664166"/>
+            <a:ext cx="364355" cy="167640"/>
           </a:xfrm>
           <a:prstGeom prst="rect">
             <a:avLst/>
@@ -12123,7 +14562,7 @@
                 <a:ea typeface="Microsoft YaHei"/>
                 <a:cs typeface="JetBrains Mono"/>
               </a:rPr>
-              <a:t>05 / 08</a:t>
+              <a:t>05 / 11</a:t>
             </a:r>
           </a:p>
         </p:txBody>
@@ -15475,8 +17914,8 @@
         </p:nvSpPr>
         <p:spPr>
           <a:xfrm>
-            <a:off x="11396877" y="6578441"/>
-            <a:ext cx="424601" cy="167640"/>
+            <a:off x="11457122" y="6578441"/>
+            <a:ext cx="364355" cy="167640"/>
           </a:xfrm>
           <a:prstGeom prst="rect">
             <a:avLst/>
@@ -15502,7 +17941,7 @@
                 <a:ea typeface="Microsoft YaHei"/>
                 <a:cs typeface="JetBrains Mono"/>
               </a:rPr>
-              <a:t>06 / 08</a:t>
+              <a:t>06 / 11</a:t>
             </a:r>
           </a:p>
         </p:txBody>
@@ -15852,8 +18291,8 @@
         </p:nvSpPr>
         <p:spPr>
           <a:xfrm>
-            <a:off x="11396877" y="6664166"/>
-            <a:ext cx="424601" cy="167640"/>
+            <a:off x="11457122" y="6664166"/>
+            <a:ext cx="364355" cy="167640"/>
           </a:xfrm>
           <a:prstGeom prst="rect">
             <a:avLst/>
@@ -15879,7 +18318,7 @@
                 <a:ea typeface="Microsoft YaHei"/>
                 <a:cs typeface="JetBrains Mono"/>
               </a:rPr>
-              <a:t>07 / 08</a:t>
+              <a:t>07 / 11</a:t>
             </a:r>
           </a:p>
         </p:txBody>
@@ -17485,8 +19924,8 @@
         </p:nvSpPr>
         <p:spPr>
           <a:xfrm>
-            <a:off x="11396877" y="6664166"/>
-            <a:ext cx="424601" cy="167640"/>
+            <a:off x="11457122" y="6664166"/>
+            <a:ext cx="364355" cy="167640"/>
           </a:xfrm>
           <a:prstGeom prst="rect">
             <a:avLst/>
@@ -17512,7 +19951,7 @@
                 <a:ea typeface="Microsoft YaHei"/>
                 <a:cs typeface="JetBrains Mono"/>
               </a:rPr>
-              <a:t>08 / 08</a:t>
+              <a:t>08 / 11</a:t>
             </a:r>
           </a:p>
         </p:txBody>
@@ -18961,6 +21400,2247 @@
                 <a:cs typeface="Inter"/>
               </a:rPr>
               <a:t>投入大 · 周期长</a:t>
+            </a:r>
+          </a:p>
+        </p:txBody>
+      </p:sp>
+    </p:spTree>
+  </p:cSld>
+  <p:clrMapOvr>
+    <a:masterClrMapping/>
+  </p:clrMapOvr>
+</p:sld>
+</file>
+
+<file path=ppt/slides/slide9.xml><?xml version="1.0" encoding="utf-8"?>
+<p:sld xmlns:a="http://schemas.openxmlformats.org/drawingml/2006/main" xmlns:r="http://schemas.openxmlformats.org/officeDocument/2006/relationships" xmlns:p="http://schemas.openxmlformats.org/presentationml/2006/main">
+  <p:cSld>
+    <p:spTree>
+      <p:nvGrpSpPr>
+        <p:cNvPr id="1" name=""/>
+        <p:cNvGrpSpPr/>
+        <p:nvPr/>
+      </p:nvGrpSpPr>
+      <p:grpSpPr>
+        <a:xfrm>
+          <a:off x="0" y="0"/>
+          <a:ext cx="0" cy="0"/>
+          <a:chOff x="0" y="0"/>
+          <a:chExt cx="0" cy="0"/>
+        </a:xfrm>
+      </p:grpSpPr>
+      <p:sp>
+        <p:nvSpPr>
+          <p:cNvPr id="2" name="Rectangle 2"/>
+          <p:cNvSpPr/>
+          <p:nvPr/>
+        </p:nvSpPr>
+        <p:spPr>
+          <a:xfrm>
+            <a:off x="0" y="0"/>
+            <a:ext cx="12192000" cy="6858000"/>
+          </a:xfrm>
+          <a:prstGeom prst="rect">
+            <a:avLst/>
+          </a:prstGeom>
+          <a:solidFill>
+            <a:srgbClr val="FFFFFF"/>
+          </a:solidFill>
+          <a:ln>
+            <a:noFill/>
+          </a:ln>
+        </p:spPr>
+      </p:sp>
+      <p:sp>
+        <p:nvSpPr>
+          <p:cNvPr id="3" name="TextBox 3"/>
+          <p:cNvSpPr txBox="1"/>
+          <p:nvPr/>
+        </p:nvSpPr>
+        <p:spPr>
+          <a:xfrm>
+            <a:off x="370522" y="139541"/>
+            <a:ext cx="1123450" cy="167640"/>
+          </a:xfrm>
+          <a:prstGeom prst="rect">
+            <a:avLst/>
+          </a:prstGeom>
+          <a:noFill/>
+          <a:ln>
+            <a:noFill/>
+          </a:ln>
+        </p:spPr>
+        <p:txBody>
+          <a:bodyPr wrap="none" lIns="0" tIns="0" rIns="0" bIns="0" anchor="t" anchorCtr="0">
+            <a:spAutoFit/>
+          </a:bodyPr>
+          <a:lstStyle/>
+          <a:p>
+            <a:pPr algn="l"/>
+            <a:r>
+              <a:rPr lang="zh-CN" sz="825" dirty="0">
+                <a:solidFill>
+                  <a:srgbClr val="9B9B9B"/>
+                </a:solidFill>
+                <a:latin typeface="Inter"/>
+                <a:ea typeface="Microsoft YaHei"/>
+                <a:cs typeface="Inter"/>
+              </a:rPr>
+              <a:t>改善方案 · 运行机制</a:t>
+            </a:r>
+          </a:p>
+        </p:txBody>
+      </p:sp>
+      <p:sp>
+        <p:nvSpPr>
+          <p:cNvPr id="4" name="Rectangle 4"/>
+          <p:cNvSpPr/>
+          <p:nvPr/>
+        </p:nvSpPr>
+        <p:spPr>
+          <a:xfrm>
+            <a:off x="11410950" y="152400"/>
+            <a:ext cx="85725" cy="85725"/>
+          </a:xfrm>
+          <a:prstGeom prst="rect">
+            <a:avLst/>
+          </a:prstGeom>
+          <a:solidFill>
+            <a:srgbClr val="336EE8"/>
+          </a:solidFill>
+          <a:ln>
+            <a:noFill/>
+          </a:ln>
+        </p:spPr>
+      </p:sp>
+      <p:sp>
+        <p:nvSpPr>
+          <p:cNvPr id="5" name="TextBox 5"/>
+          <p:cNvSpPr txBox="1"/>
+          <p:nvPr/>
+        </p:nvSpPr>
+        <p:spPr>
+          <a:xfrm>
+            <a:off x="11468329" y="131445"/>
+            <a:ext cx="354101" cy="182880"/>
+          </a:xfrm>
+          <a:prstGeom prst="rect">
+            <a:avLst/>
+          </a:prstGeom>
+          <a:noFill/>
+          <a:ln>
+            <a:noFill/>
+          </a:ln>
+        </p:spPr>
+        <p:txBody>
+          <a:bodyPr wrap="none" lIns="0" tIns="0" rIns="0" bIns="0" anchor="t" anchorCtr="0">
+            <a:spAutoFit/>
+          </a:bodyPr>
+          <a:lstStyle/>
+          <a:p>
+            <a:pPr algn="r"/>
+            <a:r>
+              <a:rPr lang="zh-CN" sz="900" b="1" dirty="0">
+                <a:solidFill>
+                  <a:srgbClr val="262626"/>
+                </a:solidFill>
+                <a:latin typeface="Inter"/>
+                <a:ea typeface="Microsoft YaHei"/>
+                <a:cs typeface="Inter"/>
+              </a:rPr>
+              <a:t>Aham</a:t>
+            </a:r>
+          </a:p>
+        </p:txBody>
+      </p:sp>
+      <p:sp>
+        <p:nvSpPr>
+          <p:cNvPr id="6" name="Line 6"/>
+          <p:cNvSpPr/>
+          <p:nvPr/>
+        </p:nvSpPr>
+        <p:spPr>
+          <a:xfrm>
+            <a:off x="381000" y="304800"/>
+            <a:ext cx="11430000" cy="9525"/>
+          </a:xfrm>
+          <a:custGeom>
+            <a:avLst/>
+            <a:gdLst/>
+            <a:ahLst/>
+            <a:cxnLst/>
+            <a:rect l="l" t="t" r="r" b="b"/>
+            <a:pathLst>
+              <a:path w="11430000" h="9525">
+                <a:moveTo>
+                  <a:pt x="0" y="0"/>
+                </a:moveTo>
+                <a:lnTo>
+                  <a:pt x="11430000" y="0"/>
+                </a:lnTo>
+              </a:path>
+            </a:pathLst>
+          </a:custGeom>
+          <a:noFill/>
+          <a:ln w="9525">
+            <a:solidFill>
+              <a:srgbClr val="E7E7E7"/>
+            </a:solidFill>
+          </a:ln>
+        </p:spPr>
+      </p:sp>
+      <p:sp>
+        <p:nvSpPr>
+          <p:cNvPr id="7" name="TextBox 7"/>
+          <p:cNvSpPr txBox="1"/>
+          <p:nvPr/>
+        </p:nvSpPr>
+        <p:spPr>
+          <a:xfrm>
+            <a:off x="350520" y="483870"/>
+            <a:ext cx="7421880" cy="487680"/>
+          </a:xfrm>
+          <a:prstGeom prst="rect">
+            <a:avLst/>
+          </a:prstGeom>
+          <a:noFill/>
+          <a:ln>
+            <a:noFill/>
+          </a:ln>
+        </p:spPr>
+        <p:txBody>
+          <a:bodyPr wrap="none" lIns="0" tIns="0" rIns="0" bIns="0" anchor="t" anchorCtr="0">
+            <a:spAutoFit/>
+          </a:bodyPr>
+          <a:lstStyle/>
+          <a:p>
+            <a:pPr algn="l"/>
+            <a:r>
+              <a:rPr lang="zh-CN" sz="2400" b="1" dirty="0">
+                <a:solidFill>
+                  <a:srgbClr val="262626"/>
+                </a:solidFill>
+                <a:latin typeface="Inter"/>
+                <a:ea typeface="Microsoft YaHei"/>
+                <a:cs typeface="Inter"/>
+              </a:rPr>
+              <a:t>改善以四步闭环推进，月度复盘驱动持续迭代</a:t>
+            </a:r>
+          </a:p>
+        </p:txBody>
+      </p:sp>
+      <p:sp>
+        <p:nvSpPr>
+          <p:cNvPr id="8" name="Line 8"/>
+          <p:cNvSpPr/>
+          <p:nvPr/>
+        </p:nvSpPr>
+        <p:spPr>
+          <a:xfrm>
+            <a:off x="381000" y="895350"/>
+            <a:ext cx="11430000" cy="9525"/>
+          </a:xfrm>
+          <a:custGeom>
+            <a:avLst/>
+            <a:gdLst/>
+            <a:ahLst/>
+            <a:cxnLst/>
+            <a:rect l="l" t="t" r="r" b="b"/>
+            <a:pathLst>
+              <a:path w="11430000" h="9525">
+                <a:moveTo>
+                  <a:pt x="0" y="0"/>
+                </a:moveTo>
+                <a:lnTo>
+                  <a:pt x="11430000" y="0"/>
+                </a:lnTo>
+              </a:path>
+            </a:pathLst>
+          </a:custGeom>
+          <a:noFill/>
+          <a:ln w="9525">
+            <a:solidFill>
+              <a:srgbClr val="E7E7E7"/>
+            </a:solidFill>
+          </a:ln>
+        </p:spPr>
+      </p:sp>
+      <p:sp>
+        <p:nvSpPr>
+          <p:cNvPr id="9" name="Line 9"/>
+          <p:cNvSpPr/>
+          <p:nvPr/>
+        </p:nvSpPr>
+        <p:spPr>
+          <a:xfrm>
+            <a:off x="381000" y="6572250"/>
+            <a:ext cx="11430000" cy="9525"/>
+          </a:xfrm>
+          <a:custGeom>
+            <a:avLst/>
+            <a:gdLst/>
+            <a:ahLst/>
+            <a:cxnLst/>
+            <a:rect l="l" t="t" r="r" b="b"/>
+            <a:pathLst>
+              <a:path w="11430000" h="9525">
+                <a:moveTo>
+                  <a:pt x="0" y="0"/>
+                </a:moveTo>
+                <a:lnTo>
+                  <a:pt x="11430000" y="0"/>
+                </a:lnTo>
+              </a:path>
+            </a:pathLst>
+          </a:custGeom>
+          <a:noFill/>
+          <a:ln w="9525">
+            <a:solidFill>
+              <a:srgbClr val="E7E7E7"/>
+            </a:solidFill>
+          </a:ln>
+        </p:spPr>
+      </p:sp>
+      <p:sp>
+        <p:nvSpPr>
+          <p:cNvPr id="10" name="TextBox 10"/>
+          <p:cNvSpPr txBox="1"/>
+          <p:nvPr/>
+        </p:nvSpPr>
+        <p:spPr>
+          <a:xfrm>
+            <a:off x="370522" y="6664166"/>
+            <a:ext cx="864394" cy="167640"/>
+          </a:xfrm>
+          <a:prstGeom prst="rect">
+            <a:avLst/>
+          </a:prstGeom>
+          <a:noFill/>
+          <a:ln>
+            <a:noFill/>
+          </a:ln>
+        </p:spPr>
+        <p:txBody>
+          <a:bodyPr wrap="none" lIns="0" tIns="0" rIns="0" bIns="0" anchor="t" anchorCtr="0">
+            <a:spAutoFit/>
+          </a:bodyPr>
+          <a:lstStyle/>
+          <a:p>
+            <a:pPr algn="l"/>
+            <a:r>
+              <a:rPr lang="zh-CN" sz="825" dirty="0">
+                <a:solidFill>
+                  <a:srgbClr val="9B9B9B"/>
+                </a:solidFill>
+                <a:latin typeface="Inter"/>
+                <a:ea typeface="Microsoft YaHei"/>
+                <a:cs typeface="Inter"/>
+              </a:rPr>
+              <a:t>来源：内部测算</a:t>
+            </a:r>
+          </a:p>
+        </p:txBody>
+      </p:sp>
+      <p:sp>
+        <p:nvSpPr>
+          <p:cNvPr id="11" name="TextBox 11"/>
+          <p:cNvSpPr txBox="1"/>
+          <p:nvPr/>
+        </p:nvSpPr>
+        <p:spPr>
+          <a:xfrm>
+            <a:off x="11457122" y="6664166"/>
+            <a:ext cx="364355" cy="167640"/>
+          </a:xfrm>
+          <a:prstGeom prst="rect">
+            <a:avLst/>
+          </a:prstGeom>
+          <a:noFill/>
+          <a:ln>
+            <a:noFill/>
+          </a:ln>
+        </p:spPr>
+        <p:txBody>
+          <a:bodyPr wrap="none" lIns="0" tIns="0" rIns="0" bIns="0" anchor="t" anchorCtr="0">
+            <a:spAutoFit/>
+          </a:bodyPr>
+          <a:lstStyle/>
+          <a:p>
+            <a:pPr algn="r"/>
+            <a:r>
+              <a:rPr lang="zh-CN" sz="825" dirty="0">
+                <a:solidFill>
+                  <a:srgbClr val="9B9B9B"/>
+                </a:solidFill>
+                <a:latin typeface="JetBrains Mono"/>
+                <a:ea typeface="Microsoft YaHei"/>
+                <a:cs typeface="JetBrains Mono"/>
+              </a:rPr>
+              <a:t>09 / 11</a:t>
+            </a:r>
+          </a:p>
+        </p:txBody>
+      </p:sp>
+      <p:sp>
+        <p:nvSpPr>
+          <p:cNvPr id="12" name="Rectangle 12"/>
+          <p:cNvSpPr/>
+          <p:nvPr/>
+        </p:nvSpPr>
+        <p:spPr>
+          <a:xfrm>
+            <a:off x="381000" y="1905000"/>
+            <a:ext cx="1828800" cy="1428750"/>
+          </a:xfrm>
+          <a:prstGeom prst="rect">
+            <a:avLst/>
+          </a:prstGeom>
+          <a:solidFill>
+            <a:srgbClr val="F3F3F3"/>
+          </a:solidFill>
+          <a:ln>
+            <a:noFill/>
+          </a:ln>
+        </p:spPr>
+      </p:sp>
+      <p:sp>
+        <p:nvSpPr>
+          <p:cNvPr id="13" name="TextBox 13"/>
+          <p:cNvSpPr txBox="1"/>
+          <p:nvPr/>
+        </p:nvSpPr>
+        <p:spPr>
+          <a:xfrm>
+            <a:off x="531495" y="2107882"/>
+            <a:ext cx="256987" cy="335280"/>
+          </a:xfrm>
+          <a:prstGeom prst="rect">
+            <a:avLst/>
+          </a:prstGeom>
+          <a:noFill/>
+          <a:ln>
+            <a:noFill/>
+          </a:ln>
+        </p:spPr>
+        <p:txBody>
+          <a:bodyPr wrap="none" lIns="0" tIns="0" rIns="0" bIns="0" anchor="t" anchorCtr="0">
+            <a:spAutoFit/>
+          </a:bodyPr>
+          <a:lstStyle/>
+          <a:p>
+            <a:pPr algn="l"/>
+            <a:r>
+              <a:rPr lang="zh-CN" sz="1650" b="1" dirty="0">
+                <a:solidFill>
+                  <a:srgbClr val="C4C4C4"/>
+                </a:solidFill>
+                <a:latin typeface="JetBrains Mono"/>
+                <a:ea typeface="Microsoft YaHei"/>
+                <a:cs typeface="JetBrains Mono"/>
+              </a:rPr>
+              <a:t>01</a:t>
+            </a:r>
+          </a:p>
+        </p:txBody>
+      </p:sp>
+      <p:sp>
+        <p:nvSpPr>
+          <p:cNvPr id="14" name="TextBox 14"/>
+          <p:cNvSpPr txBox="1"/>
+          <p:nvPr/>
+        </p:nvSpPr>
+        <p:spPr>
+          <a:xfrm>
+            <a:off x="535305" y="2502218"/>
+            <a:ext cx="448342" cy="274320"/>
+          </a:xfrm>
+          <a:prstGeom prst="rect">
+            <a:avLst/>
+          </a:prstGeom>
+          <a:noFill/>
+          <a:ln>
+            <a:noFill/>
+          </a:ln>
+        </p:spPr>
+        <p:txBody>
+          <a:bodyPr wrap="none" lIns="0" tIns="0" rIns="0" bIns="0" anchor="t" anchorCtr="0">
+            <a:spAutoFit/>
+          </a:bodyPr>
+          <a:lstStyle/>
+          <a:p>
+            <a:pPr algn="l"/>
+            <a:r>
+              <a:rPr lang="zh-CN" sz="1350" b="1" dirty="0">
+                <a:solidFill>
+                  <a:srgbClr val="262626"/>
+                </a:solidFill>
+                <a:latin typeface="Inter"/>
+                <a:ea typeface="Microsoft YaHei"/>
+                <a:cs typeface="Inter"/>
+              </a:rPr>
+              <a:t>测量</a:t>
+            </a:r>
+          </a:p>
+        </p:txBody>
+      </p:sp>
+      <p:sp>
+        <p:nvSpPr>
+          <p:cNvPr id="15" name="TextBox 15"/>
+          <p:cNvSpPr txBox="1"/>
+          <p:nvPr/>
+        </p:nvSpPr>
+        <p:spPr>
+          <a:xfrm>
+            <a:off x="960120" y="2550795"/>
+            <a:ext cx="555212" cy="182880"/>
+          </a:xfrm>
+          <a:prstGeom prst="rect">
+            <a:avLst/>
+          </a:prstGeom>
+          <a:noFill/>
+          <a:ln>
+            <a:noFill/>
+          </a:ln>
+        </p:spPr>
+        <p:txBody>
+          <a:bodyPr wrap="none" lIns="0" tIns="0" rIns="0" bIns="0" anchor="t" anchorCtr="0">
+            <a:spAutoFit/>
+          </a:bodyPr>
+          <a:lstStyle/>
+          <a:p>
+            <a:pPr algn="l"/>
+            <a:r>
+              <a:rPr lang="zh-CN" sz="900" dirty="0">
+                <a:solidFill>
+                  <a:srgbClr val="9B9B9B"/>
+                </a:solidFill>
+                <a:latin typeface="Inter"/>
+                <a:ea typeface="Microsoft YaHei"/>
+                <a:cs typeface="Inter"/>
+              </a:rPr>
+              <a:t>Measure</a:t>
+            </a:r>
+          </a:p>
+        </p:txBody>
+      </p:sp>
+      <p:sp>
+        <p:nvSpPr>
+          <p:cNvPr id="16" name="TextBox 16"/>
+          <p:cNvSpPr txBox="1"/>
+          <p:nvPr/>
+        </p:nvSpPr>
+        <p:spPr>
+          <a:xfrm>
+            <a:off x="540068" y="2866549"/>
+            <a:ext cx="1299234" cy="198120"/>
+          </a:xfrm>
+          <a:prstGeom prst="rect">
+            <a:avLst/>
+          </a:prstGeom>
+          <a:noFill/>
+          <a:ln>
+            <a:noFill/>
+          </a:ln>
+        </p:spPr>
+        <p:txBody>
+          <a:bodyPr wrap="none" lIns="0" tIns="0" rIns="0" bIns="0" anchor="t" anchorCtr="0">
+            <a:spAutoFit/>
+          </a:bodyPr>
+          <a:lstStyle/>
+          <a:p>
+            <a:pPr algn="l"/>
+            <a:r>
+              <a:rPr lang="zh-CN" sz="975" dirty="0">
+                <a:solidFill>
+                  <a:srgbClr val="6E6E6E"/>
+                </a:solidFill>
+                <a:latin typeface="Inter"/>
+                <a:ea typeface="Microsoft YaHei"/>
+                <a:cs typeface="Inter"/>
+              </a:rPr>
+              <a:t>OEE/停机/不良采集</a:t>
+            </a:r>
+          </a:p>
+        </p:txBody>
+      </p:sp>
+      <p:sp>
+        <p:nvSpPr>
+          <p:cNvPr id="17" name="TextBox 17"/>
+          <p:cNvSpPr txBox="1"/>
+          <p:nvPr/>
+        </p:nvSpPr>
+        <p:spPr>
+          <a:xfrm>
+            <a:off x="541972" y="3530441"/>
+            <a:ext cx="261937" cy="167640"/>
+          </a:xfrm>
+          <a:prstGeom prst="rect">
+            <a:avLst/>
+          </a:prstGeom>
+          <a:noFill/>
+          <a:ln>
+            <a:noFill/>
+          </a:ln>
+        </p:spPr>
+        <p:txBody>
+          <a:bodyPr wrap="none" lIns="0" tIns="0" rIns="0" bIns="0" anchor="t" anchorCtr="0">
+            <a:spAutoFit/>
+          </a:bodyPr>
+          <a:lstStyle/>
+          <a:p>
+            <a:pPr algn="l"/>
+            <a:r>
+              <a:rPr lang="zh-CN" sz="825" dirty="0">
+                <a:solidFill>
+                  <a:srgbClr val="9B9B9B"/>
+                </a:solidFill>
+                <a:latin typeface="Inter"/>
+                <a:ea typeface="Microsoft YaHei"/>
+                <a:cs typeface="Inter"/>
+              </a:rPr>
+              <a:t>交付</a:t>
+            </a:r>
+          </a:p>
+        </p:txBody>
+      </p:sp>
+      <p:sp>
+        <p:nvSpPr>
+          <p:cNvPr id="18" name="TextBox 18"/>
+          <p:cNvSpPr txBox="1"/>
+          <p:nvPr/>
+        </p:nvSpPr>
+        <p:spPr>
+          <a:xfrm>
+            <a:off x="539115" y="3715702"/>
+            <a:ext cx="912281" cy="213360"/>
+          </a:xfrm>
+          <a:prstGeom prst="rect">
+            <a:avLst/>
+          </a:prstGeom>
+          <a:noFill/>
+          <a:ln>
+            <a:noFill/>
+          </a:ln>
+        </p:spPr>
+        <p:txBody>
+          <a:bodyPr wrap="none" lIns="0" tIns="0" rIns="0" bIns="0" anchor="t" anchorCtr="0">
+            <a:spAutoFit/>
+          </a:bodyPr>
+          <a:lstStyle/>
+          <a:p>
+            <a:pPr algn="l"/>
+            <a:r>
+              <a:rPr lang="zh-CN" sz="1050" b="1" dirty="0">
+                <a:solidFill>
+                  <a:srgbClr val="262626"/>
+                </a:solidFill>
+                <a:latin typeface="JetBrains Mono"/>
+                <a:ea typeface="Microsoft YaHei"/>
+                <a:cs typeface="JetBrains Mono"/>
+              </a:rPr>
+              <a:t>采集率 ≥95%</a:t>
+            </a:r>
+          </a:p>
+        </p:txBody>
+      </p:sp>
+      <p:sp>
+        <p:nvSpPr>
+          <p:cNvPr id="19" name="Line 19"/>
+          <p:cNvSpPr/>
+          <p:nvPr/>
+        </p:nvSpPr>
+        <p:spPr>
+          <a:xfrm>
+            <a:off x="2305050" y="2619375"/>
+            <a:ext cx="342900" cy="9525"/>
+          </a:xfrm>
+          <a:custGeom>
+            <a:avLst/>
+            <a:gdLst/>
+            <a:ahLst/>
+            <a:cxnLst/>
+            <a:rect l="l" t="t" r="r" b="b"/>
+            <a:pathLst>
+              <a:path w="342900" h="9525">
+                <a:moveTo>
+                  <a:pt x="0" y="0"/>
+                </a:moveTo>
+                <a:lnTo>
+                  <a:pt x="342900" y="0"/>
+                </a:lnTo>
+              </a:path>
+            </a:pathLst>
+          </a:custGeom>
+          <a:noFill/>
+          <a:ln w="19050">
+            <a:solidFill>
+              <a:srgbClr val="9B9B9B"/>
+            </a:solidFill>
+          </a:ln>
+        </p:spPr>
+      </p:sp>
+      <p:sp>
+        <p:nvSpPr>
+          <p:cNvPr id="20" name="Polygon 20"/>
+          <p:cNvSpPr/>
+          <p:nvPr/>
+        </p:nvSpPr>
+        <p:spPr>
+          <a:xfrm>
+            <a:off x="2647950" y="2571750"/>
+            <a:ext cx="76200" cy="95250"/>
+          </a:xfrm>
+          <a:custGeom>
+            <a:avLst/>
+            <a:gdLst/>
+            <a:ahLst/>
+            <a:cxnLst/>
+            <a:rect l="l" t="t" r="r" b="b"/>
+            <a:pathLst>
+              <a:path w="76200" h="95250">
+                <a:moveTo>
+                  <a:pt x="0" y="0"/>
+                </a:moveTo>
+                <a:lnTo>
+                  <a:pt x="76200" y="47625"/>
+                </a:lnTo>
+                <a:lnTo>
+                  <a:pt x="0" y="95250"/>
+                </a:lnTo>
+                <a:close/>
+              </a:path>
+            </a:pathLst>
+          </a:custGeom>
+          <a:solidFill>
+            <a:srgbClr val="9B9B9B"/>
+          </a:solidFill>
+          <a:ln>
+            <a:noFill/>
+          </a:ln>
+        </p:spPr>
+      </p:sp>
+      <p:sp>
+        <p:nvSpPr>
+          <p:cNvPr id="21" name="Rectangle 21"/>
+          <p:cNvSpPr/>
+          <p:nvPr/>
+        </p:nvSpPr>
+        <p:spPr>
+          <a:xfrm>
+            <a:off x="2781300" y="1905000"/>
+            <a:ext cx="1828800" cy="1428750"/>
+          </a:xfrm>
+          <a:prstGeom prst="rect">
+            <a:avLst/>
+          </a:prstGeom>
+          <a:solidFill>
+            <a:srgbClr val="F3F3F3"/>
+          </a:solidFill>
+          <a:ln>
+            <a:noFill/>
+          </a:ln>
+        </p:spPr>
+      </p:sp>
+      <p:sp>
+        <p:nvSpPr>
+          <p:cNvPr id="22" name="TextBox 22"/>
+          <p:cNvSpPr txBox="1"/>
+          <p:nvPr/>
+        </p:nvSpPr>
+        <p:spPr>
+          <a:xfrm>
+            <a:off x="2931795" y="2107882"/>
+            <a:ext cx="320245" cy="335280"/>
+          </a:xfrm>
+          <a:prstGeom prst="rect">
+            <a:avLst/>
+          </a:prstGeom>
+          <a:noFill/>
+          <a:ln>
+            <a:noFill/>
+          </a:ln>
+        </p:spPr>
+        <p:txBody>
+          <a:bodyPr wrap="none" lIns="0" tIns="0" rIns="0" bIns="0" anchor="t" anchorCtr="0">
+            <a:spAutoFit/>
+          </a:bodyPr>
+          <a:lstStyle/>
+          <a:p>
+            <a:pPr algn="l"/>
+            <a:r>
+              <a:rPr lang="zh-CN" sz="1650" b="1" dirty="0">
+                <a:solidFill>
+                  <a:srgbClr val="C4C4C4"/>
+                </a:solidFill>
+                <a:latin typeface="JetBrains Mono"/>
+                <a:ea typeface="Microsoft YaHei"/>
+                <a:cs typeface="JetBrains Mono"/>
+              </a:rPr>
+              <a:t>02</a:t>
+            </a:r>
+          </a:p>
+        </p:txBody>
+      </p:sp>
+      <p:sp>
+        <p:nvSpPr>
+          <p:cNvPr id="23" name="TextBox 23"/>
+          <p:cNvSpPr txBox="1"/>
+          <p:nvPr/>
+        </p:nvSpPr>
+        <p:spPr>
+          <a:xfrm>
+            <a:off x="2935605" y="2502218"/>
+            <a:ext cx="448342" cy="274320"/>
+          </a:xfrm>
+          <a:prstGeom prst="rect">
+            <a:avLst/>
+          </a:prstGeom>
+          <a:noFill/>
+          <a:ln>
+            <a:noFill/>
+          </a:ln>
+        </p:spPr>
+        <p:txBody>
+          <a:bodyPr wrap="none" lIns="0" tIns="0" rIns="0" bIns="0" anchor="t" anchorCtr="0">
+            <a:spAutoFit/>
+          </a:bodyPr>
+          <a:lstStyle/>
+          <a:p>
+            <a:pPr algn="l"/>
+            <a:r>
+              <a:rPr lang="zh-CN" sz="1350" b="1" dirty="0">
+                <a:solidFill>
+                  <a:srgbClr val="262626"/>
+                </a:solidFill>
+                <a:latin typeface="Inter"/>
+                <a:ea typeface="Microsoft YaHei"/>
+                <a:cs typeface="Inter"/>
+              </a:rPr>
+              <a:t>诊断</a:t>
+            </a:r>
+          </a:p>
+        </p:txBody>
+      </p:sp>
+      <p:sp>
+        <p:nvSpPr>
+          <p:cNvPr id="24" name="TextBox 24"/>
+          <p:cNvSpPr txBox="1"/>
+          <p:nvPr/>
+        </p:nvSpPr>
+        <p:spPr>
+          <a:xfrm>
+            <a:off x="3360420" y="2550795"/>
+            <a:ext cx="568357" cy="182880"/>
+          </a:xfrm>
+          <a:prstGeom prst="rect">
+            <a:avLst/>
+          </a:prstGeom>
+          <a:noFill/>
+          <a:ln>
+            <a:noFill/>
+          </a:ln>
+        </p:spPr>
+        <p:txBody>
+          <a:bodyPr wrap="none" lIns="0" tIns="0" rIns="0" bIns="0" anchor="t" anchorCtr="0">
+            <a:spAutoFit/>
+          </a:bodyPr>
+          <a:lstStyle/>
+          <a:p>
+            <a:pPr algn="l"/>
+            <a:r>
+              <a:rPr lang="zh-CN" sz="900" dirty="0">
+                <a:solidFill>
+                  <a:srgbClr val="9B9B9B"/>
+                </a:solidFill>
+                <a:latin typeface="Inter"/>
+                <a:ea typeface="Microsoft YaHei"/>
+                <a:cs typeface="Inter"/>
+              </a:rPr>
+              <a:t>Diagnose</a:t>
+            </a:r>
+          </a:p>
+        </p:txBody>
+      </p:sp>
+      <p:sp>
+        <p:nvSpPr>
+          <p:cNvPr id="25" name="TextBox 25"/>
+          <p:cNvSpPr txBox="1"/>
+          <p:nvPr/>
+        </p:nvSpPr>
+        <p:spPr>
+          <a:xfrm>
+            <a:off x="2940368" y="2866549"/>
+            <a:ext cx="1306354" cy="198120"/>
+          </a:xfrm>
+          <a:prstGeom prst="rect">
+            <a:avLst/>
+          </a:prstGeom>
+          <a:noFill/>
+          <a:ln>
+            <a:noFill/>
+          </a:ln>
+        </p:spPr>
+        <p:txBody>
+          <a:bodyPr wrap="none" lIns="0" tIns="0" rIns="0" bIns="0" anchor="t" anchorCtr="0">
+            <a:spAutoFit/>
+          </a:bodyPr>
+          <a:lstStyle/>
+          <a:p>
+            <a:pPr algn="l"/>
+            <a:r>
+              <a:rPr lang="zh-CN" sz="975" dirty="0">
+                <a:solidFill>
+                  <a:srgbClr val="6E6E6E"/>
+                </a:solidFill>
+                <a:latin typeface="Inter"/>
+                <a:ea typeface="Microsoft YaHei"/>
+                <a:cs typeface="Inter"/>
+              </a:rPr>
+              <a:t>根因定位、瓶颈识别</a:t>
+            </a:r>
+          </a:p>
+        </p:txBody>
+      </p:sp>
+      <p:sp>
+        <p:nvSpPr>
+          <p:cNvPr id="26" name="TextBox 26"/>
+          <p:cNvSpPr txBox="1"/>
+          <p:nvPr/>
+        </p:nvSpPr>
+        <p:spPr>
+          <a:xfrm>
+            <a:off x="2942272" y="3530441"/>
+            <a:ext cx="261937" cy="167640"/>
+          </a:xfrm>
+          <a:prstGeom prst="rect">
+            <a:avLst/>
+          </a:prstGeom>
+          <a:noFill/>
+          <a:ln>
+            <a:noFill/>
+          </a:ln>
+        </p:spPr>
+        <p:txBody>
+          <a:bodyPr wrap="none" lIns="0" tIns="0" rIns="0" bIns="0" anchor="t" anchorCtr="0">
+            <a:spAutoFit/>
+          </a:bodyPr>
+          <a:lstStyle/>
+          <a:p>
+            <a:pPr algn="l"/>
+            <a:r>
+              <a:rPr lang="zh-CN" sz="825" dirty="0">
+                <a:solidFill>
+                  <a:srgbClr val="9B9B9B"/>
+                </a:solidFill>
+                <a:latin typeface="Inter"/>
+                <a:ea typeface="Microsoft YaHei"/>
+                <a:cs typeface="Inter"/>
+              </a:rPr>
+              <a:t>交付</a:t>
+            </a:r>
+          </a:p>
+        </p:txBody>
+      </p:sp>
+      <p:sp>
+        <p:nvSpPr>
+          <p:cNvPr id="27" name="TextBox 27"/>
+          <p:cNvSpPr txBox="1"/>
+          <p:nvPr/>
+        </p:nvSpPr>
+        <p:spPr>
+          <a:xfrm>
+            <a:off x="2939415" y="3715702"/>
+            <a:ext cx="751261" cy="213360"/>
+          </a:xfrm>
+          <a:prstGeom prst="rect">
+            <a:avLst/>
+          </a:prstGeom>
+          <a:noFill/>
+          <a:ln>
+            <a:noFill/>
+          </a:ln>
+        </p:spPr>
+        <p:txBody>
+          <a:bodyPr wrap="none" lIns="0" tIns="0" rIns="0" bIns="0" anchor="t" anchorCtr="0">
+            <a:spAutoFit/>
+          </a:bodyPr>
+          <a:lstStyle/>
+          <a:p>
+            <a:pPr algn="l"/>
+            <a:r>
+              <a:rPr lang="zh-CN" sz="1050" b="1" dirty="0">
+                <a:solidFill>
+                  <a:srgbClr val="262626"/>
+                </a:solidFill>
+                <a:latin typeface="JetBrains Mono"/>
+                <a:ea typeface="Microsoft YaHei"/>
+                <a:cs typeface="JetBrains Mono"/>
+              </a:rPr>
+              <a:t>锁定 Top3</a:t>
+            </a:r>
+          </a:p>
+        </p:txBody>
+      </p:sp>
+      <p:sp>
+        <p:nvSpPr>
+          <p:cNvPr id="28" name="Line 28"/>
+          <p:cNvSpPr/>
+          <p:nvPr/>
+        </p:nvSpPr>
+        <p:spPr>
+          <a:xfrm>
+            <a:off x="4705350" y="2619375"/>
+            <a:ext cx="342900" cy="9525"/>
+          </a:xfrm>
+          <a:custGeom>
+            <a:avLst/>
+            <a:gdLst/>
+            <a:ahLst/>
+            <a:cxnLst/>
+            <a:rect l="l" t="t" r="r" b="b"/>
+            <a:pathLst>
+              <a:path w="342900" h="9525">
+                <a:moveTo>
+                  <a:pt x="0" y="0"/>
+                </a:moveTo>
+                <a:lnTo>
+                  <a:pt x="342900" y="0"/>
+                </a:lnTo>
+              </a:path>
+            </a:pathLst>
+          </a:custGeom>
+          <a:noFill/>
+          <a:ln w="19050">
+            <a:solidFill>
+              <a:srgbClr val="9B9B9B"/>
+            </a:solidFill>
+          </a:ln>
+        </p:spPr>
+      </p:sp>
+      <p:sp>
+        <p:nvSpPr>
+          <p:cNvPr id="29" name="Polygon 29"/>
+          <p:cNvSpPr/>
+          <p:nvPr/>
+        </p:nvSpPr>
+        <p:spPr>
+          <a:xfrm>
+            <a:off x="5048250" y="2571750"/>
+            <a:ext cx="76200" cy="95250"/>
+          </a:xfrm>
+          <a:custGeom>
+            <a:avLst/>
+            <a:gdLst/>
+            <a:ahLst/>
+            <a:cxnLst/>
+            <a:rect l="l" t="t" r="r" b="b"/>
+            <a:pathLst>
+              <a:path w="76200" h="95250">
+                <a:moveTo>
+                  <a:pt x="0" y="0"/>
+                </a:moveTo>
+                <a:lnTo>
+                  <a:pt x="76200" y="47625"/>
+                </a:lnTo>
+                <a:lnTo>
+                  <a:pt x="0" y="95250"/>
+                </a:lnTo>
+                <a:close/>
+              </a:path>
+            </a:pathLst>
+          </a:custGeom>
+          <a:solidFill>
+            <a:srgbClr val="9B9B9B"/>
+          </a:solidFill>
+          <a:ln>
+            <a:noFill/>
+          </a:ln>
+        </p:spPr>
+      </p:sp>
+      <p:sp>
+        <p:nvSpPr>
+          <p:cNvPr id="30" name="Rectangle 30"/>
+          <p:cNvSpPr/>
+          <p:nvPr/>
+        </p:nvSpPr>
+        <p:spPr>
+          <a:xfrm>
+            <a:off x="5181600" y="1905000"/>
+            <a:ext cx="1828800" cy="1428750"/>
+          </a:xfrm>
+          <a:prstGeom prst="rect">
+            <a:avLst/>
+          </a:prstGeom>
+          <a:solidFill>
+            <a:srgbClr val="F3F3F3"/>
+          </a:solidFill>
+          <a:ln>
+            <a:noFill/>
+          </a:ln>
+        </p:spPr>
+      </p:sp>
+      <p:sp>
+        <p:nvSpPr>
+          <p:cNvPr id="31" name="TextBox 31"/>
+          <p:cNvSpPr txBox="1"/>
+          <p:nvPr/>
+        </p:nvSpPr>
+        <p:spPr>
+          <a:xfrm>
+            <a:off x="5332095" y="2107882"/>
+            <a:ext cx="320245" cy="335280"/>
+          </a:xfrm>
+          <a:prstGeom prst="rect">
+            <a:avLst/>
+          </a:prstGeom>
+          <a:noFill/>
+          <a:ln>
+            <a:noFill/>
+          </a:ln>
+        </p:spPr>
+        <p:txBody>
+          <a:bodyPr wrap="none" lIns="0" tIns="0" rIns="0" bIns="0" anchor="t" anchorCtr="0">
+            <a:spAutoFit/>
+          </a:bodyPr>
+          <a:lstStyle/>
+          <a:p>
+            <a:pPr algn="l"/>
+            <a:r>
+              <a:rPr lang="zh-CN" sz="1650" b="1" dirty="0">
+                <a:solidFill>
+                  <a:srgbClr val="C4C4C4"/>
+                </a:solidFill>
+                <a:latin typeface="JetBrains Mono"/>
+                <a:ea typeface="Microsoft YaHei"/>
+                <a:cs typeface="JetBrains Mono"/>
+              </a:rPr>
+              <a:t>03</a:t>
+            </a:r>
+          </a:p>
+        </p:txBody>
+      </p:sp>
+      <p:sp>
+        <p:nvSpPr>
+          <p:cNvPr id="32" name="TextBox 32"/>
+          <p:cNvSpPr txBox="1"/>
+          <p:nvPr/>
+        </p:nvSpPr>
+        <p:spPr>
+          <a:xfrm>
+            <a:off x="5335905" y="2502218"/>
+            <a:ext cx="448342" cy="274320"/>
+          </a:xfrm>
+          <a:prstGeom prst="rect">
+            <a:avLst/>
+          </a:prstGeom>
+          <a:noFill/>
+          <a:ln>
+            <a:noFill/>
+          </a:ln>
+        </p:spPr>
+        <p:txBody>
+          <a:bodyPr wrap="none" lIns="0" tIns="0" rIns="0" bIns="0" anchor="t" anchorCtr="0">
+            <a:spAutoFit/>
+          </a:bodyPr>
+          <a:lstStyle/>
+          <a:p>
+            <a:pPr algn="l"/>
+            <a:r>
+              <a:rPr lang="zh-CN" sz="1350" b="1" dirty="0">
+                <a:solidFill>
+                  <a:srgbClr val="262626"/>
+                </a:solidFill>
+                <a:latin typeface="Inter"/>
+                <a:ea typeface="Microsoft YaHei"/>
+                <a:cs typeface="Inter"/>
+              </a:rPr>
+              <a:t>改善</a:t>
+            </a:r>
+          </a:p>
+        </p:txBody>
+      </p:sp>
+      <p:sp>
+        <p:nvSpPr>
+          <p:cNvPr id="33" name="TextBox 33"/>
+          <p:cNvSpPr txBox="1"/>
+          <p:nvPr/>
+        </p:nvSpPr>
+        <p:spPr>
+          <a:xfrm>
+            <a:off x="5760720" y="2550795"/>
+            <a:ext cx="522351" cy="182880"/>
+          </a:xfrm>
+          <a:prstGeom prst="rect">
+            <a:avLst/>
+          </a:prstGeom>
+          <a:noFill/>
+          <a:ln>
+            <a:noFill/>
+          </a:ln>
+        </p:spPr>
+        <p:txBody>
+          <a:bodyPr wrap="none" lIns="0" tIns="0" rIns="0" bIns="0" anchor="t" anchorCtr="0">
+            <a:spAutoFit/>
+          </a:bodyPr>
+          <a:lstStyle/>
+          <a:p>
+            <a:pPr algn="l"/>
+            <a:r>
+              <a:rPr lang="zh-CN" sz="900" dirty="0">
+                <a:solidFill>
+                  <a:srgbClr val="9B9B9B"/>
+                </a:solidFill>
+                <a:latin typeface="Inter"/>
+                <a:ea typeface="Microsoft YaHei"/>
+                <a:cs typeface="Inter"/>
+              </a:rPr>
+              <a:t>Improve</a:t>
+            </a:r>
+          </a:p>
+        </p:txBody>
+      </p:sp>
+      <p:sp>
+        <p:nvSpPr>
+          <p:cNvPr id="34" name="TextBox 34"/>
+          <p:cNvSpPr txBox="1"/>
+          <p:nvPr/>
+        </p:nvSpPr>
+        <p:spPr>
+          <a:xfrm>
+            <a:off x="5340668" y="2866549"/>
+            <a:ext cx="1092756" cy="198120"/>
+          </a:xfrm>
+          <a:prstGeom prst="rect">
+            <a:avLst/>
+          </a:prstGeom>
+          <a:noFill/>
+          <a:ln>
+            <a:noFill/>
+          </a:ln>
+        </p:spPr>
+        <p:txBody>
+          <a:bodyPr wrap="none" lIns="0" tIns="0" rIns="0" bIns="0" anchor="t" anchorCtr="0">
+            <a:spAutoFit/>
+          </a:bodyPr>
+          <a:lstStyle/>
+          <a:p>
+            <a:pPr algn="l"/>
+            <a:r>
+              <a:rPr lang="zh-CN" sz="975" dirty="0">
+                <a:solidFill>
+                  <a:srgbClr val="6E6E6E"/>
+                </a:solidFill>
+                <a:latin typeface="Inter"/>
+                <a:ea typeface="Microsoft YaHei"/>
+                <a:cs typeface="Inter"/>
+              </a:rPr>
+              <a:t>SMED/点检/看板</a:t>
+            </a:r>
+          </a:p>
+        </p:txBody>
+      </p:sp>
+      <p:sp>
+        <p:nvSpPr>
+          <p:cNvPr id="35" name="TextBox 35"/>
+          <p:cNvSpPr txBox="1"/>
+          <p:nvPr/>
+        </p:nvSpPr>
+        <p:spPr>
+          <a:xfrm>
+            <a:off x="5342572" y="3530441"/>
+            <a:ext cx="261937" cy="167640"/>
+          </a:xfrm>
+          <a:prstGeom prst="rect">
+            <a:avLst/>
+          </a:prstGeom>
+          <a:noFill/>
+          <a:ln>
+            <a:noFill/>
+          </a:ln>
+        </p:spPr>
+        <p:txBody>
+          <a:bodyPr wrap="none" lIns="0" tIns="0" rIns="0" bIns="0" anchor="t" anchorCtr="0">
+            <a:spAutoFit/>
+          </a:bodyPr>
+          <a:lstStyle/>
+          <a:p>
+            <a:pPr algn="l"/>
+            <a:r>
+              <a:rPr lang="zh-CN" sz="825" dirty="0">
+                <a:solidFill>
+                  <a:srgbClr val="9B9B9B"/>
+                </a:solidFill>
+                <a:latin typeface="Inter"/>
+                <a:ea typeface="Microsoft YaHei"/>
+                <a:cs typeface="Inter"/>
+              </a:rPr>
+              <a:t>交付</a:t>
+            </a:r>
+          </a:p>
+        </p:txBody>
+      </p:sp>
+      <p:sp>
+        <p:nvSpPr>
+          <p:cNvPr id="36" name="TextBox 36"/>
+          <p:cNvSpPr txBox="1"/>
+          <p:nvPr/>
+        </p:nvSpPr>
+        <p:spPr>
+          <a:xfrm>
+            <a:off x="5339715" y="3715702"/>
+            <a:ext cx="920332" cy="213360"/>
+          </a:xfrm>
+          <a:prstGeom prst="rect">
+            <a:avLst/>
+          </a:prstGeom>
+          <a:noFill/>
+          <a:ln>
+            <a:noFill/>
+          </a:ln>
+        </p:spPr>
+        <p:txBody>
+          <a:bodyPr wrap="none" lIns="0" tIns="0" rIns="0" bIns="0" anchor="t" anchorCtr="0">
+            <a:spAutoFit/>
+          </a:bodyPr>
+          <a:lstStyle/>
+          <a:p>
+            <a:pPr algn="l"/>
+            <a:r>
+              <a:rPr lang="zh-CN" sz="1050" b="1" dirty="0">
+                <a:solidFill>
+                  <a:srgbClr val="262626"/>
+                </a:solidFill>
+                <a:latin typeface="JetBrains Mono"/>
+                <a:ea typeface="Microsoft YaHei"/>
+                <a:cs typeface="JetBrains Mono"/>
+              </a:rPr>
+              <a:t>换型 −25min</a:t>
+            </a:r>
+          </a:p>
+        </p:txBody>
+      </p:sp>
+      <p:sp>
+        <p:nvSpPr>
+          <p:cNvPr id="37" name="Line 37"/>
+          <p:cNvSpPr/>
+          <p:nvPr/>
+        </p:nvSpPr>
+        <p:spPr>
+          <a:xfrm>
+            <a:off x="7105650" y="2619375"/>
+            <a:ext cx="342900" cy="9525"/>
+          </a:xfrm>
+          <a:custGeom>
+            <a:avLst/>
+            <a:gdLst/>
+            <a:ahLst/>
+            <a:cxnLst/>
+            <a:rect l="l" t="t" r="r" b="b"/>
+            <a:pathLst>
+              <a:path w="342900" h="9525">
+                <a:moveTo>
+                  <a:pt x="0" y="0"/>
+                </a:moveTo>
+                <a:lnTo>
+                  <a:pt x="342900" y="0"/>
+                </a:lnTo>
+              </a:path>
+            </a:pathLst>
+          </a:custGeom>
+          <a:noFill/>
+          <a:ln w="19050">
+            <a:solidFill>
+              <a:srgbClr val="9B9B9B"/>
+            </a:solidFill>
+          </a:ln>
+        </p:spPr>
+      </p:sp>
+      <p:sp>
+        <p:nvSpPr>
+          <p:cNvPr id="38" name="Polygon 38"/>
+          <p:cNvSpPr/>
+          <p:nvPr/>
+        </p:nvSpPr>
+        <p:spPr>
+          <a:xfrm>
+            <a:off x="7448550" y="2571750"/>
+            <a:ext cx="76200" cy="95250"/>
+          </a:xfrm>
+          <a:custGeom>
+            <a:avLst/>
+            <a:gdLst/>
+            <a:ahLst/>
+            <a:cxnLst/>
+            <a:rect l="l" t="t" r="r" b="b"/>
+            <a:pathLst>
+              <a:path w="76200" h="95250">
+                <a:moveTo>
+                  <a:pt x="0" y="0"/>
+                </a:moveTo>
+                <a:lnTo>
+                  <a:pt x="76200" y="47625"/>
+                </a:lnTo>
+                <a:lnTo>
+                  <a:pt x="0" y="95250"/>
+                </a:lnTo>
+                <a:close/>
+              </a:path>
+            </a:pathLst>
+          </a:custGeom>
+          <a:solidFill>
+            <a:srgbClr val="9B9B9B"/>
+          </a:solidFill>
+          <a:ln>
+            <a:noFill/>
+          </a:ln>
+        </p:spPr>
+      </p:sp>
+      <p:sp>
+        <p:nvSpPr>
+          <p:cNvPr id="39" name="Rectangle 39"/>
+          <p:cNvSpPr/>
+          <p:nvPr/>
+        </p:nvSpPr>
+        <p:spPr>
+          <a:xfrm>
+            <a:off x="7581900" y="1905000"/>
+            <a:ext cx="1828800" cy="1428750"/>
+          </a:xfrm>
+          <a:prstGeom prst="rect">
+            <a:avLst/>
+          </a:prstGeom>
+          <a:solidFill>
+            <a:srgbClr val="F3F3F3"/>
+          </a:solidFill>
+          <a:ln>
+            <a:noFill/>
+          </a:ln>
+        </p:spPr>
+      </p:sp>
+      <p:sp>
+        <p:nvSpPr>
+          <p:cNvPr id="40" name="TextBox 40"/>
+          <p:cNvSpPr txBox="1"/>
+          <p:nvPr/>
+        </p:nvSpPr>
+        <p:spPr>
+          <a:xfrm>
+            <a:off x="7732395" y="2107882"/>
+            <a:ext cx="320245" cy="335280"/>
+          </a:xfrm>
+          <a:prstGeom prst="rect">
+            <a:avLst/>
+          </a:prstGeom>
+          <a:noFill/>
+          <a:ln>
+            <a:noFill/>
+          </a:ln>
+        </p:spPr>
+        <p:txBody>
+          <a:bodyPr wrap="none" lIns="0" tIns="0" rIns="0" bIns="0" anchor="t" anchorCtr="0">
+            <a:spAutoFit/>
+          </a:bodyPr>
+          <a:lstStyle/>
+          <a:p>
+            <a:pPr algn="l"/>
+            <a:r>
+              <a:rPr lang="zh-CN" sz="1650" b="1" dirty="0">
+                <a:solidFill>
+                  <a:srgbClr val="C4C4C4"/>
+                </a:solidFill>
+                <a:latin typeface="JetBrains Mono"/>
+                <a:ea typeface="Microsoft YaHei"/>
+                <a:cs typeface="JetBrains Mono"/>
+              </a:rPr>
+              <a:t>04</a:t>
+            </a:r>
+          </a:p>
+        </p:txBody>
+      </p:sp>
+      <p:sp>
+        <p:nvSpPr>
+          <p:cNvPr id="41" name="TextBox 41"/>
+          <p:cNvSpPr txBox="1"/>
+          <p:nvPr/>
+        </p:nvSpPr>
+        <p:spPr>
+          <a:xfrm>
+            <a:off x="7736205" y="2502218"/>
+            <a:ext cx="655368" cy="274320"/>
+          </a:xfrm>
+          <a:prstGeom prst="rect">
+            <a:avLst/>
+          </a:prstGeom>
+          <a:noFill/>
+          <a:ln>
+            <a:noFill/>
+          </a:ln>
+        </p:spPr>
+        <p:txBody>
+          <a:bodyPr wrap="none" lIns="0" tIns="0" rIns="0" bIns="0" anchor="t" anchorCtr="0">
+            <a:spAutoFit/>
+          </a:bodyPr>
+          <a:lstStyle/>
+          <a:p>
+            <a:pPr algn="l"/>
+            <a:r>
+              <a:rPr lang="zh-CN" sz="1350" b="1" dirty="0">
+                <a:solidFill>
+                  <a:srgbClr val="262626"/>
+                </a:solidFill>
+                <a:latin typeface="Inter"/>
+                <a:ea typeface="Microsoft YaHei"/>
+                <a:cs typeface="Inter"/>
+              </a:rPr>
+              <a:t>标准化</a:t>
+            </a:r>
+          </a:p>
+        </p:txBody>
+      </p:sp>
+      <p:sp>
+        <p:nvSpPr>
+          <p:cNvPr id="42" name="TextBox 42"/>
+          <p:cNvSpPr txBox="1"/>
+          <p:nvPr/>
+        </p:nvSpPr>
+        <p:spPr>
+          <a:xfrm>
+            <a:off x="8161020" y="2550795"/>
+            <a:ext cx="785241" cy="182880"/>
+          </a:xfrm>
+          <a:prstGeom prst="rect">
+            <a:avLst/>
+          </a:prstGeom>
+          <a:noFill/>
+          <a:ln>
+            <a:noFill/>
+          </a:ln>
+        </p:spPr>
+        <p:txBody>
+          <a:bodyPr wrap="none" lIns="0" tIns="0" rIns="0" bIns="0" anchor="t" anchorCtr="0">
+            <a:spAutoFit/>
+          </a:bodyPr>
+          <a:lstStyle/>
+          <a:p>
+            <a:pPr algn="l"/>
+            <a:r>
+              <a:rPr lang="zh-CN" sz="900" dirty="0">
+                <a:solidFill>
+                  <a:srgbClr val="9B9B9B"/>
+                </a:solidFill>
+                <a:latin typeface="Inter"/>
+                <a:ea typeface="Microsoft YaHei"/>
+                <a:cs typeface="Inter"/>
+              </a:rPr>
+              <a:t>Standardize</a:t>
+            </a:r>
+          </a:p>
+        </p:txBody>
+      </p:sp>
+      <p:sp>
+        <p:nvSpPr>
+          <p:cNvPr id="43" name="TextBox 43"/>
+          <p:cNvSpPr txBox="1"/>
+          <p:nvPr/>
+        </p:nvSpPr>
+        <p:spPr>
+          <a:xfrm>
+            <a:off x="7740968" y="2866549"/>
+            <a:ext cx="957477" cy="198120"/>
+          </a:xfrm>
+          <a:prstGeom prst="rect">
+            <a:avLst/>
+          </a:prstGeom>
+          <a:noFill/>
+          <a:ln>
+            <a:noFill/>
+          </a:ln>
+        </p:spPr>
+        <p:txBody>
+          <a:bodyPr wrap="none" lIns="0" tIns="0" rIns="0" bIns="0" anchor="t" anchorCtr="0">
+            <a:spAutoFit/>
+          </a:bodyPr>
+          <a:lstStyle/>
+          <a:p>
+            <a:pPr algn="l"/>
+            <a:r>
+              <a:rPr lang="zh-CN" sz="975" dirty="0">
+                <a:solidFill>
+                  <a:srgbClr val="6E6E6E"/>
+                </a:solidFill>
+                <a:latin typeface="Inter"/>
+                <a:ea typeface="Microsoft YaHei"/>
+                <a:cs typeface="Inter"/>
+              </a:rPr>
+              <a:t>标准作业+培训</a:t>
+            </a:r>
+          </a:p>
+        </p:txBody>
+      </p:sp>
+      <p:sp>
+        <p:nvSpPr>
+          <p:cNvPr id="44" name="TextBox 44"/>
+          <p:cNvSpPr txBox="1"/>
+          <p:nvPr/>
+        </p:nvSpPr>
+        <p:spPr>
+          <a:xfrm>
+            <a:off x="7742872" y="3530441"/>
+            <a:ext cx="261937" cy="167640"/>
+          </a:xfrm>
+          <a:prstGeom prst="rect">
+            <a:avLst/>
+          </a:prstGeom>
+          <a:noFill/>
+          <a:ln>
+            <a:noFill/>
+          </a:ln>
+        </p:spPr>
+        <p:txBody>
+          <a:bodyPr wrap="none" lIns="0" tIns="0" rIns="0" bIns="0" anchor="t" anchorCtr="0">
+            <a:spAutoFit/>
+          </a:bodyPr>
+          <a:lstStyle/>
+          <a:p>
+            <a:pPr algn="l"/>
+            <a:r>
+              <a:rPr lang="zh-CN" sz="825" dirty="0">
+                <a:solidFill>
+                  <a:srgbClr val="9B9B9B"/>
+                </a:solidFill>
+                <a:latin typeface="Inter"/>
+                <a:ea typeface="Microsoft YaHei"/>
+                <a:cs typeface="Inter"/>
+              </a:rPr>
+              <a:t>交付</a:t>
+            </a:r>
+          </a:p>
+        </p:txBody>
+      </p:sp>
+      <p:sp>
+        <p:nvSpPr>
+          <p:cNvPr id="45" name="TextBox 45"/>
+          <p:cNvSpPr txBox="1"/>
+          <p:nvPr/>
+        </p:nvSpPr>
+        <p:spPr>
+          <a:xfrm>
+            <a:off x="7740015" y="3715702"/>
+            <a:ext cx="662699" cy="213360"/>
+          </a:xfrm>
+          <a:prstGeom prst="rect">
+            <a:avLst/>
+          </a:prstGeom>
+          <a:noFill/>
+          <a:ln>
+            <a:noFill/>
+          </a:ln>
+        </p:spPr>
+        <p:txBody>
+          <a:bodyPr wrap="none" lIns="0" tIns="0" rIns="0" bIns="0" anchor="t" anchorCtr="0">
+            <a:spAutoFit/>
+          </a:bodyPr>
+          <a:lstStyle/>
+          <a:p>
+            <a:pPr algn="l"/>
+            <a:r>
+              <a:rPr lang="zh-CN" sz="1050" b="1" dirty="0">
+                <a:solidFill>
+                  <a:srgbClr val="262626"/>
+                </a:solidFill>
+                <a:latin typeface="JetBrains Mono"/>
+                <a:ea typeface="Microsoft YaHei"/>
+                <a:cs typeface="JetBrains Mono"/>
+              </a:rPr>
+              <a:t>稽核 ≥90</a:t>
+            </a:r>
+          </a:p>
+        </p:txBody>
+      </p:sp>
+      <p:sp>
+        <p:nvSpPr>
+          <p:cNvPr id="46" name="Line 46"/>
+          <p:cNvSpPr/>
+          <p:nvPr/>
+        </p:nvSpPr>
+        <p:spPr>
+          <a:xfrm>
+            <a:off x="9505950" y="2619375"/>
+            <a:ext cx="342900" cy="9525"/>
+          </a:xfrm>
+          <a:custGeom>
+            <a:avLst/>
+            <a:gdLst/>
+            <a:ahLst/>
+            <a:cxnLst/>
+            <a:rect l="l" t="t" r="r" b="b"/>
+            <a:pathLst>
+              <a:path w="342900" h="9525">
+                <a:moveTo>
+                  <a:pt x="0" y="0"/>
+                </a:moveTo>
+                <a:lnTo>
+                  <a:pt x="342900" y="0"/>
+                </a:lnTo>
+              </a:path>
+            </a:pathLst>
+          </a:custGeom>
+          <a:noFill/>
+          <a:ln w="19050">
+            <a:solidFill>
+              <a:srgbClr val="9B9B9B"/>
+            </a:solidFill>
+          </a:ln>
+        </p:spPr>
+      </p:sp>
+      <p:sp>
+        <p:nvSpPr>
+          <p:cNvPr id="47" name="Polygon 47"/>
+          <p:cNvSpPr/>
+          <p:nvPr/>
+        </p:nvSpPr>
+        <p:spPr>
+          <a:xfrm>
+            <a:off x="9848850" y="2571750"/>
+            <a:ext cx="76200" cy="95250"/>
+          </a:xfrm>
+          <a:custGeom>
+            <a:avLst/>
+            <a:gdLst/>
+            <a:ahLst/>
+            <a:cxnLst/>
+            <a:rect l="l" t="t" r="r" b="b"/>
+            <a:pathLst>
+              <a:path w="76200" h="95250">
+                <a:moveTo>
+                  <a:pt x="0" y="0"/>
+                </a:moveTo>
+                <a:lnTo>
+                  <a:pt x="76200" y="47625"/>
+                </a:lnTo>
+                <a:lnTo>
+                  <a:pt x="0" y="95250"/>
+                </a:lnTo>
+                <a:close/>
+              </a:path>
+            </a:pathLst>
+          </a:custGeom>
+          <a:solidFill>
+            <a:srgbClr val="9B9B9B"/>
+          </a:solidFill>
+          <a:ln>
+            <a:noFill/>
+          </a:ln>
+        </p:spPr>
+      </p:sp>
+      <p:sp>
+        <p:nvSpPr>
+          <p:cNvPr id="48" name="Rectangle 48"/>
+          <p:cNvSpPr/>
+          <p:nvPr/>
+        </p:nvSpPr>
+        <p:spPr>
+          <a:xfrm>
+            <a:off x="9982200" y="1905000"/>
+            <a:ext cx="1828800" cy="1428750"/>
+          </a:xfrm>
+          <a:prstGeom prst="rect">
+            <a:avLst/>
+          </a:prstGeom>
+          <a:solidFill>
+            <a:srgbClr val="F3F3F3"/>
+          </a:solidFill>
+          <a:ln>
+            <a:noFill/>
+          </a:ln>
+        </p:spPr>
+      </p:sp>
+      <p:sp>
+        <p:nvSpPr>
+          <p:cNvPr id="49" name="TextBox 49"/>
+          <p:cNvSpPr txBox="1"/>
+          <p:nvPr/>
+        </p:nvSpPr>
+        <p:spPr>
+          <a:xfrm>
+            <a:off x="10132695" y="2107882"/>
+            <a:ext cx="320245" cy="335280"/>
+          </a:xfrm>
+          <a:prstGeom prst="rect">
+            <a:avLst/>
+          </a:prstGeom>
+          <a:noFill/>
+          <a:ln>
+            <a:noFill/>
+          </a:ln>
+        </p:spPr>
+        <p:txBody>
+          <a:bodyPr wrap="none" lIns="0" tIns="0" rIns="0" bIns="0" anchor="t" anchorCtr="0">
+            <a:spAutoFit/>
+          </a:bodyPr>
+          <a:lstStyle/>
+          <a:p>
+            <a:pPr algn="l"/>
+            <a:r>
+              <a:rPr lang="zh-CN" sz="1650" b="1" dirty="0">
+                <a:solidFill>
+                  <a:srgbClr val="C4C4C4"/>
+                </a:solidFill>
+                <a:latin typeface="JetBrains Mono"/>
+                <a:ea typeface="Microsoft YaHei"/>
+                <a:cs typeface="JetBrains Mono"/>
+              </a:rPr>
+              <a:t>05</a:t>
+            </a:r>
+          </a:p>
+        </p:txBody>
+      </p:sp>
+      <p:sp>
+        <p:nvSpPr>
+          <p:cNvPr id="50" name="TextBox 50"/>
+          <p:cNvSpPr txBox="1"/>
+          <p:nvPr/>
+        </p:nvSpPr>
+        <p:spPr>
+          <a:xfrm>
+            <a:off x="10136505" y="2502218"/>
+            <a:ext cx="448342" cy="274320"/>
+          </a:xfrm>
+          <a:prstGeom prst="rect">
+            <a:avLst/>
+          </a:prstGeom>
+          <a:noFill/>
+          <a:ln>
+            <a:noFill/>
+          </a:ln>
+        </p:spPr>
+        <p:txBody>
+          <a:bodyPr wrap="none" lIns="0" tIns="0" rIns="0" bIns="0" anchor="t" anchorCtr="0">
+            <a:spAutoFit/>
+          </a:bodyPr>
+          <a:lstStyle/>
+          <a:p>
+            <a:pPr algn="l"/>
+            <a:r>
+              <a:rPr lang="zh-CN" sz="1350" b="1" dirty="0">
+                <a:solidFill>
+                  <a:srgbClr val="262626"/>
+                </a:solidFill>
+                <a:latin typeface="Inter"/>
+                <a:ea typeface="Microsoft YaHei"/>
+                <a:cs typeface="Inter"/>
+              </a:rPr>
+              <a:t>复盘</a:t>
+            </a:r>
+          </a:p>
+        </p:txBody>
+      </p:sp>
+      <p:sp>
+        <p:nvSpPr>
+          <p:cNvPr id="51" name="TextBox 51"/>
+          <p:cNvSpPr txBox="1"/>
+          <p:nvPr/>
+        </p:nvSpPr>
+        <p:spPr>
+          <a:xfrm>
+            <a:off x="10561320" y="2550795"/>
+            <a:ext cx="450056" cy="182880"/>
+          </a:xfrm>
+          <a:prstGeom prst="rect">
+            <a:avLst/>
+          </a:prstGeom>
+          <a:noFill/>
+          <a:ln>
+            <a:noFill/>
+          </a:ln>
+        </p:spPr>
+        <p:txBody>
+          <a:bodyPr wrap="none" lIns="0" tIns="0" rIns="0" bIns="0" anchor="t" anchorCtr="0">
+            <a:spAutoFit/>
+          </a:bodyPr>
+          <a:lstStyle/>
+          <a:p>
+            <a:pPr algn="l"/>
+            <a:r>
+              <a:rPr lang="zh-CN" sz="900" dirty="0">
+                <a:solidFill>
+                  <a:srgbClr val="9B9B9B"/>
+                </a:solidFill>
+                <a:latin typeface="Inter"/>
+                <a:ea typeface="Microsoft YaHei"/>
+                <a:cs typeface="Inter"/>
+              </a:rPr>
+              <a:t>Review</a:t>
+            </a:r>
+          </a:p>
+        </p:txBody>
+      </p:sp>
+      <p:sp>
+        <p:nvSpPr>
+          <p:cNvPr id="52" name="TextBox 52"/>
+          <p:cNvSpPr txBox="1"/>
+          <p:nvPr/>
+        </p:nvSpPr>
+        <p:spPr>
+          <a:xfrm>
+            <a:off x="10141268" y="2866549"/>
+            <a:ext cx="957477" cy="198120"/>
+          </a:xfrm>
+          <a:prstGeom prst="rect">
+            <a:avLst/>
+          </a:prstGeom>
+          <a:noFill/>
+          <a:ln>
+            <a:noFill/>
+          </a:ln>
+        </p:spPr>
+        <p:txBody>
+          <a:bodyPr wrap="none" lIns="0" tIns="0" rIns="0" bIns="0" anchor="t" anchorCtr="0">
+            <a:spAutoFit/>
+          </a:bodyPr>
+          <a:lstStyle/>
+          <a:p>
+            <a:pPr algn="l"/>
+            <a:r>
+              <a:rPr lang="zh-CN" sz="975" dirty="0">
+                <a:solidFill>
+                  <a:srgbClr val="6E6E6E"/>
+                </a:solidFill>
+                <a:latin typeface="Inter"/>
+                <a:ea typeface="Microsoft YaHei"/>
+                <a:cs typeface="Inter"/>
+              </a:rPr>
+              <a:t>月度例会+迭代</a:t>
+            </a:r>
+          </a:p>
+        </p:txBody>
+      </p:sp>
+      <p:sp>
+        <p:nvSpPr>
+          <p:cNvPr id="53" name="TextBox 53"/>
+          <p:cNvSpPr txBox="1"/>
+          <p:nvPr/>
+        </p:nvSpPr>
+        <p:spPr>
+          <a:xfrm>
+            <a:off x="10143172" y="3530441"/>
+            <a:ext cx="261937" cy="167640"/>
+          </a:xfrm>
+          <a:prstGeom prst="rect">
+            <a:avLst/>
+          </a:prstGeom>
+          <a:noFill/>
+          <a:ln>
+            <a:noFill/>
+          </a:ln>
+        </p:spPr>
+        <p:txBody>
+          <a:bodyPr wrap="none" lIns="0" tIns="0" rIns="0" bIns="0" anchor="t" anchorCtr="0">
+            <a:spAutoFit/>
+          </a:bodyPr>
+          <a:lstStyle/>
+          <a:p>
+            <a:pPr algn="l"/>
+            <a:r>
+              <a:rPr lang="zh-CN" sz="825" dirty="0">
+                <a:solidFill>
+                  <a:srgbClr val="9B9B9B"/>
+                </a:solidFill>
+                <a:latin typeface="Inter"/>
+                <a:ea typeface="Microsoft YaHei"/>
+                <a:cs typeface="Inter"/>
+              </a:rPr>
+              <a:t>交付</a:t>
+            </a:r>
+          </a:p>
+        </p:txBody>
+      </p:sp>
+      <p:sp>
+        <p:nvSpPr>
+          <p:cNvPr id="54" name="TextBox 54"/>
+          <p:cNvSpPr txBox="1"/>
+          <p:nvPr/>
+        </p:nvSpPr>
+        <p:spPr>
+          <a:xfrm>
+            <a:off x="10140315" y="3715702"/>
+            <a:ext cx="694904" cy="213360"/>
+          </a:xfrm>
+          <a:prstGeom prst="rect">
+            <a:avLst/>
+          </a:prstGeom>
+          <a:noFill/>
+          <a:ln>
+            <a:noFill/>
+          </a:ln>
+        </p:spPr>
+        <p:txBody>
+          <a:bodyPr wrap="none" lIns="0" tIns="0" rIns="0" bIns="0" anchor="t" anchorCtr="0">
+            <a:spAutoFit/>
+          </a:bodyPr>
+          <a:lstStyle/>
+          <a:p>
+            <a:pPr algn="l"/>
+            <a:r>
+              <a:rPr lang="zh-CN" sz="1050" b="1" dirty="0">
+                <a:solidFill>
+                  <a:srgbClr val="262626"/>
+                </a:solidFill>
+                <a:latin typeface="JetBrains Mono"/>
+                <a:ea typeface="Microsoft YaHei"/>
+                <a:cs typeface="JetBrains Mono"/>
+              </a:rPr>
+              <a:t>OEE 月升</a:t>
+            </a:r>
+          </a:p>
+        </p:txBody>
+      </p:sp>
+      <p:sp>
+        <p:nvSpPr>
+          <p:cNvPr id="55" name="Line 55"/>
+          <p:cNvSpPr/>
+          <p:nvPr/>
+        </p:nvSpPr>
+        <p:spPr>
+          <a:xfrm>
+            <a:off x="10896600" y="3962400"/>
+            <a:ext cx="9525" cy="247650"/>
+          </a:xfrm>
+          <a:custGeom>
+            <a:avLst/>
+            <a:gdLst/>
+            <a:ahLst/>
+            <a:cxnLst/>
+            <a:rect l="l" t="t" r="r" b="b"/>
+            <a:pathLst>
+              <a:path w="9525" h="247650">
+                <a:moveTo>
+                  <a:pt x="0" y="0"/>
+                </a:moveTo>
+                <a:lnTo>
+                  <a:pt x="0" y="247650"/>
+                </a:lnTo>
+              </a:path>
+            </a:pathLst>
+          </a:custGeom>
+          <a:noFill/>
+          <a:ln w="14288">
+            <a:solidFill>
+              <a:srgbClr val="9B9B9B"/>
+            </a:solidFill>
+          </a:ln>
+        </p:spPr>
+      </p:sp>
+      <p:sp>
+        <p:nvSpPr>
+          <p:cNvPr id="56" name="Line 56"/>
+          <p:cNvSpPr/>
+          <p:nvPr/>
+        </p:nvSpPr>
+        <p:spPr>
+          <a:xfrm>
+            <a:off x="1295400" y="4210050"/>
+            <a:ext cx="9601200" cy="9525"/>
+          </a:xfrm>
+          <a:custGeom>
+            <a:avLst/>
+            <a:gdLst/>
+            <a:ahLst/>
+            <a:cxnLst/>
+            <a:rect l="l" t="t" r="r" b="b"/>
+            <a:pathLst>
+              <a:path w="9601200" h="9525">
+                <a:moveTo>
+                  <a:pt x="9601200" y="0"/>
+                </a:moveTo>
+                <a:lnTo>
+                  <a:pt x="0" y="0"/>
+                </a:lnTo>
+              </a:path>
+            </a:pathLst>
+          </a:custGeom>
+          <a:noFill/>
+          <a:ln w="14288">
+            <a:solidFill>
+              <a:srgbClr val="9B9B9B"/>
+            </a:solidFill>
+          </a:ln>
+        </p:spPr>
+      </p:sp>
+      <p:sp>
+        <p:nvSpPr>
+          <p:cNvPr id="57" name="Line 57"/>
+          <p:cNvSpPr/>
+          <p:nvPr/>
+        </p:nvSpPr>
+        <p:spPr>
+          <a:xfrm>
+            <a:off x="1295400" y="3962400"/>
+            <a:ext cx="9525" cy="247650"/>
+          </a:xfrm>
+          <a:custGeom>
+            <a:avLst/>
+            <a:gdLst/>
+            <a:ahLst/>
+            <a:cxnLst/>
+            <a:rect l="l" t="t" r="r" b="b"/>
+            <a:pathLst>
+              <a:path w="9525" h="247650">
+                <a:moveTo>
+                  <a:pt x="0" y="247650"/>
+                </a:moveTo>
+                <a:lnTo>
+                  <a:pt x="0" y="0"/>
+                </a:lnTo>
+              </a:path>
+            </a:pathLst>
+          </a:custGeom>
+          <a:noFill/>
+          <a:ln w="14288">
+            <a:solidFill>
+              <a:srgbClr val="9B9B9B"/>
+            </a:solidFill>
+          </a:ln>
+        </p:spPr>
+      </p:sp>
+      <p:sp>
+        <p:nvSpPr>
+          <p:cNvPr id="58" name="Polygon 58"/>
+          <p:cNvSpPr/>
+          <p:nvPr/>
+        </p:nvSpPr>
+        <p:spPr>
+          <a:xfrm>
+            <a:off x="1247775" y="3962400"/>
+            <a:ext cx="95250" cy="76200"/>
+          </a:xfrm>
+          <a:custGeom>
+            <a:avLst/>
+            <a:gdLst/>
+            <a:ahLst/>
+            <a:cxnLst/>
+            <a:rect l="l" t="t" r="r" b="b"/>
+            <a:pathLst>
+              <a:path w="95250" h="76200">
+                <a:moveTo>
+                  <a:pt x="0" y="76200"/>
+                </a:moveTo>
+                <a:lnTo>
+                  <a:pt x="47625" y="0"/>
+                </a:lnTo>
+                <a:lnTo>
+                  <a:pt x="95250" y="76200"/>
+                </a:lnTo>
+                <a:close/>
+              </a:path>
+            </a:pathLst>
+          </a:custGeom>
+          <a:solidFill>
+            <a:srgbClr val="9B9B9B"/>
+          </a:solidFill>
+          <a:ln>
+            <a:noFill/>
+          </a:ln>
+        </p:spPr>
+      </p:sp>
+      <p:sp>
+        <p:nvSpPr>
+          <p:cNvPr id="59" name="TextBox 59"/>
+          <p:cNvSpPr txBox="1"/>
+          <p:nvPr/>
+        </p:nvSpPr>
+        <p:spPr>
+          <a:xfrm>
+            <a:off x="4997696" y="4306252"/>
+            <a:ext cx="2196608" cy="213360"/>
+          </a:xfrm>
+          <a:prstGeom prst="rect">
+            <a:avLst/>
+          </a:prstGeom>
+          <a:noFill/>
+          <a:ln>
+            <a:noFill/>
+          </a:ln>
+        </p:spPr>
+        <p:txBody>
+          <a:bodyPr wrap="none" lIns="0" tIns="0" rIns="0" bIns="0" anchor="t" anchorCtr="0">
+            <a:spAutoFit/>
+          </a:bodyPr>
+          <a:lstStyle/>
+          <a:p>
+            <a:pPr algn="ctr"/>
+            <a:r>
+              <a:rPr lang="zh-CN" sz="1050" dirty="0">
+                <a:solidFill>
+                  <a:srgbClr val="6E6E6E"/>
+                </a:solidFill>
+                <a:latin typeface="Inter"/>
+                <a:ea typeface="Microsoft YaHei"/>
+                <a:cs typeface="Inter"/>
+              </a:rPr>
+              <a:t>每月复盘 · 持续迭代，避免回潮</a:t>
+            </a:r>
+          </a:p>
+        </p:txBody>
+      </p:sp>
+      <p:sp>
+        <p:nvSpPr>
+          <p:cNvPr id="60" name="Ellipse 60"/>
+          <p:cNvSpPr/>
+          <p:nvPr/>
+        </p:nvSpPr>
+        <p:spPr>
+          <a:xfrm>
+            <a:off x="390525" y="5934075"/>
+            <a:ext cx="57150" cy="57150"/>
+          </a:xfrm>
+          <a:prstGeom prst="ellipse">
+            <a:avLst/>
+          </a:prstGeom>
+          <a:solidFill>
+            <a:srgbClr val="336EE8"/>
+          </a:solidFill>
+          <a:ln>
+            <a:noFill/>
+          </a:ln>
+        </p:spPr>
+      </p:sp>
+      <p:sp>
+        <p:nvSpPr>
+          <p:cNvPr id="61" name="TextBox 61"/>
+          <p:cNvSpPr txBox="1"/>
+          <p:nvPr/>
+        </p:nvSpPr>
+        <p:spPr>
+          <a:xfrm>
+            <a:off x="557212" y="5898356"/>
+            <a:ext cx="4957762" cy="228600"/>
+          </a:xfrm>
+          <a:prstGeom prst="rect">
+            <a:avLst/>
+          </a:prstGeom>
+          <a:noFill/>
+          <a:ln>
+            <a:noFill/>
+          </a:ln>
+        </p:spPr>
+        <p:txBody>
+          <a:bodyPr wrap="none" lIns="0" tIns="0" rIns="0" bIns="0" anchor="t" anchorCtr="0">
+            <a:spAutoFit/>
+          </a:bodyPr>
+          <a:lstStyle/>
+          <a:p>
+            <a:pPr algn="l"/>
+            <a:r>
+              <a:rPr lang="zh-CN" sz="1125" dirty="0">
+                <a:solidFill>
+                  <a:srgbClr val="262626"/>
+                </a:solidFill>
+                <a:latin typeface="Inter"/>
+                <a:ea typeface="Microsoft YaHei"/>
+                <a:cs typeface="Inter"/>
+              </a:rPr>
+              <a:t>闭环每月跑一轮：数据驱动诊断、诊断驱动改善、改善沉淀为标准。</a:t>
             </a:r>
           </a:p>
         </p:txBody>

--- a/examples/aham-ppt-v6.1-demo.pptx
+++ b/examples/aham-ppt-v6.1-demo.pptx
@@ -3158,7 +3158,7 @@
         <p:spPr>
           <a:xfrm>
             <a:off x="572452" y="570071"/>
-            <a:ext cx="560661" cy="289560"/>
+            <a:ext cx="674724" cy="289560"/>
           </a:xfrm>
           <a:prstGeom prst="rect">
             <a:avLst/>
@@ -3198,7 +3198,7 @@
         <p:spPr>
           <a:xfrm>
             <a:off x="1109662" y="602456"/>
-            <a:ext cx="1154073" cy="228600"/>
+            <a:ext cx="1281377" cy="228600"/>
           </a:xfrm>
           <a:prstGeom prst="rect">
             <a:avLst/>
@@ -3238,7 +3238,7 @@
         <p:spPr>
           <a:xfrm>
             <a:off x="335280" y="2659380"/>
-            <a:ext cx="4507992" cy="731520"/>
+            <a:ext cx="5003050" cy="731520"/>
           </a:xfrm>
           <a:prstGeom prst="rect">
             <a:avLst/>
@@ -3278,7 +3278,7 @@
         <p:spPr>
           <a:xfrm>
             <a:off x="335280" y="3268980"/>
-            <a:ext cx="3955923" cy="731520"/>
+            <a:ext cx="4389098" cy="731520"/>
           </a:xfrm>
           <a:prstGeom prst="rect">
             <a:avLst/>
@@ -3340,7 +3340,7 @@
         <p:spPr>
           <a:xfrm>
             <a:off x="361950" y="4200525"/>
-            <a:ext cx="3389948" cy="304800"/>
+            <a:ext cx="3894696" cy="304800"/>
           </a:xfrm>
           <a:prstGeom prst="rect">
             <a:avLst/>
@@ -3460,7 +3460,7 @@
         <p:spPr>
           <a:xfrm>
             <a:off x="8483918" y="2790349"/>
-            <a:ext cx="1007316" cy="198120"/>
+            <a:ext cx="1181271" cy="198120"/>
           </a:xfrm>
           <a:prstGeom prst="rect">
             <a:avLst/>
@@ -3500,7 +3500,7 @@
         <p:spPr>
           <a:xfrm>
             <a:off x="8481060" y="3223260"/>
-            <a:ext cx="179451" cy="243840"/>
+            <a:ext cx="242474" cy="243840"/>
           </a:xfrm>
           <a:prstGeom prst="rect">
             <a:avLst/>
@@ -3540,7 +3540,7 @@
         <p:spPr>
           <a:xfrm>
             <a:off x="8899208" y="3215164"/>
-            <a:ext cx="1708309" cy="259080"/>
+            <a:ext cx="1878583" cy="259080"/>
           </a:xfrm>
           <a:prstGeom prst="rect">
             <a:avLst/>
@@ -3580,7 +3580,7 @@
         <p:spPr>
           <a:xfrm>
             <a:off x="8481060" y="3623310"/>
-            <a:ext cx="223266" cy="243840"/>
+            <a:ext cx="265188" cy="243840"/>
           </a:xfrm>
           <a:prstGeom prst="rect">
             <a:avLst/>
@@ -3620,7 +3620,7 @@
         <p:spPr>
           <a:xfrm>
             <a:off x="8899208" y="3615214"/>
-            <a:ext cx="1708309" cy="259080"/>
+            <a:ext cx="1878583" cy="259080"/>
           </a:xfrm>
           <a:prstGeom prst="rect">
             <a:avLst/>
@@ -3660,7 +3660,7 @@
         <p:spPr>
           <a:xfrm>
             <a:off x="8481060" y="4023360"/>
-            <a:ext cx="223266" cy="243840"/>
+            <a:ext cx="265188" cy="243840"/>
           </a:xfrm>
           <a:prstGeom prst="rect">
             <a:avLst/>
@@ -3700,7 +3700,7 @@
         <p:spPr>
           <a:xfrm>
             <a:off x="8899208" y="4015264"/>
-            <a:ext cx="1522095" cy="259080"/>
+            <a:ext cx="1673450" cy="259080"/>
           </a:xfrm>
           <a:prstGeom prst="rect">
             <a:avLst/>
@@ -3740,7 +3740,7 @@
         <p:spPr>
           <a:xfrm>
             <a:off x="8481060" y="4423410"/>
-            <a:ext cx="223266" cy="243840"/>
+            <a:ext cx="265188" cy="243840"/>
           </a:xfrm>
           <a:prstGeom prst="rect">
             <a:avLst/>
@@ -3780,7 +3780,7 @@
         <p:spPr>
           <a:xfrm>
             <a:off x="8899208" y="4415314"/>
-            <a:ext cx="1782794" cy="259080"/>
+            <a:ext cx="1987182" cy="259080"/>
           </a:xfrm>
           <a:prstGeom prst="rect">
             <a:avLst/>
@@ -3856,7 +3856,7 @@
         <p:spPr>
           <a:xfrm>
             <a:off x="368618" y="6390799"/>
-            <a:ext cx="3983450" cy="198120"/>
+            <a:ext cx="4650788" cy="198120"/>
           </a:xfrm>
           <a:prstGeom prst="rect">
             <a:avLst/>
@@ -3928,8 +3928,8 @@
         </p:nvSpPr>
         <p:spPr>
           <a:xfrm>
-            <a:off x="10780466" y="6390799"/>
-            <a:ext cx="1042916" cy="198120"/>
+            <a:off x="10663643" y="6390799"/>
+            <a:ext cx="1159740" cy="198120"/>
           </a:xfrm>
           <a:prstGeom prst="rect">
             <a:avLst/>
@@ -4016,7 +4016,7 @@
         <p:spPr>
           <a:xfrm>
             <a:off x="370522" y="139541"/>
-            <a:ext cx="882467" cy="167640"/>
+            <a:ext cx="981318" cy="167640"/>
           </a:xfrm>
           <a:prstGeom prst="rect">
             <a:avLst/>
@@ -4055,7 +4055,7 @@
         </p:nvSpPr>
         <p:spPr>
           <a:xfrm>
-            <a:off x="11410950" y="152400"/>
+            <a:off x="11315700" y="152400"/>
             <a:ext cx="85725" cy="85725"/>
           </a:xfrm>
           <a:prstGeom prst="rect">
@@ -4077,8 +4077,8 @@
         </p:nvSpPr>
         <p:spPr>
           <a:xfrm>
-            <a:off x="11468329" y="131445"/>
-            <a:ext cx="354101" cy="182880"/>
+            <a:off x="11396288" y="131445"/>
+            <a:ext cx="426142" cy="182880"/>
           </a:xfrm>
           <a:prstGeom prst="rect">
             <a:avLst/>
@@ -4154,7 +4154,7 @@
         <p:spPr>
           <a:xfrm>
             <a:off x="350520" y="483870"/>
-            <a:ext cx="7145846" cy="487680"/>
+            <a:ext cx="8158695" cy="487680"/>
           </a:xfrm>
           <a:prstGeom prst="rect">
             <a:avLst/>
@@ -4266,7 +4266,7 @@
         <p:spPr>
           <a:xfrm>
             <a:off x="370522" y="6664166"/>
-            <a:ext cx="864394" cy="167640"/>
+            <a:ext cx="950087" cy="167640"/>
           </a:xfrm>
           <a:prstGeom prst="rect">
             <a:avLst/>
@@ -4305,8 +4305,8 @@
         </p:nvSpPr>
         <p:spPr>
           <a:xfrm>
-            <a:off x="11487245" y="6664166"/>
-            <a:ext cx="334232" cy="167640"/>
+            <a:off x="11360681" y="6664166"/>
+            <a:ext cx="460796" cy="167640"/>
           </a:xfrm>
           <a:prstGeom prst="rect">
             <a:avLst/>
@@ -4368,7 +4368,7 @@
         <p:spPr>
           <a:xfrm>
             <a:off x="645795" y="1707832"/>
-            <a:ext cx="1054036" cy="335280"/>
+            <a:ext cx="1167487" cy="335280"/>
           </a:xfrm>
           <a:prstGeom prst="rect">
             <a:avLst/>
@@ -4408,7 +4408,7 @@
         <p:spPr>
           <a:xfrm>
             <a:off x="655320" y="2017395"/>
-            <a:ext cx="732663" cy="182880"/>
+            <a:ext cx="900177" cy="182880"/>
           </a:xfrm>
           <a:prstGeom prst="rect">
             <a:avLst/>
@@ -4448,7 +4448,7 @@
         <p:spPr>
           <a:xfrm>
             <a:off x="6646545" y="1707832"/>
-            <a:ext cx="1054036" cy="335280"/>
+            <a:ext cx="1167487" cy="335280"/>
           </a:xfrm>
           <a:prstGeom prst="rect">
             <a:avLst/>
@@ -4488,7 +4488,7 @@
         <p:spPr>
           <a:xfrm>
             <a:off x="7797165" y="1772602"/>
-            <a:ext cx="348710" cy="213360"/>
+            <a:ext cx="384808" cy="213360"/>
           </a:xfrm>
           <a:prstGeom prst="rect">
             <a:avLst/>
@@ -4550,7 +4550,7 @@
         <p:spPr>
           <a:xfrm>
             <a:off x="6656070" y="2017395"/>
-            <a:ext cx="548640" cy="182880"/>
+            <a:ext cx="653165" cy="182880"/>
           </a:xfrm>
           <a:prstGeom prst="rect">
             <a:avLst/>
@@ -4613,8 +4613,8 @@
         </p:nvSpPr>
         <p:spPr>
           <a:xfrm>
-            <a:off x="5979547" y="1899285"/>
-            <a:ext cx="232905" cy="243840"/>
+            <a:off x="5956365" y="1899285"/>
+            <a:ext cx="279271" cy="243840"/>
           </a:xfrm>
           <a:prstGeom prst="rect">
             <a:avLst/>
@@ -4654,7 +4654,7 @@
         <p:spPr>
           <a:xfrm>
             <a:off x="653415" y="2706052"/>
-            <a:ext cx="663083" cy="213360"/>
+            <a:ext cx="758713" cy="213360"/>
           </a:xfrm>
           <a:prstGeom prst="rect">
             <a:avLst/>
@@ -4716,7 +4716,7 @@
         <p:spPr>
           <a:xfrm>
             <a:off x="2860358" y="2681764"/>
-            <a:ext cx="293084" cy="259080"/>
+            <a:ext cx="382318" cy="259080"/>
           </a:xfrm>
           <a:prstGeom prst="rect">
             <a:avLst/>
@@ -4756,7 +4756,7 @@
         <p:spPr>
           <a:xfrm>
             <a:off x="6654165" y="2706052"/>
-            <a:ext cx="663083" cy="213360"/>
+            <a:ext cx="758713" cy="213360"/>
           </a:xfrm>
           <a:prstGeom prst="rect">
             <a:avLst/>
@@ -4818,7 +4818,7 @@
         <p:spPr>
           <a:xfrm>
             <a:off x="8861108" y="2681764"/>
-            <a:ext cx="442055" cy="259080"/>
+            <a:ext cx="531140" cy="259080"/>
           </a:xfrm>
           <a:prstGeom prst="rect">
             <a:avLst/>
@@ -4930,7 +4930,7 @@
         <p:spPr>
           <a:xfrm>
             <a:off x="653415" y="3239452"/>
-            <a:ext cx="793432" cy="213360"/>
+            <a:ext cx="871336" cy="213360"/>
           </a:xfrm>
           <a:prstGeom prst="rect">
             <a:avLst/>
@@ -4992,7 +4992,7 @@
         <p:spPr>
           <a:xfrm>
             <a:off x="2860358" y="3215164"/>
-            <a:ext cx="684133" cy="259080"/>
+            <a:ext cx="800628" cy="259080"/>
           </a:xfrm>
           <a:prstGeom prst="rect">
             <a:avLst/>
@@ -5032,7 +5032,7 @@
         <p:spPr>
           <a:xfrm>
             <a:off x="6654165" y="3239452"/>
-            <a:ext cx="793432" cy="213360"/>
+            <a:ext cx="871336" cy="213360"/>
           </a:xfrm>
           <a:prstGeom prst="rect">
             <a:avLst/>
@@ -5094,7 +5094,7 @@
         <p:spPr>
           <a:xfrm>
             <a:off x="8861108" y="3215164"/>
-            <a:ext cx="926211" cy="259080"/>
+            <a:ext cx="1070117" cy="259080"/>
           </a:xfrm>
           <a:prstGeom prst="rect">
             <a:avLst/>
@@ -5206,7 +5206,7 @@
         <p:spPr>
           <a:xfrm>
             <a:off x="653415" y="3772852"/>
-            <a:ext cx="640080" cy="213360"/>
+            <a:ext cx="702402" cy="213360"/>
           </a:xfrm>
           <a:prstGeom prst="rect">
             <a:avLst/>
@@ -5268,7 +5268,7 @@
         <p:spPr>
           <a:xfrm>
             <a:off x="2860358" y="3748564"/>
-            <a:ext cx="777240" cy="259080"/>
+            <a:ext cx="852917" cy="259080"/>
           </a:xfrm>
           <a:prstGeom prst="rect">
             <a:avLst/>
@@ -5308,7 +5308,7 @@
         <p:spPr>
           <a:xfrm>
             <a:off x="6654165" y="3772852"/>
-            <a:ext cx="640080" cy="213360"/>
+            <a:ext cx="702402" cy="213360"/>
           </a:xfrm>
           <a:prstGeom prst="rect">
             <a:avLst/>
@@ -5370,7 +5370,7 @@
         <p:spPr>
           <a:xfrm>
             <a:off x="8861108" y="3748564"/>
-            <a:ext cx="805172" cy="259080"/>
+            <a:ext cx="937384" cy="259080"/>
           </a:xfrm>
           <a:prstGeom prst="rect">
             <a:avLst/>
@@ -5482,7 +5482,7 @@
         <p:spPr>
           <a:xfrm>
             <a:off x="653415" y="4306252"/>
-            <a:ext cx="640080" cy="213360"/>
+            <a:ext cx="702402" cy="213360"/>
           </a:xfrm>
           <a:prstGeom prst="rect">
             <a:avLst/>
@@ -5544,7 +5544,7 @@
         <p:spPr>
           <a:xfrm>
             <a:off x="2860358" y="4281964"/>
-            <a:ext cx="777240" cy="259080"/>
+            <a:ext cx="852917" cy="259080"/>
           </a:xfrm>
           <a:prstGeom prst="rect">
             <a:avLst/>
@@ -5584,7 +5584,7 @@
         <p:spPr>
           <a:xfrm>
             <a:off x="6654165" y="4306252"/>
-            <a:ext cx="640080" cy="213360"/>
+            <a:ext cx="702402" cy="213360"/>
           </a:xfrm>
           <a:prstGeom prst="rect">
             <a:avLst/>
@@ -5646,7 +5646,7 @@
         <p:spPr>
           <a:xfrm>
             <a:off x="8861108" y="4281964"/>
-            <a:ext cx="777240" cy="259080"/>
+            <a:ext cx="852917" cy="259080"/>
           </a:xfrm>
           <a:prstGeom prst="rect">
             <a:avLst/>
@@ -5758,7 +5758,7 @@
         <p:spPr>
           <a:xfrm>
             <a:off x="653415" y="4839652"/>
-            <a:ext cx="663083" cy="213360"/>
+            <a:ext cx="771963" cy="213360"/>
           </a:xfrm>
           <a:prstGeom prst="rect">
             <a:avLst/>
@@ -5820,7 +5820,7 @@
         <p:spPr>
           <a:xfrm>
             <a:off x="2860358" y="4815364"/>
-            <a:ext cx="963454" cy="259080"/>
+            <a:ext cx="1058050" cy="259080"/>
           </a:xfrm>
           <a:prstGeom prst="rect">
             <a:avLst/>
@@ -5860,7 +5860,7 @@
         <p:spPr>
           <a:xfrm>
             <a:off x="6654165" y="4839652"/>
-            <a:ext cx="663083" cy="213360"/>
+            <a:ext cx="771963" cy="213360"/>
           </a:xfrm>
           <a:prstGeom prst="rect">
             <a:avLst/>
@@ -5922,7 +5922,7 @@
         <p:spPr>
           <a:xfrm>
             <a:off x="8861108" y="4815364"/>
-            <a:ext cx="1149668" cy="259080"/>
+            <a:ext cx="1263183" cy="259080"/>
           </a:xfrm>
           <a:prstGeom prst="rect">
             <a:avLst/>
@@ -6056,7 +6056,7 @@
         <p:spPr>
           <a:xfrm>
             <a:off x="557212" y="5898356"/>
-            <a:ext cx="5401389" cy="228600"/>
+            <a:ext cx="6122234" cy="228600"/>
           </a:xfrm>
           <a:prstGeom prst="rect">
             <a:avLst/>
@@ -6143,7 +6143,7 @@
         <p:spPr>
           <a:xfrm>
             <a:off x="368618" y="656749"/>
-            <a:ext cx="1270754" cy="198120"/>
+            <a:ext cx="1467321" cy="198120"/>
           </a:xfrm>
           <a:prstGeom prst="rect">
             <a:avLst/>
@@ -6183,7 +6183,7 @@
         <p:spPr>
           <a:xfrm>
             <a:off x="339090" y="2806065"/>
-            <a:ext cx="4638389" cy="670560"/>
+            <a:ext cx="5148917" cy="670560"/>
           </a:xfrm>
           <a:prstGeom prst="rect">
             <a:avLst/>
@@ -6223,7 +6223,7 @@
         <p:spPr>
           <a:xfrm>
             <a:off x="339090" y="3472815"/>
-            <a:ext cx="5650516" cy="670560"/>
+            <a:ext cx="6274495" cy="670560"/>
           </a:xfrm>
           <a:prstGeom prst="rect">
             <a:avLst/>
@@ -6285,7 +6285,7 @@
         <p:spPr>
           <a:xfrm>
             <a:off x="363855" y="4426268"/>
-            <a:ext cx="4450842" cy="274320"/>
+            <a:ext cx="4927672" cy="274320"/>
           </a:xfrm>
           <a:prstGeom prst="rect">
             <a:avLst/>
@@ -6325,7 +6325,7 @@
         <p:spPr>
           <a:xfrm>
             <a:off x="370522" y="6578441"/>
-            <a:ext cx="1171646" cy="167640"/>
+            <a:ext cx="1330068" cy="167640"/>
           </a:xfrm>
           <a:prstGeom prst="rect">
             <a:avLst/>
@@ -6364,8 +6364,8 @@
         </p:nvSpPr>
         <p:spPr>
           <a:xfrm>
-            <a:off x="11517368" y="6578441"/>
-            <a:ext cx="304109" cy="167640"/>
+            <a:off x="11376297" y="6578441"/>
+            <a:ext cx="445181" cy="167640"/>
           </a:xfrm>
           <a:prstGeom prst="rect">
             <a:avLst/>
@@ -6452,7 +6452,7 @@
         <p:spPr>
           <a:xfrm>
             <a:off x="370522" y="139541"/>
-            <a:ext cx="1641562" cy="167640"/>
+            <a:ext cx="1819359" cy="167640"/>
           </a:xfrm>
           <a:prstGeom prst="rect">
             <a:avLst/>
@@ -6491,7 +6491,7 @@
         </p:nvSpPr>
         <p:spPr>
           <a:xfrm>
-            <a:off x="11410950" y="152400"/>
+            <a:off x="11315700" y="152400"/>
             <a:ext cx="85725" cy="85725"/>
           </a:xfrm>
           <a:prstGeom prst="rect">
@@ -6513,8 +6513,8 @@
         </p:nvSpPr>
         <p:spPr>
           <a:xfrm>
-            <a:off x="11468329" y="131445"/>
-            <a:ext cx="354101" cy="182880"/>
+            <a:off x="11396288" y="131445"/>
+            <a:ext cx="426142" cy="182880"/>
           </a:xfrm>
           <a:prstGeom prst="rect">
             <a:avLst/>
@@ -6590,7 +6590,7 @@
         <p:spPr>
           <a:xfrm>
             <a:off x="350520" y="483870"/>
-            <a:ext cx="7145846" cy="487680"/>
+            <a:ext cx="8182772" cy="487680"/>
           </a:xfrm>
           <a:prstGeom prst="rect">
             <a:avLst/>
@@ -6702,7 +6702,7 @@
         <p:spPr>
           <a:xfrm>
             <a:off x="370522" y="6664166"/>
-            <a:ext cx="1997011" cy="167640"/>
+            <a:ext cx="2306047" cy="167640"/>
           </a:xfrm>
           <a:prstGeom prst="rect">
             <a:avLst/>
@@ -6741,8 +6741,8 @@
         </p:nvSpPr>
         <p:spPr>
           <a:xfrm>
-            <a:off x="11457122" y="6664166"/>
-            <a:ext cx="364355" cy="167640"/>
+            <a:off x="11345066" y="6664166"/>
+            <a:ext cx="476412" cy="167640"/>
           </a:xfrm>
           <a:prstGeom prst="rect">
             <a:avLst/>
@@ -6890,7 +6890,7 @@
         <p:spPr>
           <a:xfrm>
             <a:off x="366712" y="1212056"/>
-            <a:ext cx="1039058" cy="228600"/>
+            <a:ext cx="1174907" cy="228600"/>
           </a:xfrm>
           <a:prstGeom prst="rect">
             <a:avLst/>
@@ -6930,7 +6930,7 @@
         <p:spPr>
           <a:xfrm>
             <a:off x="335280" y="1421130"/>
-            <a:ext cx="1167975" cy="731520"/>
+            <a:ext cx="1439725" cy="731520"/>
           </a:xfrm>
           <a:prstGeom prst="rect">
             <a:avLst/>
@@ -6970,7 +6970,7 @@
         <p:spPr>
           <a:xfrm>
             <a:off x="1533525" y="1647825"/>
-            <a:ext cx="158591" cy="304800"/>
+            <a:ext cx="184793" cy="304800"/>
           </a:xfrm>
           <a:prstGeom prst="rect">
             <a:avLst/>
@@ -7032,7 +7032,7 @@
         <p:spPr>
           <a:xfrm>
             <a:off x="548640" y="1886902"/>
-            <a:ext cx="893112" cy="213360"/>
+            <a:ext cx="1046894" cy="213360"/>
           </a:xfrm>
           <a:prstGeom prst="rect">
             <a:avLst/>
@@ -7072,7 +7072,7 @@
         <p:spPr>
           <a:xfrm>
             <a:off x="3224212" y="1212056"/>
-            <a:ext cx="850106" cy="228600"/>
+            <a:ext cx="933574" cy="228600"/>
           </a:xfrm>
           <a:prstGeom prst="rect">
             <a:avLst/>
@@ -7112,7 +7112,7 @@
         <p:spPr>
           <a:xfrm>
             <a:off x="3192780" y="1421130"/>
-            <a:ext cx="1305992" cy="731520"/>
+            <a:ext cx="1511955" cy="731520"/>
           </a:xfrm>
           <a:prstGeom prst="rect">
             <a:avLst/>
@@ -7152,7 +7152,7 @@
         <p:spPr>
           <a:xfrm>
             <a:off x="4391025" y="1647825"/>
-            <a:ext cx="158591" cy="304800"/>
+            <a:ext cx="184793" cy="304800"/>
           </a:xfrm>
           <a:prstGeom prst="rect">
             <a:avLst/>
@@ -7214,7 +7214,7 @@
         <p:spPr>
           <a:xfrm>
             <a:off x="3406140" y="1886902"/>
-            <a:ext cx="893112" cy="213360"/>
+            <a:ext cx="1046894" cy="213360"/>
           </a:xfrm>
           <a:prstGeom prst="rect">
             <a:avLst/>
@@ -7254,7 +7254,7 @@
         <p:spPr>
           <a:xfrm>
             <a:off x="6081712" y="1212056"/>
-            <a:ext cx="1014412" cy="228600"/>
+            <a:ext cx="1114574" cy="228600"/>
           </a:xfrm>
           <a:prstGeom prst="rect">
             <a:avLst/>
@@ -7294,7 +7294,7 @@
         <p:spPr>
           <a:xfrm>
             <a:off x="6050280" y="1421130"/>
-            <a:ext cx="1002354" cy="731520"/>
+            <a:ext cx="1138769" cy="731520"/>
           </a:xfrm>
           <a:prstGeom prst="rect">
             <a:avLst/>
@@ -7334,7 +7334,7 @@
         <p:spPr>
           <a:xfrm>
             <a:off x="6981825" y="1647825"/>
-            <a:ext cx="498158" cy="304800"/>
+            <a:ext cx="572818" cy="304800"/>
           </a:xfrm>
           <a:prstGeom prst="rect">
             <a:avLst/>
@@ -7396,7 +7396,7 @@
         <p:spPr>
           <a:xfrm>
             <a:off x="6263640" y="1886902"/>
-            <a:ext cx="847106" cy="213360"/>
+            <a:ext cx="964083" cy="213360"/>
           </a:xfrm>
           <a:prstGeom prst="rect">
             <a:avLst/>
@@ -7436,7 +7436,7 @@
         <p:spPr>
           <a:xfrm>
             <a:off x="8939212" y="1212056"/>
-            <a:ext cx="1006197" cy="228600"/>
+            <a:ext cx="1139417" cy="228600"/>
           </a:xfrm>
           <a:prstGeom prst="rect">
             <a:avLst/>
@@ -7476,7 +7476,7 @@
         <p:spPr>
           <a:xfrm>
             <a:off x="8907780" y="1421130"/>
-            <a:ext cx="1305992" cy="731520"/>
+            <a:ext cx="1511955" cy="731520"/>
           </a:xfrm>
           <a:prstGeom prst="rect">
             <a:avLst/>
@@ -7516,7 +7516,7 @@
         <p:spPr>
           <a:xfrm>
             <a:off x="10106025" y="1647825"/>
-            <a:ext cx="158591" cy="304800"/>
+            <a:ext cx="184793" cy="304800"/>
           </a:xfrm>
           <a:prstGeom prst="rect">
             <a:avLst/>
@@ -7578,7 +7578,7 @@
         <p:spPr>
           <a:xfrm>
             <a:off x="9121140" y="1886902"/>
-            <a:ext cx="931450" cy="213360"/>
+            <a:ext cx="1066768" cy="213360"/>
           </a:xfrm>
           <a:prstGeom prst="rect">
             <a:avLst/>
@@ -7654,7 +7654,7 @@
         <p:spPr>
           <a:xfrm>
             <a:off x="361950" y="2447925"/>
-            <a:ext cx="1878330" cy="304800"/>
+            <a:ext cx="2084604" cy="304800"/>
           </a:xfrm>
           <a:prstGeom prst="rect">
             <a:avLst/>
@@ -7693,8 +7693,8 @@
         </p:nvSpPr>
         <p:spPr>
           <a:xfrm>
-            <a:off x="2791968" y="2504599"/>
-            <a:ext cx="1220914" cy="198120"/>
+            <a:off x="2610153" y="2504599"/>
+            <a:ext cx="1402729" cy="198120"/>
           </a:xfrm>
           <a:prstGeom prst="rect">
             <a:avLst/>
@@ -7734,7 +7734,7 @@
         <p:spPr>
           <a:xfrm>
             <a:off x="367665" y="2877502"/>
-            <a:ext cx="348710" cy="213360"/>
+            <a:ext cx="384808" cy="213360"/>
           </a:xfrm>
           <a:prstGeom prst="rect">
             <a:avLst/>
@@ -7773,8 +7773,8 @@
         </p:nvSpPr>
         <p:spPr>
           <a:xfrm>
-            <a:off x="2581084" y="2877502"/>
-            <a:ext cx="670750" cy="213360"/>
+            <a:off x="2508889" y="2877502"/>
+            <a:ext cx="742946" cy="213360"/>
           </a:xfrm>
           <a:prstGeom prst="rect">
             <a:avLst/>
@@ -7813,8 +7813,8 @@
         </p:nvSpPr>
         <p:spPr>
           <a:xfrm>
-            <a:off x="3742342" y="2877502"/>
-            <a:ext cx="614393" cy="213360"/>
+            <a:off x="3645389" y="2877502"/>
+            <a:ext cx="711346" cy="213360"/>
           </a:xfrm>
           <a:prstGeom prst="rect">
             <a:avLst/>
@@ -7853,8 +7853,8 @@
         </p:nvSpPr>
         <p:spPr>
           <a:xfrm>
-            <a:off x="4837605" y="2877502"/>
-            <a:ext cx="509730" cy="213360"/>
+            <a:off x="4783458" y="2877502"/>
+            <a:ext cx="563877" cy="213360"/>
           </a:xfrm>
           <a:prstGeom prst="rect">
             <a:avLst/>
@@ -7894,7 +7894,7 @@
         <p:spPr>
           <a:xfrm>
             <a:off x="5701665" y="2877502"/>
-            <a:ext cx="348710" cy="213360"/>
+            <a:ext cx="384808" cy="213360"/>
           </a:xfrm>
           <a:prstGeom prst="rect">
             <a:avLst/>
@@ -7970,7 +7970,7 @@
         <p:spPr>
           <a:xfrm>
             <a:off x="366712" y="3326606"/>
-            <a:ext cx="661154" cy="228600"/>
+            <a:ext cx="738378" cy="228600"/>
           </a:xfrm>
           <a:prstGeom prst="rect">
             <a:avLst/>
@@ -8009,8 +8009,8 @@
         </p:nvSpPr>
         <p:spPr>
           <a:xfrm>
-            <a:off x="2772370" y="3326606"/>
-            <a:ext cx="480417" cy="228600"/>
+            <a:off x="2695409" y="3326606"/>
+            <a:ext cx="557378" cy="228600"/>
           </a:xfrm>
           <a:prstGeom prst="rect">
             <a:avLst/>
@@ -8049,8 +8049,8 @@
         </p:nvSpPr>
         <p:spPr>
           <a:xfrm>
-            <a:off x="4058007" y="3326606"/>
-            <a:ext cx="299680" cy="228600"/>
+            <a:off x="4020348" y="3326606"/>
+            <a:ext cx="337339" cy="228600"/>
           </a:xfrm>
           <a:prstGeom prst="rect">
             <a:avLst/>
@@ -8089,8 +8089,8 @@
         </p:nvSpPr>
         <p:spPr>
           <a:xfrm>
-            <a:off x="4999315" y="3326606"/>
-            <a:ext cx="348972" cy="228600"/>
+            <a:off x="4922223" y="3326606"/>
+            <a:ext cx="426065" cy="228600"/>
           </a:xfrm>
           <a:prstGeom prst="rect">
             <a:avLst/>
@@ -8152,7 +8152,7 @@
         <p:spPr>
           <a:xfrm>
             <a:off x="5844540" y="3334702"/>
-            <a:ext cx="333375" cy="213360"/>
+            <a:ext cx="364536" cy="213360"/>
           </a:xfrm>
           <a:prstGeom prst="rect">
             <a:avLst/>
@@ -8228,7 +8228,7 @@
         <p:spPr>
           <a:xfrm>
             <a:off x="366712" y="3840956"/>
-            <a:ext cx="661154" cy="228600"/>
+            <a:ext cx="738378" cy="228600"/>
           </a:xfrm>
           <a:prstGeom prst="rect">
             <a:avLst/>
@@ -8267,8 +8267,8 @@
         </p:nvSpPr>
         <p:spPr>
           <a:xfrm>
-            <a:off x="2772370" y="3840956"/>
-            <a:ext cx="480417" cy="228600"/>
+            <a:off x="2695409" y="3840956"/>
+            <a:ext cx="557378" cy="228600"/>
           </a:xfrm>
           <a:prstGeom prst="rect">
             <a:avLst/>
@@ -8307,8 +8307,8 @@
         </p:nvSpPr>
         <p:spPr>
           <a:xfrm>
-            <a:off x="4058007" y="3840956"/>
-            <a:ext cx="299680" cy="228600"/>
+            <a:off x="4020348" y="3840956"/>
+            <a:ext cx="337339" cy="228600"/>
           </a:xfrm>
           <a:prstGeom prst="rect">
             <a:avLst/>
@@ -8347,8 +8347,8 @@
         </p:nvSpPr>
         <p:spPr>
           <a:xfrm>
-            <a:off x="4958239" y="3840956"/>
-            <a:ext cx="390049" cy="228600"/>
+            <a:off x="4900929" y="3840956"/>
+            <a:ext cx="447359" cy="228600"/>
           </a:xfrm>
           <a:prstGeom prst="rect">
             <a:avLst/>
@@ -8410,7 +8410,7 @@
         <p:spPr>
           <a:xfrm>
             <a:off x="5844540" y="3849052"/>
-            <a:ext cx="333375" cy="213360"/>
+            <a:ext cx="364536" cy="213360"/>
           </a:xfrm>
           <a:prstGeom prst="rect">
             <a:avLst/>
@@ -8486,7 +8486,7 @@
         <p:spPr>
           <a:xfrm>
             <a:off x="366712" y="4355306"/>
-            <a:ext cx="661154" cy="228600"/>
+            <a:ext cx="738378" cy="228600"/>
           </a:xfrm>
           <a:prstGeom prst="rect">
             <a:avLst/>
@@ -8525,8 +8525,8 @@
         </p:nvSpPr>
         <p:spPr>
           <a:xfrm>
-            <a:off x="2772370" y="4355306"/>
-            <a:ext cx="480417" cy="228600"/>
+            <a:off x="2695409" y="4355306"/>
+            <a:ext cx="557378" cy="228600"/>
           </a:xfrm>
           <a:prstGeom prst="rect">
             <a:avLst/>
@@ -8565,8 +8565,8 @@
         </p:nvSpPr>
         <p:spPr>
           <a:xfrm>
-            <a:off x="4058007" y="4355306"/>
-            <a:ext cx="299680" cy="228600"/>
+            <a:off x="4020348" y="4355306"/>
+            <a:ext cx="337339" cy="228600"/>
           </a:xfrm>
           <a:prstGeom prst="rect">
             <a:avLst/>
@@ -8605,8 +8605,8 @@
         </p:nvSpPr>
         <p:spPr>
           <a:xfrm>
-            <a:off x="4958239" y="4355306"/>
-            <a:ext cx="390049" cy="228600"/>
+            <a:off x="4900929" y="4355306"/>
+            <a:ext cx="447359" cy="228600"/>
           </a:xfrm>
           <a:prstGeom prst="rect">
             <a:avLst/>
@@ -8668,7 +8668,7 @@
         <p:spPr>
           <a:xfrm>
             <a:off x="5844540" y="4363402"/>
-            <a:ext cx="333375" cy="213360"/>
+            <a:ext cx="364536" cy="213360"/>
           </a:xfrm>
           <a:prstGeom prst="rect">
             <a:avLst/>
@@ -8780,7 +8780,7 @@
         <p:spPr>
           <a:xfrm>
             <a:off x="366712" y="5022056"/>
-            <a:ext cx="917061" cy="228600"/>
+            <a:ext cx="1033017" cy="228600"/>
           </a:xfrm>
           <a:prstGeom prst="rect">
             <a:avLst/>
@@ -8819,8 +8819,8 @@
         </p:nvSpPr>
         <p:spPr>
           <a:xfrm>
-            <a:off x="2792909" y="5022056"/>
-            <a:ext cx="459879" cy="228600"/>
+            <a:off x="2686253" y="5022056"/>
+            <a:ext cx="566535" cy="228600"/>
           </a:xfrm>
           <a:prstGeom prst="rect">
             <a:avLst/>
@@ -8859,8 +8859,8 @@
         </p:nvSpPr>
         <p:spPr>
           <a:xfrm>
-            <a:off x="4044452" y="5022056"/>
-            <a:ext cx="313236" cy="228600"/>
+            <a:off x="4001822" y="5022056"/>
+            <a:ext cx="355865" cy="228600"/>
           </a:xfrm>
           <a:prstGeom prst="rect">
             <a:avLst/>
@@ -8899,8 +8899,8 @@
         </p:nvSpPr>
         <p:spPr>
           <a:xfrm>
-            <a:off x="4940165" y="5022056"/>
-            <a:ext cx="408122" cy="228600"/>
+            <a:off x="4875802" y="5022056"/>
+            <a:ext cx="472486" cy="228600"/>
           </a:xfrm>
           <a:prstGeom prst="rect">
             <a:avLst/>
@@ -8940,7 +8940,7 @@
         <p:spPr>
           <a:xfrm>
             <a:off x="5701665" y="5030152"/>
-            <a:ext cx="111014" cy="213360"/>
+            <a:ext cx="129355" cy="213360"/>
           </a:xfrm>
           <a:prstGeom prst="rect">
             <a:avLst/>
@@ -9016,7 +9016,7 @@
         <p:spPr>
           <a:xfrm>
             <a:off x="7181850" y="2447925"/>
-            <a:ext cx="958215" cy="304800"/>
+            <a:ext cx="1061352" cy="304800"/>
           </a:xfrm>
           <a:prstGeom prst="rect">
             <a:avLst/>
@@ -9078,7 +9078,7 @@
         <p:spPr>
           <a:xfrm>
             <a:off x="7377112" y="2831306"/>
-            <a:ext cx="3388638" cy="228600"/>
+            <a:ext cx="3794080" cy="228600"/>
           </a:xfrm>
           <a:prstGeom prst="rect">
             <a:avLst/>
@@ -9118,7 +9118,7 @@
         <p:spPr>
           <a:xfrm>
             <a:off x="7377112" y="3059906"/>
-            <a:ext cx="2591752" cy="228600"/>
+            <a:ext cx="2903277" cy="228600"/>
           </a:xfrm>
           <a:prstGeom prst="rect">
             <a:avLst/>
@@ -9180,7 +9180,7 @@
         <p:spPr>
           <a:xfrm>
             <a:off x="7377112" y="3440906"/>
-            <a:ext cx="2657475" cy="228600"/>
+            <a:ext cx="2924571" cy="228600"/>
           </a:xfrm>
           <a:prstGeom prst="rect">
             <a:avLst/>
@@ -9220,7 +9220,7 @@
         <p:spPr>
           <a:xfrm>
             <a:off x="7377112" y="3669506"/>
-            <a:ext cx="2649260" cy="228600"/>
+            <a:ext cx="2949414" cy="228600"/>
           </a:xfrm>
           <a:prstGeom prst="rect">
             <a:avLst/>
@@ -9282,7 +9282,7 @@
         <p:spPr>
           <a:xfrm>
             <a:off x="7377112" y="4050506"/>
-            <a:ext cx="2665690" cy="228600"/>
+            <a:ext cx="2967159" cy="228600"/>
           </a:xfrm>
           <a:prstGeom prst="rect">
             <a:avLst/>
@@ -9322,7 +9322,7 @@
         <p:spPr>
           <a:xfrm>
             <a:off x="7377112" y="4279106"/>
-            <a:ext cx="2328862" cy="228600"/>
+            <a:ext cx="2562572" cy="228600"/>
           </a:xfrm>
           <a:prstGeom prst="rect">
             <a:avLst/>
@@ -9362,7 +9362,7 @@
         <p:spPr>
           <a:xfrm>
             <a:off x="7184708" y="5005864"/>
-            <a:ext cx="2114720" cy="259080"/>
+            <a:ext cx="2419973" cy="259080"/>
           </a:xfrm>
           <a:prstGeom prst="rect">
             <a:avLst/>
@@ -9402,7 +9402,7 @@
         <p:spPr>
           <a:xfrm>
             <a:off x="7187565" y="5296852"/>
-            <a:ext cx="640080" cy="213360"/>
+            <a:ext cx="702402" cy="213360"/>
           </a:xfrm>
           <a:prstGeom prst="rect">
             <a:avLst/>
@@ -9463,8 +9463,8 @@
         </p:nvSpPr>
         <p:spPr>
           <a:xfrm>
-            <a:off x="11544633" y="5296852"/>
-            <a:ext cx="279702" cy="213360"/>
+            <a:off x="11489610" y="5296852"/>
+            <a:ext cx="334725" cy="213360"/>
           </a:xfrm>
           <a:prstGeom prst="rect">
             <a:avLst/>
@@ -9504,7 +9504,7 @@
         <p:spPr>
           <a:xfrm>
             <a:off x="7187565" y="5582602"/>
-            <a:ext cx="640080" cy="213360"/>
+            <a:ext cx="702402" cy="213360"/>
           </a:xfrm>
           <a:prstGeom prst="rect">
             <a:avLst/>
@@ -9565,8 +9565,8 @@
         </p:nvSpPr>
         <p:spPr>
           <a:xfrm>
-            <a:off x="11544633" y="5582602"/>
-            <a:ext cx="279702" cy="213360"/>
+            <a:off x="11489610" y="5582602"/>
+            <a:ext cx="334725" cy="213360"/>
           </a:xfrm>
           <a:prstGeom prst="rect">
             <a:avLst/>
@@ -9606,7 +9606,7 @@
         <p:spPr>
           <a:xfrm>
             <a:off x="7187565" y="5868352"/>
-            <a:ext cx="640080" cy="213360"/>
+            <a:ext cx="702402" cy="213360"/>
           </a:xfrm>
           <a:prstGeom prst="rect">
             <a:avLst/>
@@ -9667,8 +9667,8 @@
         </p:nvSpPr>
         <p:spPr>
           <a:xfrm>
-            <a:off x="11582972" y="5868352"/>
-            <a:ext cx="241364" cy="213360"/>
+            <a:off x="11509485" y="5868352"/>
+            <a:ext cx="314850" cy="213360"/>
           </a:xfrm>
           <a:prstGeom prst="rect">
             <a:avLst/>
@@ -9755,7 +9755,7 @@
         <p:spPr>
           <a:xfrm>
             <a:off x="370522" y="139541"/>
-            <a:ext cx="1400580" cy="167640"/>
+            <a:ext cx="1553893" cy="167640"/>
           </a:xfrm>
           <a:prstGeom prst="rect">
             <a:avLst/>
@@ -9794,7 +9794,7 @@
         </p:nvSpPr>
         <p:spPr>
           <a:xfrm>
-            <a:off x="11410950" y="152400"/>
+            <a:off x="11315700" y="152400"/>
             <a:ext cx="85725" cy="85725"/>
           </a:xfrm>
           <a:prstGeom prst="rect">
@@ -9816,8 +9816,8 @@
         </p:nvSpPr>
         <p:spPr>
           <a:xfrm>
-            <a:off x="11468329" y="131445"/>
-            <a:ext cx="354101" cy="182880"/>
+            <a:off x="11396288" y="131445"/>
+            <a:ext cx="426142" cy="182880"/>
           </a:xfrm>
           <a:prstGeom prst="rect">
             <a:avLst/>
@@ -9893,7 +9893,7 @@
         <p:spPr>
           <a:xfrm>
             <a:off x="350520" y="483870"/>
-            <a:ext cx="7845133" cy="487680"/>
+            <a:ext cx="8752583" cy="487680"/>
           </a:xfrm>
           <a:prstGeom prst="rect">
             <a:avLst/>
@@ -10005,7 +10005,7 @@
         <p:spPr>
           <a:xfrm>
             <a:off x="370522" y="6664166"/>
-            <a:ext cx="1948815" cy="167640"/>
+            <a:ext cx="2209751" cy="167640"/>
           </a:xfrm>
           <a:prstGeom prst="rect">
             <a:avLst/>
@@ -10044,8 +10044,8 @@
         </p:nvSpPr>
         <p:spPr>
           <a:xfrm>
-            <a:off x="11457122" y="6664166"/>
-            <a:ext cx="364355" cy="167640"/>
+            <a:off x="11345066" y="6664166"/>
+            <a:ext cx="476412" cy="167640"/>
           </a:xfrm>
           <a:prstGeom prst="rect">
             <a:avLst/>
@@ -10106,8 +10106,8 @@
         </p:nvSpPr>
         <p:spPr>
           <a:xfrm>
-            <a:off x="7483745" y="1582102"/>
-            <a:ext cx="348710" cy="213360"/>
+            <a:off x="7465696" y="1582102"/>
+            <a:ext cx="384808" cy="213360"/>
           </a:xfrm>
           <a:prstGeom prst="rect">
             <a:avLst/>
@@ -10168,8 +10168,8 @@
         </p:nvSpPr>
         <p:spPr>
           <a:xfrm>
-            <a:off x="4415659" y="1876425"/>
-            <a:ext cx="693682" cy="304800"/>
+            <a:off x="4369762" y="1876425"/>
+            <a:ext cx="785475" cy="304800"/>
           </a:xfrm>
           <a:prstGeom prst="rect">
             <a:avLst/>
@@ -10208,8 +10208,8 @@
         </p:nvSpPr>
         <p:spPr>
           <a:xfrm>
-            <a:off x="4442460" y="2153602"/>
-            <a:ext cx="640080" cy="213360"/>
+            <a:off x="4411299" y="2153602"/>
+            <a:ext cx="702402" cy="213360"/>
           </a:xfrm>
           <a:prstGeom prst="rect">
             <a:avLst/>
@@ -10248,8 +10248,8 @@
         </p:nvSpPr>
         <p:spPr>
           <a:xfrm>
-            <a:off x="7311259" y="1876425"/>
-            <a:ext cx="693682" cy="304800"/>
+            <a:off x="7265362" y="1876425"/>
+            <a:ext cx="785475" cy="304800"/>
           </a:xfrm>
           <a:prstGeom prst="rect">
             <a:avLst/>
@@ -10288,8 +10288,8 @@
         </p:nvSpPr>
         <p:spPr>
           <a:xfrm>
-            <a:off x="7338060" y="2153602"/>
-            <a:ext cx="640080" cy="213360"/>
+            <a:off x="7306899" y="2153602"/>
+            <a:ext cx="702402" cy="213360"/>
           </a:xfrm>
           <a:prstGeom prst="rect">
             <a:avLst/>
@@ -10328,8 +10328,8 @@
         </p:nvSpPr>
         <p:spPr>
           <a:xfrm>
-            <a:off x="10035409" y="1876425"/>
-            <a:ext cx="693682" cy="304800"/>
+            <a:off x="9989512" y="1876425"/>
+            <a:ext cx="785475" cy="304800"/>
           </a:xfrm>
           <a:prstGeom prst="rect">
             <a:avLst/>
@@ -10368,8 +10368,8 @@
         </p:nvSpPr>
         <p:spPr>
           <a:xfrm>
-            <a:off x="10062210" y="2153602"/>
-            <a:ext cx="640080" cy="213360"/>
+            <a:off x="10031049" y="2153602"/>
+            <a:ext cx="702402" cy="213360"/>
           </a:xfrm>
           <a:prstGeom prst="rect">
             <a:avLst/>
@@ -10445,7 +10445,7 @@
         <p:spPr>
           <a:xfrm>
             <a:off x="366712" y="2736056"/>
-            <a:ext cx="685800" cy="228600"/>
+            <a:ext cx="752574" cy="228600"/>
           </a:xfrm>
           <a:prstGeom prst="rect">
             <a:avLst/>
@@ -10484,8 +10484,8 @@
         </p:nvSpPr>
         <p:spPr>
           <a:xfrm>
-            <a:off x="4505861" y="2736056"/>
-            <a:ext cx="513278" cy="228600"/>
+            <a:off x="4464291" y="2736056"/>
+            <a:ext cx="596417" cy="228600"/>
           </a:xfrm>
           <a:prstGeom prst="rect">
             <a:avLst/>
@@ -10524,8 +10524,8 @@
         </p:nvSpPr>
         <p:spPr>
           <a:xfrm>
-            <a:off x="7341900" y="2736056"/>
-            <a:ext cx="632400" cy="228600"/>
+            <a:off x="7284546" y="2736056"/>
+            <a:ext cx="747109" cy="228600"/>
           </a:xfrm>
           <a:prstGeom prst="rect">
             <a:avLst/>
@@ -10564,8 +10564,8 @@
         </p:nvSpPr>
         <p:spPr>
           <a:xfrm>
-            <a:off x="10080427" y="2736056"/>
-            <a:ext cx="603647" cy="228600"/>
+            <a:off x="10029032" y="2736056"/>
+            <a:ext cx="706437" cy="228600"/>
           </a:xfrm>
           <a:prstGeom prst="rect">
             <a:avLst/>
@@ -10677,7 +10677,7 @@
         <p:spPr>
           <a:xfrm>
             <a:off x="366712" y="3231356"/>
-            <a:ext cx="685800" cy="228600"/>
+            <a:ext cx="752574" cy="228600"/>
           </a:xfrm>
           <a:prstGeom prst="rect">
             <a:avLst/>
@@ -10716,8 +10716,8 @@
         </p:nvSpPr>
         <p:spPr>
           <a:xfrm>
-            <a:off x="4596229" y="3231356"/>
-            <a:ext cx="332542" cy="228600"/>
+            <a:off x="4574311" y="3231356"/>
+            <a:ext cx="376378" cy="228600"/>
           </a:xfrm>
           <a:prstGeom prst="rect">
             <a:avLst/>
@@ -10756,8 +10756,8 @@
         </p:nvSpPr>
         <p:spPr>
           <a:xfrm>
-            <a:off x="7458352" y="3231356"/>
-            <a:ext cx="399496" cy="228600"/>
+            <a:off x="7412452" y="3231356"/>
+            <a:ext cx="491296" cy="228600"/>
           </a:xfrm>
           <a:prstGeom prst="rect">
             <a:avLst/>
@@ -10796,8 +10796,8 @@
         </p:nvSpPr>
         <p:spPr>
           <a:xfrm>
-            <a:off x="10170795" y="3231356"/>
-            <a:ext cx="422910" cy="228600"/>
+            <a:off x="10139051" y="3231356"/>
+            <a:ext cx="486398" cy="228600"/>
           </a:xfrm>
           <a:prstGeom prst="rect">
             <a:avLst/>
@@ -10909,7 +10909,7 @@
         <p:spPr>
           <a:xfrm>
             <a:off x="366712" y="3726656"/>
-            <a:ext cx="1088350" cy="228600"/>
+            <a:ext cx="1231691" cy="228600"/>
           </a:xfrm>
           <a:prstGeom prst="rect">
             <a:avLst/>
@@ -10948,8 +10948,8 @@
         </p:nvSpPr>
         <p:spPr>
           <a:xfrm>
-            <a:off x="4542830" y="3726656"/>
-            <a:ext cx="439341" cy="228600"/>
+            <a:off x="4499781" y="3726656"/>
+            <a:ext cx="525437" cy="228600"/>
           </a:xfrm>
           <a:prstGeom prst="rect">
             <a:avLst/>
@@ -10988,8 +10988,8 @@
         </p:nvSpPr>
         <p:spPr>
           <a:xfrm>
-            <a:off x="7402282" y="3726656"/>
-            <a:ext cx="511635" cy="228600"/>
+            <a:off x="7333451" y="3726656"/>
+            <a:ext cx="649298" cy="228600"/>
           </a:xfrm>
           <a:prstGeom prst="rect">
             <a:avLst/>
@@ -11028,8 +11028,8 @@
         </p:nvSpPr>
         <p:spPr>
           <a:xfrm>
-            <a:off x="10137934" y="3726656"/>
-            <a:ext cx="488632" cy="228600"/>
+            <a:off x="10075169" y="3726656"/>
+            <a:ext cx="614162" cy="228600"/>
           </a:xfrm>
           <a:prstGeom prst="rect">
             <a:avLst/>
@@ -11141,7 +11141,7 @@
         <p:spPr>
           <a:xfrm>
             <a:off x="366712" y="4221956"/>
-            <a:ext cx="685800" cy="228600"/>
+            <a:ext cx="752574" cy="228600"/>
           </a:xfrm>
           <a:prstGeom prst="rect">
             <a:avLst/>
@@ -11202,8 +11202,8 @@
         </p:nvSpPr>
         <p:spPr>
           <a:xfrm>
-            <a:off x="4685109" y="4221956"/>
-            <a:ext cx="192881" cy="228600"/>
+            <a:off x="4676763" y="4221956"/>
+            <a:ext cx="209575" cy="228600"/>
           </a:xfrm>
           <a:prstGeom prst="rect">
             <a:avLst/>
@@ -11264,8 +11264,8 @@
         </p:nvSpPr>
         <p:spPr>
           <a:xfrm>
-            <a:off x="7580709" y="4221956"/>
-            <a:ext cx="192881" cy="228600"/>
+            <a:off x="7572363" y="4221956"/>
+            <a:ext cx="209575" cy="228600"/>
           </a:xfrm>
           <a:prstGeom prst="rect">
             <a:avLst/>
@@ -11326,8 +11326,8 @@
         </p:nvSpPr>
         <p:spPr>
           <a:xfrm>
-            <a:off x="10304859" y="4221956"/>
-            <a:ext cx="192881" cy="228600"/>
+            <a:off x="10296513" y="4221956"/>
+            <a:ext cx="209575" cy="228600"/>
           </a:xfrm>
           <a:prstGeom prst="rect">
             <a:avLst/>
@@ -11439,7 +11439,7 @@
         <p:spPr>
           <a:xfrm>
             <a:off x="366712" y="4717256"/>
-            <a:ext cx="685800" cy="228600"/>
+            <a:ext cx="752574" cy="228600"/>
           </a:xfrm>
           <a:prstGeom prst="rect">
             <a:avLst/>
@@ -11478,8 +11478,8 @@
         </p:nvSpPr>
         <p:spPr>
           <a:xfrm>
-            <a:off x="4501753" y="4717256"/>
-            <a:ext cx="521494" cy="228600"/>
+            <a:off x="4476713" y="4717256"/>
+            <a:ext cx="571574" cy="228600"/>
           </a:xfrm>
           <a:prstGeom prst="rect">
             <a:avLst/>
@@ -11518,8 +11518,8 @@
         </p:nvSpPr>
         <p:spPr>
           <a:xfrm>
-            <a:off x="7298769" y="4717256"/>
-            <a:ext cx="718661" cy="228600"/>
+            <a:off x="7260093" y="4717256"/>
+            <a:ext cx="796014" cy="228600"/>
           </a:xfrm>
           <a:prstGeom prst="rect">
             <a:avLst/>
@@ -11558,8 +11558,8 @@
         </p:nvSpPr>
         <p:spPr>
           <a:xfrm>
-            <a:off x="10027027" y="4717256"/>
-            <a:ext cx="710446" cy="228600"/>
+            <a:off x="9984669" y="4717256"/>
+            <a:ext cx="795162" cy="228600"/>
           </a:xfrm>
           <a:prstGeom prst="rect">
             <a:avLst/>
@@ -11671,7 +11671,7 @@
         <p:spPr>
           <a:xfrm>
             <a:off x="366712" y="5212556"/>
-            <a:ext cx="850106" cy="228600"/>
+            <a:ext cx="933574" cy="228600"/>
           </a:xfrm>
           <a:prstGeom prst="rect">
             <a:avLst/>
@@ -11710,8 +11710,8 @@
         </p:nvSpPr>
         <p:spPr>
           <a:xfrm>
-            <a:off x="4666059" y="5212556"/>
-            <a:ext cx="192881" cy="228600"/>
+            <a:off x="4657713" y="5212556"/>
+            <a:ext cx="209575" cy="228600"/>
           </a:xfrm>
           <a:prstGeom prst="rect">
             <a:avLst/>
@@ -11750,8 +11750,8 @@
         </p:nvSpPr>
         <p:spPr>
           <a:xfrm>
-            <a:off x="7557552" y="5212556"/>
-            <a:ext cx="201097" cy="228600"/>
+            <a:off x="7547883" y="5212556"/>
+            <a:ext cx="220435" cy="228600"/>
           </a:xfrm>
           <a:prstGeom prst="rect">
             <a:avLst/>
@@ -11790,8 +11790,8 @@
         </p:nvSpPr>
         <p:spPr>
           <a:xfrm>
-            <a:off x="10285809" y="5212556"/>
-            <a:ext cx="192881" cy="228600"/>
+            <a:off x="10277463" y="5212556"/>
+            <a:ext cx="209575" cy="228600"/>
           </a:xfrm>
           <a:prstGeom prst="rect">
             <a:avLst/>
@@ -11889,7 +11889,7 @@
         <p:spPr>
           <a:xfrm>
             <a:off x="557212" y="5850731"/>
-            <a:ext cx="5376743" cy="228600"/>
+            <a:ext cx="6068999" cy="228600"/>
           </a:xfrm>
           <a:prstGeom prst="rect">
             <a:avLst/>
@@ -12020,7 +12020,7 @@
         <p:spPr>
           <a:xfrm>
             <a:off x="370522" y="139541"/>
-            <a:ext cx="1400580" cy="167640"/>
+            <a:ext cx="1553893" cy="167640"/>
           </a:xfrm>
           <a:prstGeom prst="rect">
             <a:avLst/>
@@ -12059,7 +12059,7 @@
         </p:nvSpPr>
         <p:spPr>
           <a:xfrm>
-            <a:off x="11410950" y="152400"/>
+            <a:off x="11315700" y="152400"/>
             <a:ext cx="85725" cy="85725"/>
           </a:xfrm>
           <a:prstGeom prst="rect">
@@ -12081,8 +12081,8 @@
         </p:nvSpPr>
         <p:spPr>
           <a:xfrm>
-            <a:off x="11468329" y="131445"/>
-            <a:ext cx="354101" cy="182880"/>
+            <a:off x="11396288" y="131445"/>
+            <a:ext cx="426142" cy="182880"/>
           </a:xfrm>
           <a:prstGeom prst="rect">
             <a:avLst/>
@@ -12158,7 +12158,7 @@
         <p:spPr>
           <a:xfrm>
             <a:off x="350520" y="483870"/>
-            <a:ext cx="8249984" cy="487680"/>
+            <a:ext cx="9354496" cy="487680"/>
           </a:xfrm>
           <a:prstGeom prst="rect">
             <a:avLst/>
@@ -12270,7 +12270,7 @@
         <p:spPr>
           <a:xfrm>
             <a:off x="370522" y="6664166"/>
-            <a:ext cx="2237994" cy="167640"/>
+            <a:ext cx="2660003" cy="167640"/>
           </a:xfrm>
           <a:prstGeom prst="rect">
             <a:avLst/>
@@ -12309,8 +12309,8 @@
         </p:nvSpPr>
         <p:spPr>
           <a:xfrm>
-            <a:off x="11457122" y="6664166"/>
-            <a:ext cx="364355" cy="167640"/>
+            <a:off x="11345066" y="6664166"/>
+            <a:ext cx="476412" cy="167640"/>
           </a:xfrm>
           <a:prstGeom prst="rect">
             <a:avLst/>
@@ -12350,7 +12350,7 @@
         <p:spPr>
           <a:xfrm>
             <a:off x="1034415" y="1201102"/>
-            <a:ext cx="1667542" cy="213360"/>
+            <a:ext cx="1874997" cy="213360"/>
           </a:xfrm>
           <a:prstGeom prst="rect">
             <a:avLst/>
@@ -12425,8 +12425,8 @@
         </p:nvSpPr>
         <p:spPr>
           <a:xfrm>
-            <a:off x="777430" y="5274945"/>
-            <a:ext cx="167449" cy="182880"/>
+            <a:off x="745989" y="5274945"/>
+            <a:ext cx="198891" cy="182880"/>
           </a:xfrm>
           <a:prstGeom prst="rect">
             <a:avLst/>
@@ -12501,8 +12501,8 @@
         </p:nvSpPr>
         <p:spPr>
           <a:xfrm>
-            <a:off x="777430" y="4068445"/>
-            <a:ext cx="167449" cy="182880"/>
+            <a:off x="745989" y="4068445"/>
+            <a:ext cx="198891" cy="182880"/>
           </a:xfrm>
           <a:prstGeom prst="rect">
             <a:avLst/>
@@ -12577,8 +12577,8 @@
         </p:nvSpPr>
         <p:spPr>
           <a:xfrm>
-            <a:off x="777430" y="2861945"/>
-            <a:ext cx="167449" cy="182880"/>
+            <a:off x="745989" y="2861945"/>
+            <a:ext cx="198891" cy="182880"/>
           </a:xfrm>
           <a:prstGeom prst="rect">
             <a:avLst/>
@@ -12653,8 +12653,8 @@
         </p:nvSpPr>
         <p:spPr>
           <a:xfrm>
-            <a:off x="777430" y="1655445"/>
-            <a:ext cx="167449" cy="182880"/>
+            <a:off x="745989" y="1655445"/>
+            <a:ext cx="198891" cy="182880"/>
           </a:xfrm>
           <a:prstGeom prst="rect">
             <a:avLst/>
@@ -12805,7 +12805,7 @@
         <p:spPr>
           <a:xfrm>
             <a:off x="1093470" y="2153920"/>
-            <a:ext cx="804958" cy="182880"/>
+            <a:ext cx="911533" cy="182880"/>
           </a:xfrm>
           <a:prstGeom prst="rect">
             <a:avLst/>
@@ -12866,8 +12866,8 @@
         </p:nvSpPr>
         <p:spPr>
           <a:xfrm>
-            <a:off x="1487900" y="3592195"/>
-            <a:ext cx="167449" cy="182880"/>
+            <a:off x="1472179" y="3592195"/>
+            <a:ext cx="198891" cy="182880"/>
           </a:xfrm>
           <a:prstGeom prst="rect">
             <a:avLst/>
@@ -12906,8 +12906,8 @@
         </p:nvSpPr>
         <p:spPr>
           <a:xfrm>
-            <a:off x="1455039" y="5446395"/>
-            <a:ext cx="233172" cy="182880"/>
+            <a:off x="1416815" y="5446395"/>
+            <a:ext cx="309620" cy="182880"/>
           </a:xfrm>
           <a:prstGeom prst="rect">
             <a:avLst/>
@@ -12968,8 +12968,8 @@
         </p:nvSpPr>
         <p:spPr>
           <a:xfrm>
-            <a:off x="2154650" y="3712845"/>
-            <a:ext cx="167449" cy="182880"/>
+            <a:off x="2138929" y="3712845"/>
+            <a:ext cx="198891" cy="182880"/>
           </a:xfrm>
           <a:prstGeom prst="rect">
             <a:avLst/>
@@ -13008,8 +13008,8 @@
         </p:nvSpPr>
         <p:spPr>
           <a:xfrm>
-            <a:off x="2105358" y="5446395"/>
-            <a:ext cx="266033" cy="182880"/>
+            <a:off x="2075047" y="5446395"/>
+            <a:ext cx="326656" cy="182880"/>
           </a:xfrm>
           <a:prstGeom prst="rect">
             <a:avLst/>
@@ -13070,8 +13070,8 @@
         </p:nvSpPr>
         <p:spPr>
           <a:xfrm>
-            <a:off x="2821400" y="3954145"/>
-            <a:ext cx="167449" cy="182880"/>
+            <a:off x="2805679" y="3954145"/>
+            <a:ext cx="198891" cy="182880"/>
           </a:xfrm>
           <a:prstGeom prst="rect">
             <a:avLst/>
@@ -13110,8 +13110,8 @@
         </p:nvSpPr>
         <p:spPr>
           <a:xfrm>
-            <a:off x="2808256" y="5446395"/>
-            <a:ext cx="193738" cy="182880"/>
+            <a:off x="2785805" y="5446395"/>
+            <a:ext cx="238640" cy="182880"/>
           </a:xfrm>
           <a:prstGeom prst="rect">
             <a:avLst/>
@@ -13172,8 +13172,8 @@
         </p:nvSpPr>
         <p:spPr>
           <a:xfrm>
-            <a:off x="3488150" y="4074795"/>
-            <a:ext cx="167449" cy="182880"/>
+            <a:off x="3472429" y="4074795"/>
+            <a:ext cx="198891" cy="182880"/>
           </a:xfrm>
           <a:prstGeom prst="rect">
             <a:avLst/>
@@ -13212,8 +13212,8 @@
         </p:nvSpPr>
         <p:spPr>
           <a:xfrm>
-            <a:off x="3458575" y="5446395"/>
-            <a:ext cx="226600" cy="182880"/>
+            <a:off x="3444037" y="5446395"/>
+            <a:ext cx="255675" cy="182880"/>
           </a:xfrm>
           <a:prstGeom prst="rect">
             <a:avLst/>
@@ -13274,8 +13274,8 @@
         </p:nvSpPr>
         <p:spPr>
           <a:xfrm>
-            <a:off x="4171331" y="3833495"/>
-            <a:ext cx="134588" cy="182880"/>
+            <a:off x="4147697" y="3833495"/>
+            <a:ext cx="181856" cy="182880"/>
           </a:xfrm>
           <a:prstGeom prst="rect">
             <a:avLst/>
@@ -13314,8 +13314,8 @@
         </p:nvSpPr>
         <p:spPr>
           <a:xfrm>
-            <a:off x="4125325" y="5446395"/>
-            <a:ext cx="226600" cy="182880"/>
+            <a:off x="4110787" y="5446395"/>
+            <a:ext cx="255675" cy="182880"/>
           </a:xfrm>
           <a:prstGeom prst="rect">
             <a:avLst/>
@@ -13376,8 +13376,8 @@
         </p:nvSpPr>
         <p:spPr>
           <a:xfrm>
-            <a:off x="4821650" y="3954145"/>
-            <a:ext cx="167449" cy="182880"/>
+            <a:off x="4805929" y="3954145"/>
+            <a:ext cx="198891" cy="182880"/>
           </a:xfrm>
           <a:prstGeom prst="rect">
             <a:avLst/>
@@ -13416,8 +13416,8 @@
         </p:nvSpPr>
         <p:spPr>
           <a:xfrm>
-            <a:off x="4792075" y="5446395"/>
-            <a:ext cx="226600" cy="182880"/>
+            <a:off x="4777537" y="5446395"/>
+            <a:ext cx="255675" cy="182880"/>
           </a:xfrm>
           <a:prstGeom prst="rect">
             <a:avLst/>
@@ -13478,8 +13478,8 @@
         </p:nvSpPr>
         <p:spPr>
           <a:xfrm>
-            <a:off x="5504831" y="3833495"/>
-            <a:ext cx="134588" cy="182880"/>
+            <a:off x="5481197" y="3833495"/>
+            <a:ext cx="181856" cy="182880"/>
           </a:xfrm>
           <a:prstGeom prst="rect">
             <a:avLst/>
@@ -13518,8 +13518,8 @@
         </p:nvSpPr>
         <p:spPr>
           <a:xfrm>
-            <a:off x="5458825" y="5446395"/>
-            <a:ext cx="226600" cy="182880"/>
+            <a:off x="5444287" y="5446395"/>
+            <a:ext cx="255675" cy="182880"/>
           </a:xfrm>
           <a:prstGeom prst="rect">
             <a:avLst/>
@@ -13580,8 +13580,8 @@
         </p:nvSpPr>
         <p:spPr>
           <a:xfrm>
-            <a:off x="6092878" y="3809365"/>
-            <a:ext cx="291994" cy="182880"/>
+            <a:off x="6058909" y="3809365"/>
+            <a:ext cx="359931" cy="182880"/>
           </a:xfrm>
           <a:prstGeom prst="rect">
             <a:avLst/>
@@ -13620,8 +13620,8 @@
         </p:nvSpPr>
         <p:spPr>
           <a:xfrm>
-            <a:off x="6125575" y="5446395"/>
-            <a:ext cx="226600" cy="182880"/>
+            <a:off x="6111037" y="5446395"/>
+            <a:ext cx="255675" cy="182880"/>
           </a:xfrm>
           <a:prstGeom prst="rect">
             <a:avLst/>
@@ -13697,7 +13697,7 @@
         <p:spPr>
           <a:xfrm>
             <a:off x="7410450" y="1438275"/>
-            <a:ext cx="958215" cy="304800"/>
+            <a:ext cx="1061352" cy="304800"/>
           </a:xfrm>
           <a:prstGeom prst="rect">
             <a:avLst/>
@@ -13759,7 +13759,7 @@
         <p:spPr>
           <a:xfrm>
             <a:off x="7605712" y="1831181"/>
-            <a:ext cx="2337078" cy="228600"/>
+            <a:ext cx="2654846" cy="228600"/>
           </a:xfrm>
           <a:prstGeom prst="rect">
             <a:avLst/>
@@ -13799,7 +13799,7 @@
         <p:spPr>
           <a:xfrm>
             <a:off x="7605712" y="2059781"/>
-            <a:ext cx="2328862" cy="228600"/>
+            <a:ext cx="2562572" cy="228600"/>
           </a:xfrm>
           <a:prstGeom prst="rect">
             <a:avLst/>
@@ -13861,7 +13861,7 @@
         <p:spPr>
           <a:xfrm>
             <a:off x="7605712" y="2516981"/>
-            <a:ext cx="2164556" cy="228600"/>
+            <a:ext cx="2441905" cy="228600"/>
           </a:xfrm>
           <a:prstGeom prst="rect">
             <a:avLst/>
@@ -13901,7 +13901,7 @@
         <p:spPr>
           <a:xfrm>
             <a:off x="7605712" y="2745581"/>
-            <a:ext cx="2164556" cy="228600"/>
+            <a:ext cx="2381572" cy="228600"/>
           </a:xfrm>
           <a:prstGeom prst="rect">
             <a:avLst/>
@@ -13963,7 +13963,7 @@
         <p:spPr>
           <a:xfrm>
             <a:off x="7605712" y="3202781"/>
-            <a:ext cx="2074188" cy="228600"/>
+            <a:ext cx="2331886" cy="228600"/>
           </a:xfrm>
           <a:prstGeom prst="rect">
             <a:avLst/>
@@ -14003,7 +14003,7 @@
         <p:spPr>
           <a:xfrm>
             <a:off x="7605712" y="3431381"/>
-            <a:ext cx="2328862" cy="228600"/>
+            <a:ext cx="2562572" cy="228600"/>
           </a:xfrm>
           <a:prstGeom prst="rect">
             <a:avLst/>
@@ -14079,7 +14079,7 @@
         <p:spPr>
           <a:xfrm>
             <a:off x="7301865" y="4287202"/>
-            <a:ext cx="1276493" cy="213360"/>
+            <a:ext cx="1417884" cy="213360"/>
           </a:xfrm>
           <a:prstGeom prst="rect">
             <a:avLst/>
@@ -14119,7 +14119,7 @@
         <p:spPr>
           <a:xfrm>
             <a:off x="7267575" y="4567238"/>
-            <a:ext cx="1360408" cy="762000"/>
+            <a:ext cx="1650192" cy="762000"/>
           </a:xfrm>
           <a:prstGeom prst="rect">
             <a:avLst/>
@@ -14159,7 +14159,7 @@
         <p:spPr>
           <a:xfrm>
             <a:off x="7300912" y="5174456"/>
-            <a:ext cx="2180987" cy="228600"/>
+            <a:ext cx="2480944" cy="228600"/>
           </a:xfrm>
           <a:prstGeom prst="rect">
             <a:avLst/>
@@ -14246,7 +14246,7 @@
         <p:spPr>
           <a:xfrm>
             <a:off x="370522" y="139541"/>
-            <a:ext cx="1400580" cy="167640"/>
+            <a:ext cx="1553893" cy="167640"/>
           </a:xfrm>
           <a:prstGeom prst="rect">
             <a:avLst/>
@@ -14285,7 +14285,7 @@
         </p:nvSpPr>
         <p:spPr>
           <a:xfrm>
-            <a:off x="11410950" y="152400"/>
+            <a:off x="11315700" y="152400"/>
             <a:ext cx="85725" cy="85725"/>
           </a:xfrm>
           <a:prstGeom prst="rect">
@@ -14307,8 +14307,8 @@
         </p:nvSpPr>
         <p:spPr>
           <a:xfrm>
-            <a:off x="11468329" y="131445"/>
-            <a:ext cx="354101" cy="182880"/>
+            <a:off x="11396288" y="131445"/>
+            <a:ext cx="426142" cy="182880"/>
           </a:xfrm>
           <a:prstGeom prst="rect">
             <a:avLst/>
@@ -14384,7 +14384,7 @@
         <p:spPr>
           <a:xfrm>
             <a:off x="350520" y="483870"/>
-            <a:ext cx="8305190" cy="487680"/>
+            <a:ext cx="9282266" cy="487680"/>
           </a:xfrm>
           <a:prstGeom prst="rect">
             <a:avLst/>
@@ -14496,7 +14496,7 @@
         <p:spPr>
           <a:xfrm>
             <a:off x="370522" y="6664166"/>
-            <a:ext cx="2117503" cy="167640"/>
+            <a:ext cx="2412755" cy="167640"/>
           </a:xfrm>
           <a:prstGeom prst="rect">
             <a:avLst/>
@@ -14535,8 +14535,8 @@
         </p:nvSpPr>
         <p:spPr>
           <a:xfrm>
-            <a:off x="11457122" y="6664166"/>
-            <a:ext cx="364355" cy="167640"/>
+            <a:off x="11345066" y="6664166"/>
+            <a:ext cx="476412" cy="167640"/>
           </a:xfrm>
           <a:prstGeom prst="rect">
             <a:avLst/>
@@ -14677,8 +14677,8 @@
         </p:nvSpPr>
         <p:spPr>
           <a:xfrm>
-            <a:off x="2014990" y="1704499"/>
-            <a:ext cx="580120" cy="198120"/>
+            <a:off x="1943563" y="1704499"/>
+            <a:ext cx="722975" cy="198120"/>
           </a:xfrm>
           <a:prstGeom prst="rect">
             <a:avLst/>
@@ -14717,8 +14717,8 @@
         </p:nvSpPr>
         <p:spPr>
           <a:xfrm>
-            <a:off x="5766780" y="1704499"/>
-            <a:ext cx="658439" cy="198120"/>
+            <a:off x="5686838" y="1704499"/>
+            <a:ext cx="818325" cy="198120"/>
           </a:xfrm>
           <a:prstGeom prst="rect">
             <a:avLst/>
@@ -14757,8 +14757,8 @@
         </p:nvSpPr>
         <p:spPr>
           <a:xfrm>
-            <a:off x="9557730" y="1704499"/>
-            <a:ext cx="658439" cy="198120"/>
+            <a:off x="9477788" y="1704499"/>
+            <a:ext cx="818325" cy="198120"/>
           </a:xfrm>
           <a:prstGeom prst="rect">
             <a:avLst/>
@@ -14870,7 +14870,7 @@
         <p:spPr>
           <a:xfrm>
             <a:off x="354330" y="2173605"/>
-            <a:ext cx="327074" cy="426720"/>
+            <a:ext cx="446590" cy="426720"/>
           </a:xfrm>
           <a:prstGeom prst="rect">
             <a:avLst/>
@@ -14910,7 +14910,7 @@
         <p:spPr>
           <a:xfrm>
             <a:off x="817245" y="2222182"/>
-            <a:ext cx="801005" cy="335280"/>
+            <a:ext cx="886093" cy="335280"/>
           </a:xfrm>
           <a:prstGeom prst="rect">
             <a:avLst/>
@@ -14972,7 +14972,7 @@
         <p:spPr>
           <a:xfrm>
             <a:off x="1683068" y="2228374"/>
-            <a:ext cx="451961" cy="198120"/>
+            <a:ext cx="495364" cy="198120"/>
           </a:xfrm>
           <a:prstGeom prst="rect">
             <a:avLst/>
@@ -15034,7 +15034,7 @@
         <p:spPr>
           <a:xfrm>
             <a:off x="557212" y="2697956"/>
-            <a:ext cx="1860590" cy="228600"/>
+            <a:ext cx="2108298" cy="228600"/>
           </a:xfrm>
           <a:prstGeom prst="rect">
             <a:avLst/>
@@ -15096,7 +15096,7 @@
         <p:spPr>
           <a:xfrm>
             <a:off x="557212" y="3040856"/>
-            <a:ext cx="1835944" cy="228600"/>
+            <a:ext cx="2019572" cy="228600"/>
           </a:xfrm>
           <a:prstGeom prst="rect">
             <a:avLst/>
@@ -15158,7 +15158,7 @@
         <p:spPr>
           <a:xfrm>
             <a:off x="557212" y="3383756"/>
-            <a:ext cx="1343025" cy="228600"/>
+            <a:ext cx="1476573" cy="228600"/>
           </a:xfrm>
           <a:prstGeom prst="rect">
             <a:avLst/>
@@ -15234,7 +15234,7 @@
         <p:spPr>
           <a:xfrm>
             <a:off x="368618" y="4219099"/>
-            <a:ext cx="309562" cy="198120"/>
+            <a:ext cx="338498" cy="198120"/>
           </a:xfrm>
           <a:prstGeom prst="rect">
             <a:avLst/>
@@ -15274,7 +15274,7 @@
         <p:spPr>
           <a:xfrm>
             <a:off x="822960" y="4194810"/>
-            <a:ext cx="1429055" cy="243840"/>
+            <a:ext cx="1711823" cy="243840"/>
           </a:xfrm>
           <a:prstGeom prst="rect">
             <a:avLst/>
@@ -15314,7 +15314,7 @@
         <p:spPr>
           <a:xfrm>
             <a:off x="4297680" y="2173605"/>
-            <a:ext cx="407584" cy="426720"/>
+            <a:ext cx="488724" cy="426720"/>
           </a:xfrm>
           <a:prstGeom prst="rect">
             <a:avLst/>
@@ -15354,7 +15354,7 @@
         <p:spPr>
           <a:xfrm>
             <a:off x="4760595" y="2222182"/>
-            <a:ext cx="801005" cy="335280"/>
+            <a:ext cx="886093" cy="335280"/>
           </a:xfrm>
           <a:prstGeom prst="rect">
             <a:avLst/>
@@ -15416,7 +15416,7 @@
         <p:spPr>
           <a:xfrm>
             <a:off x="4500562" y="2697956"/>
-            <a:ext cx="1950958" cy="228600"/>
+            <a:ext cx="2189925" cy="228600"/>
           </a:xfrm>
           <a:prstGeom prst="rect">
             <a:avLst/>
@@ -15478,7 +15478,7 @@
         <p:spPr>
           <a:xfrm>
             <a:off x="4500562" y="3040856"/>
-            <a:ext cx="2049542" cy="228600"/>
+            <a:ext cx="2303494" cy="228600"/>
           </a:xfrm>
           <a:prstGeom prst="rect">
             <a:avLst/>
@@ -15540,7 +15540,7 @@
         <p:spPr>
           <a:xfrm>
             <a:off x="4500562" y="3383756"/>
-            <a:ext cx="1178719" cy="228600"/>
+            <a:ext cx="1295573" cy="228600"/>
           </a:xfrm>
           <a:prstGeom prst="rect">
             <a:avLst/>
@@ -15616,7 +15616,7 @@
         <p:spPr>
           <a:xfrm>
             <a:off x="4311968" y="4219099"/>
-            <a:ext cx="309562" cy="198120"/>
+            <a:ext cx="338498" cy="198120"/>
           </a:xfrm>
           <a:prstGeom prst="rect">
             <a:avLst/>
@@ -15656,7 +15656,7 @@
         <p:spPr>
           <a:xfrm>
             <a:off x="4766310" y="4194810"/>
-            <a:ext cx="1254233" cy="243840"/>
+            <a:ext cx="1479084" cy="243840"/>
           </a:xfrm>
           <a:prstGeom prst="rect">
             <a:avLst/>
@@ -15696,7 +15696,7 @@
         <p:spPr>
           <a:xfrm>
             <a:off x="8088630" y="2173605"/>
-            <a:ext cx="407584" cy="426720"/>
+            <a:ext cx="488724" cy="426720"/>
           </a:xfrm>
           <a:prstGeom prst="rect">
             <a:avLst/>
@@ -15736,7 +15736,7 @@
         <p:spPr>
           <a:xfrm>
             <a:off x="8551545" y="2222182"/>
-            <a:ext cx="801005" cy="335280"/>
+            <a:ext cx="886093" cy="335280"/>
           </a:xfrm>
           <a:prstGeom prst="rect">
             <a:avLst/>
@@ -15798,7 +15798,7 @@
         <p:spPr>
           <a:xfrm>
             <a:off x="8291512" y="2697956"/>
-            <a:ext cx="1835944" cy="228600"/>
+            <a:ext cx="2019572" cy="228600"/>
           </a:xfrm>
           <a:prstGeom prst="rect">
             <a:avLst/>
@@ -15860,7 +15860,7 @@
         <p:spPr>
           <a:xfrm>
             <a:off x="8291512" y="3040856"/>
-            <a:ext cx="1696283" cy="228600"/>
+            <a:ext cx="1898906" cy="228600"/>
           </a:xfrm>
           <a:prstGeom prst="rect">
             <a:avLst/>
@@ -15922,7 +15922,7 @@
         <p:spPr>
           <a:xfrm>
             <a:off x="8291512" y="3383756"/>
-            <a:ext cx="1343025" cy="228600"/>
+            <a:ext cx="1476573" cy="228600"/>
           </a:xfrm>
           <a:prstGeom prst="rect">
             <a:avLst/>
@@ -15998,7 +15998,7 @@
         <p:spPr>
           <a:xfrm>
             <a:off x="8102918" y="4219099"/>
-            <a:ext cx="309562" cy="198120"/>
+            <a:ext cx="338498" cy="198120"/>
           </a:xfrm>
           <a:prstGeom prst="rect">
             <a:avLst/>
@@ -16038,7 +16038,7 @@
         <p:spPr>
           <a:xfrm>
             <a:off x="8557260" y="4194810"/>
-            <a:ext cx="1861509" cy="243840"/>
+            <a:ext cx="2157239" cy="243840"/>
           </a:xfrm>
           <a:prstGeom prst="rect">
             <a:avLst/>
@@ -16114,7 +16114,7 @@
         <p:spPr>
           <a:xfrm>
             <a:off x="364808" y="4910614"/>
-            <a:ext cx="814483" cy="259080"/>
+            <a:ext cx="902149" cy="259080"/>
           </a:xfrm>
           <a:prstGeom prst="rect">
             <a:avLst/>
@@ -16154,7 +16154,7 @@
         <p:spPr>
           <a:xfrm>
             <a:off x="367665" y="5201602"/>
-            <a:ext cx="670750" cy="213360"/>
+            <a:ext cx="742946" cy="213360"/>
           </a:xfrm>
           <a:prstGeom prst="rect">
             <a:avLst/>
@@ -16194,7 +16194,7 @@
         <p:spPr>
           <a:xfrm>
             <a:off x="5892165" y="5201602"/>
-            <a:ext cx="509730" cy="213360"/>
+            <a:ext cx="563877" cy="213360"/>
           </a:xfrm>
           <a:prstGeom prst="rect">
             <a:avLst/>
@@ -16234,7 +16234,7 @@
         <p:spPr>
           <a:xfrm>
             <a:off x="7987665" y="5201602"/>
-            <a:ext cx="348710" cy="213360"/>
+            <a:ext cx="384808" cy="213360"/>
           </a:xfrm>
           <a:prstGeom prst="rect">
             <a:avLst/>
@@ -16274,7 +16274,7 @@
         <p:spPr>
           <a:xfrm>
             <a:off x="9321165" y="5201602"/>
-            <a:ext cx="622444" cy="213360"/>
+            <a:ext cx="746458" cy="213360"/>
           </a:xfrm>
           <a:prstGeom prst="rect">
             <a:avLst/>
@@ -16350,7 +16350,7 @@
         <p:spPr>
           <a:xfrm>
             <a:off x="366712" y="5593556"/>
-            <a:ext cx="1129427" cy="228600"/>
+            <a:ext cx="1284926" cy="228600"/>
           </a:xfrm>
           <a:prstGeom prst="rect">
             <a:avLst/>
@@ -16390,7 +16390,7 @@
         <p:spPr>
           <a:xfrm>
             <a:off x="5891212" y="5593556"/>
-            <a:ext cx="874752" cy="228600"/>
+            <a:ext cx="976162" cy="228600"/>
           </a:xfrm>
           <a:prstGeom prst="rect">
             <a:avLst/>
@@ -16430,7 +16430,7 @@
         <p:spPr>
           <a:xfrm>
             <a:off x="7986712" y="5593556"/>
-            <a:ext cx="529709" cy="228600"/>
+            <a:ext cx="635457" cy="228600"/>
           </a:xfrm>
           <a:prstGeom prst="rect">
             <a:avLst/>
@@ -16470,7 +16470,7 @@
         <p:spPr>
           <a:xfrm>
             <a:off x="9320212" y="5593556"/>
-            <a:ext cx="1039058" cy="228600"/>
+            <a:ext cx="1235240" cy="228600"/>
           </a:xfrm>
           <a:prstGeom prst="rect">
             <a:avLst/>
@@ -16546,7 +16546,7 @@
         <p:spPr>
           <a:xfrm>
             <a:off x="366712" y="5860256"/>
-            <a:ext cx="1014412" cy="228600"/>
+            <a:ext cx="1114574" cy="228600"/>
           </a:xfrm>
           <a:prstGeom prst="rect">
             <a:avLst/>
@@ -16586,7 +16586,7 @@
         <p:spPr>
           <a:xfrm>
             <a:off x="5891212" y="5860256"/>
-            <a:ext cx="685800" cy="228600"/>
+            <a:ext cx="812907" cy="228600"/>
           </a:xfrm>
           <a:prstGeom prst="rect">
             <a:avLst/>
@@ -16626,7 +16626,7 @@
         <p:spPr>
           <a:xfrm>
             <a:off x="7986712" y="5860256"/>
-            <a:ext cx="529709" cy="228600"/>
+            <a:ext cx="635457" cy="228600"/>
           </a:xfrm>
           <a:prstGeom prst="rect">
             <a:avLst/>
@@ -16666,7 +16666,7 @@
         <p:spPr>
           <a:xfrm>
             <a:off x="9320212" y="5860256"/>
-            <a:ext cx="981551" cy="228600"/>
+            <a:ext cx="1125221" cy="228600"/>
           </a:xfrm>
           <a:prstGeom prst="rect">
             <a:avLst/>
@@ -16742,7 +16742,7 @@
         <p:spPr>
           <a:xfrm>
             <a:off x="366712" y="6126956"/>
-            <a:ext cx="1014412" cy="228600"/>
+            <a:ext cx="1114574" cy="228600"/>
           </a:xfrm>
           <a:prstGeom prst="rect">
             <a:avLst/>
@@ -16782,7 +16782,7 @@
         <p:spPr>
           <a:xfrm>
             <a:off x="5891212" y="6126956"/>
-            <a:ext cx="874752" cy="228600"/>
+            <a:ext cx="976162" cy="228600"/>
           </a:xfrm>
           <a:prstGeom prst="rect">
             <a:avLst/>
@@ -16822,7 +16822,7 @@
         <p:spPr>
           <a:xfrm>
             <a:off x="7986712" y="6126956"/>
-            <a:ext cx="529709" cy="228600"/>
+            <a:ext cx="635457" cy="228600"/>
           </a:xfrm>
           <a:prstGeom prst="rect">
             <a:avLst/>
@@ -16862,7 +16862,7 @@
         <p:spPr>
           <a:xfrm>
             <a:off x="9320212" y="6126956"/>
-            <a:ext cx="940475" cy="228600"/>
+            <a:ext cx="1071985" cy="228600"/>
           </a:xfrm>
           <a:prstGeom prst="rect">
             <a:avLst/>
@@ -16949,7 +16949,7 @@
         <p:spPr>
           <a:xfrm>
             <a:off x="370522" y="291941"/>
-            <a:ext cx="1364432" cy="167640"/>
+            <a:ext cx="1512251" cy="167640"/>
           </a:xfrm>
           <a:prstGeom prst="rect">
             <a:avLst/>
@@ -17011,7 +17011,7 @@
         <p:spPr>
           <a:xfrm>
             <a:off x="360045" y="1726882"/>
-            <a:ext cx="2210752" cy="335280"/>
+            <a:ext cx="2431107" cy="335280"/>
           </a:xfrm>
           <a:prstGeom prst="rect">
             <a:avLst/>
@@ -17051,7 +17051,7 @@
         <p:spPr>
           <a:xfrm>
             <a:off x="182880" y="2259330"/>
-            <a:ext cx="4570971" cy="2560320"/>
+            <a:ext cx="5544644" cy="2560320"/>
           </a:xfrm>
           <a:prstGeom prst="rect">
             <a:avLst/>
@@ -17091,7 +17091,7 @@
         <p:spPr>
           <a:xfrm>
             <a:off x="4232910" y="3166110"/>
-            <a:ext cx="720090" cy="853440"/>
+            <a:ext cx="782412" cy="853440"/>
           </a:xfrm>
           <a:prstGeom prst="rect">
             <a:avLst/>
@@ -17167,7 +17167,7 @@
         <p:spPr>
           <a:xfrm>
             <a:off x="360045" y="4127182"/>
-            <a:ext cx="3546398" cy="335280"/>
+            <a:ext cx="4053158" cy="335280"/>
           </a:xfrm>
           <a:prstGeom prst="rect">
             <a:avLst/>
@@ -17207,7 +17207,7 @@
         <p:spPr>
           <a:xfrm>
             <a:off x="366712" y="4564856"/>
-            <a:ext cx="2747843" cy="228600"/>
+            <a:ext cx="3141061" cy="228600"/>
           </a:xfrm>
           <a:prstGeom prst="rect">
             <a:avLst/>
@@ -17283,7 +17283,7 @@
         <p:spPr>
           <a:xfrm>
             <a:off x="7988618" y="1552099"/>
-            <a:ext cx="594360" cy="198120"/>
+            <a:ext cx="652231" cy="198120"/>
           </a:xfrm>
           <a:prstGeom prst="rect">
             <a:avLst/>
@@ -17345,7 +17345,7 @@
         <p:spPr>
           <a:xfrm>
             <a:off x="7986712" y="2126456"/>
-            <a:ext cx="718661" cy="228600"/>
+            <a:ext cx="796014" cy="228600"/>
           </a:xfrm>
           <a:prstGeom prst="rect">
             <a:avLst/>
@@ -17384,8 +17384,8 @@
         </p:nvSpPr>
         <p:spPr>
           <a:xfrm>
-            <a:off x="11159353" y="2110264"/>
-            <a:ext cx="667839" cy="259080"/>
+            <a:off x="11006051" y="2110264"/>
+            <a:ext cx="821142" cy="259080"/>
           </a:xfrm>
           <a:prstGeom prst="rect">
             <a:avLst/>
@@ -17425,7 +17425,7 @@
         <p:spPr>
           <a:xfrm>
             <a:off x="7988618" y="2371249"/>
-            <a:ext cx="2217706" cy="198120"/>
+            <a:ext cx="2553083" cy="198120"/>
           </a:xfrm>
           <a:prstGeom prst="rect">
             <a:avLst/>
@@ -17501,7 +17501,7 @@
         <p:spPr>
           <a:xfrm>
             <a:off x="7986712" y="2926556"/>
-            <a:ext cx="718661" cy="228600"/>
+            <a:ext cx="796014" cy="228600"/>
           </a:xfrm>
           <a:prstGeom prst="rect">
             <a:avLst/>
@@ -17540,8 +17540,8 @@
         </p:nvSpPr>
         <p:spPr>
           <a:xfrm>
-            <a:off x="11159353" y="2910364"/>
-            <a:ext cx="667839" cy="259080"/>
+            <a:off x="11006051" y="2910364"/>
+            <a:ext cx="821142" cy="259080"/>
           </a:xfrm>
           <a:prstGeom prst="rect">
             <a:avLst/>
@@ -17581,7 +17581,7 @@
         <p:spPr>
           <a:xfrm>
             <a:off x="7988618" y="3171349"/>
-            <a:ext cx="1890189" cy="198120"/>
+            <a:ext cx="2122469" cy="198120"/>
           </a:xfrm>
           <a:prstGeom prst="rect">
             <a:avLst/>
@@ -17657,7 +17657,7 @@
         <p:spPr>
           <a:xfrm>
             <a:off x="7986712" y="3726656"/>
-            <a:ext cx="718661" cy="228600"/>
+            <a:ext cx="796014" cy="228600"/>
           </a:xfrm>
           <a:prstGeom prst="rect">
             <a:avLst/>
@@ -17696,8 +17696,8 @@
         </p:nvSpPr>
         <p:spPr>
           <a:xfrm>
-            <a:off x="11266892" y="3710464"/>
-            <a:ext cx="560301" cy="259080"/>
+            <a:off x="11138221" y="3710464"/>
+            <a:ext cx="688972" cy="259080"/>
           </a:xfrm>
           <a:prstGeom prst="rect">
             <a:avLst/>
@@ -17737,7 +17737,7 @@
         <p:spPr>
           <a:xfrm>
             <a:off x="7988618" y="3971449"/>
-            <a:ext cx="1854589" cy="198120"/>
+            <a:ext cx="2104015" cy="198120"/>
           </a:xfrm>
           <a:prstGeom prst="rect">
             <a:avLst/>
@@ -17835,7 +17835,7 @@
         <p:spPr>
           <a:xfrm>
             <a:off x="8177212" y="4641056"/>
-            <a:ext cx="2484953" cy="228600"/>
+            <a:ext cx="2796807" cy="228600"/>
           </a:xfrm>
           <a:prstGeom prst="rect">
             <a:avLst/>
@@ -17875,7 +17875,7 @@
         <p:spPr>
           <a:xfrm>
             <a:off x="370522" y="6578441"/>
-            <a:ext cx="2563320" cy="167640"/>
+            <a:ext cx="2915058" cy="167640"/>
           </a:xfrm>
           <a:prstGeom prst="rect">
             <a:avLst/>
@@ -17914,8 +17914,8 @@
         </p:nvSpPr>
         <p:spPr>
           <a:xfrm>
-            <a:off x="11457122" y="6578441"/>
-            <a:ext cx="364355" cy="167640"/>
+            <a:off x="11345066" y="6578441"/>
+            <a:ext cx="476412" cy="167640"/>
           </a:xfrm>
           <a:prstGeom prst="rect">
             <a:avLst/>
@@ -18002,7 +18002,7 @@
         <p:spPr>
           <a:xfrm>
             <a:off x="370522" y="139541"/>
-            <a:ext cx="1123450" cy="167640"/>
+            <a:ext cx="1246785" cy="167640"/>
           </a:xfrm>
           <a:prstGeom prst="rect">
             <a:avLst/>
@@ -18041,7 +18041,7 @@
         </p:nvSpPr>
         <p:spPr>
           <a:xfrm>
-            <a:off x="11410950" y="152400"/>
+            <a:off x="11315700" y="152400"/>
             <a:ext cx="85725" cy="85725"/>
           </a:xfrm>
           <a:prstGeom prst="rect">
@@ -18063,8 +18063,8 @@
         </p:nvSpPr>
         <p:spPr>
           <a:xfrm>
-            <a:off x="11468329" y="131445"/>
-            <a:ext cx="354101" cy="182880"/>
+            <a:off x="11396288" y="131445"/>
+            <a:ext cx="426142" cy="182880"/>
           </a:xfrm>
           <a:prstGeom prst="rect">
             <a:avLst/>
@@ -18140,7 +18140,7 @@
         <p:spPr>
           <a:xfrm>
             <a:off x="350520" y="483870"/>
-            <a:ext cx="7789926" cy="487680"/>
+            <a:ext cx="8656277" cy="487680"/>
           </a:xfrm>
           <a:prstGeom prst="rect">
             <a:avLst/>
@@ -18252,7 +18252,7 @@
         <p:spPr>
           <a:xfrm>
             <a:off x="370522" y="6664166"/>
-            <a:ext cx="1707832" cy="167640"/>
+            <a:ext cx="1944285" cy="167640"/>
           </a:xfrm>
           <a:prstGeom prst="rect">
             <a:avLst/>
@@ -18291,8 +18291,8 @@
         </p:nvSpPr>
         <p:spPr>
           <a:xfrm>
-            <a:off x="11457122" y="6664166"/>
-            <a:ext cx="364355" cy="167640"/>
+            <a:off x="11345066" y="6664166"/>
+            <a:ext cx="476412" cy="167640"/>
           </a:xfrm>
           <a:prstGeom prst="rect">
             <a:avLst/>
@@ -18332,7 +18332,7 @@
         <p:spPr>
           <a:xfrm>
             <a:off x="360045" y="1326832"/>
-            <a:ext cx="801005" cy="335280"/>
+            <a:ext cx="886093" cy="335280"/>
           </a:xfrm>
           <a:prstGeom prst="rect">
             <a:avLst/>
@@ -18372,7 +18372,7 @@
         <p:spPr>
           <a:xfrm>
             <a:off x="367665" y="1639252"/>
-            <a:ext cx="793432" cy="213360"/>
+            <a:ext cx="871336" cy="213360"/>
           </a:xfrm>
           <a:prstGeom prst="rect">
             <a:avLst/>
@@ -18412,7 +18412,7 @@
         <p:spPr>
           <a:xfrm>
             <a:off x="352425" y="2005012"/>
-            <a:ext cx="350437" cy="457200"/>
+            <a:ext cx="478489" cy="457200"/>
           </a:xfrm>
           <a:prstGeom prst="rect">
             <a:avLst/>
@@ -18473,8 +18473,8 @@
         </p:nvSpPr>
         <p:spPr>
           <a:xfrm>
-            <a:off x="3282222" y="1783556"/>
-            <a:ext cx="1080957" cy="228600"/>
+            <a:off x="3187690" y="1783556"/>
+            <a:ext cx="1270020" cy="228600"/>
           </a:xfrm>
           <a:prstGeom prst="rect">
             <a:avLst/>
@@ -18535,8 +18535,8 @@
         </p:nvSpPr>
         <p:spPr>
           <a:xfrm>
-            <a:off x="6516648" y="1783556"/>
-            <a:ext cx="1063704" cy="228600"/>
+            <a:off x="6458633" y="1783556"/>
+            <a:ext cx="1179734" cy="228600"/>
           </a:xfrm>
           <a:prstGeom prst="rect">
             <a:avLst/>
@@ -18597,8 +18597,8 @@
         </p:nvSpPr>
         <p:spPr>
           <a:xfrm>
-            <a:off x="9742448" y="1783556"/>
-            <a:ext cx="1063704" cy="228600"/>
+            <a:off x="9684433" y="1783556"/>
+            <a:ext cx="1179734" cy="228600"/>
           </a:xfrm>
           <a:prstGeom prst="rect">
             <a:avLst/>
@@ -18714,7 +18714,7 @@
         <p:spPr>
           <a:xfrm>
             <a:off x="360045" y="2965132"/>
-            <a:ext cx="801005" cy="335280"/>
+            <a:ext cx="886093" cy="335280"/>
           </a:xfrm>
           <a:prstGeom prst="rect">
             <a:avLst/>
@@ -18754,7 +18754,7 @@
         <p:spPr>
           <a:xfrm>
             <a:off x="367665" y="3277552"/>
-            <a:ext cx="793432" cy="213360"/>
+            <a:ext cx="871336" cy="213360"/>
           </a:xfrm>
           <a:prstGeom prst="rect">
             <a:avLst/>
@@ -18794,7 +18794,7 @@
         <p:spPr>
           <a:xfrm>
             <a:off x="352425" y="3643312"/>
-            <a:ext cx="436697" cy="457200"/>
+            <a:ext cx="523633" cy="457200"/>
           </a:xfrm>
           <a:prstGeom prst="rect">
             <a:avLst/>
@@ -18855,8 +18855,8 @@
         </p:nvSpPr>
         <p:spPr>
           <a:xfrm>
-            <a:off x="2973884" y="3421856"/>
-            <a:ext cx="891183" cy="228600"/>
+            <a:off x="2925538" y="3421856"/>
+            <a:ext cx="987874" cy="228600"/>
           </a:xfrm>
           <a:prstGeom prst="rect">
             <a:avLst/>
@@ -18917,8 +18917,8 @@
         </p:nvSpPr>
         <p:spPr>
           <a:xfrm>
-            <a:off x="5466555" y="3421856"/>
-            <a:ext cx="744539" cy="228600"/>
+            <a:off x="5408841" y="3421856"/>
+            <a:ext cx="859967" cy="228600"/>
           </a:xfrm>
           <a:prstGeom prst="rect">
             <a:avLst/>
@@ -18979,8 +18979,8 @@
         </p:nvSpPr>
         <p:spPr>
           <a:xfrm>
-            <a:off x="7726323" y="3421856"/>
-            <a:ext cx="1063704" cy="228600"/>
+            <a:off x="7668308" y="3421856"/>
+            <a:ext cx="1179734" cy="228600"/>
           </a:xfrm>
           <a:prstGeom prst="rect">
             <a:avLst/>
@@ -19041,8 +19041,8 @@
         </p:nvSpPr>
         <p:spPr>
           <a:xfrm>
-            <a:off x="10145673" y="3421856"/>
-            <a:ext cx="1063704" cy="228600"/>
+            <a:off x="10087658" y="3421856"/>
+            <a:ext cx="1179734" cy="228600"/>
           </a:xfrm>
           <a:prstGeom prst="rect">
             <a:avLst/>
@@ -19158,7 +19158,7 @@
         <p:spPr>
           <a:xfrm>
             <a:off x="360045" y="4603432"/>
-            <a:ext cx="801005" cy="335280"/>
+            <a:ext cx="886093" cy="335280"/>
           </a:xfrm>
           <a:prstGeom prst="rect">
             <a:avLst/>
@@ -19198,7 +19198,7 @@
         <p:spPr>
           <a:xfrm>
             <a:off x="367665" y="4915852"/>
-            <a:ext cx="793432" cy="213360"/>
+            <a:ext cx="871336" cy="213360"/>
           </a:xfrm>
           <a:prstGeom prst="rect">
             <a:avLst/>
@@ -19238,7 +19238,7 @@
         <p:spPr>
           <a:xfrm>
             <a:off x="352425" y="5281612"/>
-            <a:ext cx="436697" cy="457200"/>
+            <a:ext cx="523633" cy="457200"/>
           </a:xfrm>
           <a:prstGeom prst="rect">
             <a:avLst/>
@@ -19299,8 +19299,8 @@
         </p:nvSpPr>
         <p:spPr>
           <a:xfrm>
-            <a:off x="2757827" y="5060156"/>
-            <a:ext cx="839426" cy="228600"/>
+            <a:off x="2689246" y="5060156"/>
+            <a:ext cx="976588" cy="228600"/>
           </a:xfrm>
           <a:prstGeom prst="rect">
             <a:avLst/>
@@ -19361,8 +19361,8 @@
         </p:nvSpPr>
         <p:spPr>
           <a:xfrm>
-            <a:off x="4753689" y="5060156"/>
-            <a:ext cx="718661" cy="228600"/>
+            <a:off x="4715013" y="5060156"/>
+            <a:ext cx="796014" cy="228600"/>
           </a:xfrm>
           <a:prstGeom prst="rect">
             <a:avLst/>
@@ -19423,8 +19423,8 @@
         </p:nvSpPr>
         <p:spPr>
           <a:xfrm>
-            <a:off x="6689169" y="5060156"/>
-            <a:ext cx="718661" cy="228600"/>
+            <a:off x="6650493" y="5060156"/>
+            <a:ext cx="796014" cy="228600"/>
           </a:xfrm>
           <a:prstGeom prst="rect">
             <a:avLst/>
@@ -19485,8 +19485,8 @@
         </p:nvSpPr>
         <p:spPr>
           <a:xfrm>
-            <a:off x="8624649" y="5060156"/>
-            <a:ext cx="718661" cy="228600"/>
+            <a:off x="8585973" y="5060156"/>
+            <a:ext cx="796014" cy="228600"/>
           </a:xfrm>
           <a:prstGeom prst="rect">
             <a:avLst/>
@@ -19547,8 +19547,8 @@
         </p:nvSpPr>
         <p:spPr>
           <a:xfrm>
-            <a:off x="10560129" y="5060156"/>
-            <a:ext cx="718661" cy="228600"/>
+            <a:off x="10521453" y="5060156"/>
+            <a:ext cx="796014" cy="228600"/>
           </a:xfrm>
           <a:prstGeom prst="rect">
             <a:avLst/>
@@ -19635,7 +19635,7 @@
         <p:spPr>
           <a:xfrm>
             <a:off x="370522" y="139541"/>
-            <a:ext cx="1002959" cy="167640"/>
+            <a:ext cx="1114052" cy="167640"/>
           </a:xfrm>
           <a:prstGeom prst="rect">
             <a:avLst/>
@@ -19674,7 +19674,7 @@
         </p:nvSpPr>
         <p:spPr>
           <a:xfrm>
-            <a:off x="11410950" y="152400"/>
+            <a:off x="11315700" y="152400"/>
             <a:ext cx="85725" cy="85725"/>
           </a:xfrm>
           <a:prstGeom prst="rect">
@@ -19696,8 +19696,8 @@
         </p:nvSpPr>
         <p:spPr>
           <a:xfrm>
-            <a:off x="11468329" y="131445"/>
-            <a:ext cx="354101" cy="182880"/>
+            <a:off x="11396288" y="131445"/>
+            <a:ext cx="426142" cy="182880"/>
           </a:xfrm>
           <a:prstGeom prst="rect">
             <a:avLst/>
@@ -19773,7 +19773,7 @@
         <p:spPr>
           <a:xfrm>
             <a:off x="350520" y="483870"/>
-            <a:ext cx="7311466" cy="487680"/>
+            <a:ext cx="8222900" cy="487680"/>
           </a:xfrm>
           <a:prstGeom prst="rect">
             <a:avLst/>
@@ -19885,7 +19885,7 @@
         <p:spPr>
           <a:xfrm>
             <a:off x="370522" y="6664166"/>
-            <a:ext cx="1707832" cy="167640"/>
+            <a:ext cx="1944285" cy="167640"/>
           </a:xfrm>
           <a:prstGeom prst="rect">
             <a:avLst/>
@@ -19924,8 +19924,8 @@
         </p:nvSpPr>
         <p:spPr>
           <a:xfrm>
-            <a:off x="11457122" y="6664166"/>
-            <a:ext cx="364355" cy="167640"/>
+            <a:off x="11345066" y="6664166"/>
+            <a:ext cx="476412" cy="167640"/>
           </a:xfrm>
           <a:prstGeom prst="rect">
             <a:avLst/>
@@ -20036,8 +20036,8 @@
         </p:nvSpPr>
         <p:spPr>
           <a:xfrm>
-            <a:off x="1597819" y="1132999"/>
-            <a:ext cx="167164" cy="198120"/>
+            <a:off x="1583351" y="1132999"/>
+            <a:ext cx="181631" cy="198120"/>
           </a:xfrm>
           <a:prstGeom prst="rect">
             <a:avLst/>
@@ -20076,8 +20076,8 @@
         </p:nvSpPr>
         <p:spPr>
           <a:xfrm>
-            <a:off x="1597819" y="6181249"/>
-            <a:ext cx="167164" cy="198120"/>
+            <a:off x="1583351" y="6181249"/>
+            <a:ext cx="181631" cy="198120"/>
           </a:xfrm>
           <a:prstGeom prst="rect">
             <a:avLst/>
@@ -20117,7 +20117,7 @@
         <p:spPr>
           <a:xfrm>
             <a:off x="368618" y="999649"/>
-            <a:ext cx="749931" cy="198120"/>
+            <a:ext cx="843116" cy="198120"/>
           </a:xfrm>
           <a:prstGeom prst="rect">
             <a:avLst/>
@@ -20157,7 +20157,7 @@
         <p:spPr>
           <a:xfrm>
             <a:off x="1892618" y="6466999"/>
-            <a:ext cx="451961" cy="198120"/>
+            <a:ext cx="495364" cy="198120"/>
           </a:xfrm>
           <a:prstGeom prst="rect">
             <a:avLst/>
@@ -20196,8 +20196,8 @@
         </p:nvSpPr>
         <p:spPr>
           <a:xfrm>
-            <a:off x="9847421" y="6466999"/>
-            <a:ext cx="451961" cy="198120"/>
+            <a:off x="9804018" y="6466999"/>
+            <a:ext cx="495364" cy="198120"/>
           </a:xfrm>
           <a:prstGeom prst="rect">
             <a:avLst/>
@@ -20236,8 +20236,8 @@
         </p:nvSpPr>
         <p:spPr>
           <a:xfrm>
-            <a:off x="5738301" y="6466999"/>
-            <a:ext cx="715399" cy="198120"/>
+            <a:off x="5697603" y="6466999"/>
+            <a:ext cx="796794" cy="198120"/>
           </a:xfrm>
           <a:prstGeom prst="rect">
             <a:avLst/>
@@ -20277,7 +20277,7 @@
         <p:spPr>
           <a:xfrm>
             <a:off x="2175510" y="1280160"/>
-            <a:ext cx="766572" cy="243840"/>
+            <a:ext cx="849082" cy="243840"/>
           </a:xfrm>
           <a:prstGeom prst="rect">
             <a:avLst/>
@@ -20317,7 +20317,7 @@
         <p:spPr>
           <a:xfrm>
             <a:off x="2180272" y="1511141"/>
-            <a:ext cx="641485" cy="167640"/>
+            <a:ext cx="809546" cy="167640"/>
           </a:xfrm>
           <a:prstGeom prst="rect">
             <a:avLst/>
@@ -20379,7 +20379,7 @@
         <p:spPr>
           <a:xfrm>
             <a:off x="2347912" y="1821656"/>
-            <a:ext cx="1184469" cy="228600"/>
+            <a:ext cx="1360307" cy="228600"/>
           </a:xfrm>
           <a:prstGeom prst="rect">
             <a:avLst/>
@@ -20419,7 +20419,7 @@
         <p:spPr>
           <a:xfrm>
             <a:off x="2349818" y="2028349"/>
-            <a:ext cx="879157" cy="198120"/>
+            <a:ext cx="990570" cy="198120"/>
           </a:xfrm>
           <a:prstGeom prst="rect">
             <a:avLst/>
@@ -20481,7 +20481,7 @@
         <p:spPr>
           <a:xfrm>
             <a:off x="2347912" y="2297906"/>
-            <a:ext cx="1063704" cy="228600"/>
+            <a:ext cx="1179734" cy="228600"/>
           </a:xfrm>
           <a:prstGeom prst="rect">
             <a:avLst/>
@@ -20521,7 +20521,7 @@
         <p:spPr>
           <a:xfrm>
             <a:off x="2349818" y="2504599"/>
-            <a:ext cx="1042916" cy="198120"/>
+            <a:ext cx="1159740" cy="198120"/>
           </a:xfrm>
           <a:prstGeom prst="rect">
             <a:avLst/>
@@ -20561,7 +20561,7 @@
         <p:spPr>
           <a:xfrm>
             <a:off x="6366510" y="1280160"/>
-            <a:ext cx="766572" cy="243840"/>
+            <a:ext cx="849082" cy="243840"/>
           </a:xfrm>
           <a:prstGeom prst="rect">
             <a:avLst/>
@@ -20601,7 +20601,7 @@
         <p:spPr>
           <a:xfrm>
             <a:off x="6371272" y="1511141"/>
-            <a:ext cx="490871" cy="167640"/>
+            <a:ext cx="611748" cy="167640"/>
           </a:xfrm>
           <a:prstGeom prst="rect">
             <a:avLst/>
@@ -20663,7 +20663,7 @@
         <p:spPr>
           <a:xfrm>
             <a:off x="6538912" y="1821656"/>
-            <a:ext cx="1089583" cy="228600"/>
+            <a:ext cx="1243687" cy="228600"/>
           </a:xfrm>
           <a:prstGeom prst="rect">
             <a:avLst/>
@@ -20703,7 +20703,7 @@
         <p:spPr>
           <a:xfrm>
             <a:off x="6540818" y="2028349"/>
-            <a:ext cx="921877" cy="198120"/>
+            <a:ext cx="1067466" cy="198120"/>
           </a:xfrm>
           <a:prstGeom prst="rect">
             <a:avLst/>
@@ -20765,7 +20765,7 @@
         <p:spPr>
           <a:xfrm>
             <a:off x="6538912" y="2297906"/>
-            <a:ext cx="1063704" cy="228600"/>
+            <a:ext cx="1179734" cy="228600"/>
           </a:xfrm>
           <a:prstGeom prst="rect">
             <a:avLst/>
@@ -20805,7 +20805,7 @@
         <p:spPr>
           <a:xfrm>
             <a:off x="6540818" y="2504599"/>
-            <a:ext cx="1042916" cy="198120"/>
+            <a:ext cx="1159740" cy="198120"/>
           </a:xfrm>
           <a:prstGeom prst="rect">
             <a:avLst/>
@@ -20845,7 +20845,7 @@
         <p:spPr>
           <a:xfrm>
             <a:off x="2175510" y="3851910"/>
-            <a:ext cx="582549" cy="243840"/>
+            <a:ext cx="644431" cy="243840"/>
           </a:xfrm>
           <a:prstGeom prst="rect">
             <a:avLst/>
@@ -20885,7 +20885,7 @@
         <p:spPr>
           <a:xfrm>
             <a:off x="2180272" y="4082891"/>
-            <a:ext cx="490871" cy="167640"/>
+            <a:ext cx="635171" cy="167640"/>
           </a:xfrm>
           <a:prstGeom prst="rect">
             <a:avLst/>
@@ -20947,7 +20947,7 @@
         <p:spPr>
           <a:xfrm>
             <a:off x="2347912" y="4393406"/>
-            <a:ext cx="1063704" cy="228600"/>
+            <a:ext cx="1179734" cy="228600"/>
           </a:xfrm>
           <a:prstGeom prst="rect">
             <a:avLst/>
@@ -20987,7 +20987,7 @@
         <p:spPr>
           <a:xfrm>
             <a:off x="2349818" y="4600099"/>
-            <a:ext cx="1042916" cy="198120"/>
+            <a:ext cx="1159740" cy="198120"/>
           </a:xfrm>
           <a:prstGeom prst="rect">
             <a:avLst/>
@@ -21049,7 +21049,7 @@
         <p:spPr>
           <a:xfrm>
             <a:off x="2347912" y="4869656"/>
-            <a:ext cx="891183" cy="228600"/>
+            <a:ext cx="987874" cy="228600"/>
           </a:xfrm>
           <a:prstGeom prst="rect">
             <a:avLst/>
@@ -21089,7 +21089,7 @@
         <p:spPr>
           <a:xfrm>
             <a:off x="2349818" y="5076349"/>
-            <a:ext cx="1042916" cy="198120"/>
+            <a:ext cx="1159740" cy="198120"/>
           </a:xfrm>
           <a:prstGeom prst="rect">
             <a:avLst/>
@@ -21129,7 +21129,7 @@
         <p:spPr>
           <a:xfrm>
             <a:off x="6366510" y="3851910"/>
-            <a:ext cx="398526" cy="243840"/>
+            <a:ext cx="439781" cy="243840"/>
           </a:xfrm>
           <a:prstGeom prst="rect">
             <a:avLst/>
@@ -21169,7 +21169,7 @@
         <p:spPr>
           <a:xfrm>
             <a:off x="6371272" y="4082891"/>
-            <a:ext cx="671608" cy="167640"/>
+            <a:ext cx="825162" cy="167640"/>
           </a:xfrm>
           <a:prstGeom prst="rect">
             <a:avLst/>
@@ -21231,7 +21231,7 @@
         <p:spPr>
           <a:xfrm>
             <a:off x="6538912" y="4393406"/>
-            <a:ext cx="1063704" cy="228600"/>
+            <a:ext cx="1179734" cy="228600"/>
           </a:xfrm>
           <a:prstGeom prst="rect">
             <a:avLst/>
@@ -21271,7 +21271,7 @@
         <p:spPr>
           <a:xfrm>
             <a:off x="6540818" y="4600099"/>
-            <a:ext cx="1042916" cy="198120"/>
+            <a:ext cx="1159740" cy="198120"/>
           </a:xfrm>
           <a:prstGeom prst="rect">
             <a:avLst/>
@@ -21333,7 +21333,7 @@
         <p:spPr>
           <a:xfrm>
             <a:off x="6538912" y="4869656"/>
-            <a:ext cx="1141339" cy="228600"/>
+            <a:ext cx="1303878" cy="228600"/>
           </a:xfrm>
           <a:prstGeom prst="rect">
             <a:avLst/>
@@ -21373,7 +21373,7 @@
         <p:spPr>
           <a:xfrm>
             <a:off x="6540818" y="5076349"/>
-            <a:ext cx="1042916" cy="198120"/>
+            <a:ext cx="1159740" cy="198120"/>
           </a:xfrm>
           <a:prstGeom prst="rect">
             <a:avLst/>
@@ -21460,7 +21460,7 @@
         <p:spPr>
           <a:xfrm>
             <a:off x="370522" y="139541"/>
-            <a:ext cx="1123450" cy="167640"/>
+            <a:ext cx="1246785" cy="167640"/>
           </a:xfrm>
           <a:prstGeom prst="rect">
             <a:avLst/>
@@ -21499,7 +21499,7 @@
         </p:nvSpPr>
         <p:spPr>
           <a:xfrm>
-            <a:off x="11410950" y="152400"/>
+            <a:off x="11315700" y="152400"/>
             <a:ext cx="85725" cy="85725"/>
           </a:xfrm>
           <a:prstGeom prst="rect">
@@ -21521,8 +21521,8 @@
         </p:nvSpPr>
         <p:spPr>
           <a:xfrm>
-            <a:off x="11468329" y="131445"/>
-            <a:ext cx="354101" cy="182880"/>
+            <a:off x="11396288" y="131445"/>
+            <a:ext cx="426142" cy="182880"/>
           </a:xfrm>
           <a:prstGeom prst="rect">
             <a:avLst/>
@@ -21598,7 +21598,7 @@
         <p:spPr>
           <a:xfrm>
             <a:off x="350520" y="483870"/>
-            <a:ext cx="7421880" cy="487680"/>
+            <a:ext cx="8246976" cy="487680"/>
           </a:xfrm>
           <a:prstGeom prst="rect">
             <a:avLst/>
@@ -21710,7 +21710,7 @@
         <p:spPr>
           <a:xfrm>
             <a:off x="370522" y="6664166"/>
-            <a:ext cx="864394" cy="167640"/>
+            <a:ext cx="950087" cy="167640"/>
           </a:xfrm>
           <a:prstGeom prst="rect">
             <a:avLst/>
@@ -21749,8 +21749,8 @@
         </p:nvSpPr>
         <p:spPr>
           <a:xfrm>
-            <a:off x="11457122" y="6664166"/>
-            <a:ext cx="364355" cy="167640"/>
+            <a:off x="11345066" y="6664166"/>
+            <a:ext cx="476412" cy="167640"/>
           </a:xfrm>
           <a:prstGeom prst="rect">
             <a:avLst/>
@@ -21812,7 +21812,7 @@
         <p:spPr>
           <a:xfrm>
             <a:off x="531495" y="2107882"/>
-            <a:ext cx="256987" cy="335280"/>
+            <a:ext cx="350892" cy="335280"/>
           </a:xfrm>
           <a:prstGeom prst="rect">
             <a:avLst/>
@@ -21851,8 +21851,8 @@
         </p:nvSpPr>
         <p:spPr>
           <a:xfrm>
-            <a:off x="535305" y="2502218"/>
-            <a:ext cx="448342" cy="274320"/>
+            <a:off x="535305" y="2521268"/>
+            <a:ext cx="494753" cy="274320"/>
           </a:xfrm>
           <a:prstGeom prst="rect">
             <a:avLst/>
@@ -21891,8 +21891,8 @@
         </p:nvSpPr>
         <p:spPr>
           <a:xfrm>
-            <a:off x="960120" y="2550795"/>
-            <a:ext cx="555212" cy="182880"/>
+            <a:off x="541020" y="2779395"/>
+            <a:ext cx="667361" cy="182880"/>
           </a:xfrm>
           <a:prstGeom prst="rect">
             <a:avLst/>
@@ -21931,8 +21931,8 @@
         </p:nvSpPr>
         <p:spPr>
           <a:xfrm>
-            <a:off x="540068" y="2866549"/>
-            <a:ext cx="1299234" cy="198120"/>
+            <a:off x="540068" y="3037999"/>
+            <a:ext cx="1473473" cy="198120"/>
           </a:xfrm>
           <a:prstGeom prst="rect">
             <a:avLst/>
@@ -21972,7 +21972,7 @@
         <p:spPr>
           <a:xfrm>
             <a:off x="541972" y="3530441"/>
-            <a:ext cx="261937" cy="167640"/>
+            <a:ext cx="286421" cy="167640"/>
           </a:xfrm>
           <a:prstGeom prst="rect">
             <a:avLst/>
@@ -22012,7 +22012,7 @@
         <p:spPr>
           <a:xfrm>
             <a:off x="539115" y="3715702"/>
-            <a:ext cx="912281" cy="213360"/>
+            <a:ext cx="1055440" cy="213360"/>
           </a:xfrm>
           <a:prstGeom prst="rect">
             <a:avLst/>
@@ -22150,7 +22150,7 @@
         <p:spPr>
           <a:xfrm>
             <a:off x="2931795" y="2107882"/>
-            <a:ext cx="320245" cy="335280"/>
+            <a:ext cx="383997" cy="335280"/>
           </a:xfrm>
           <a:prstGeom prst="rect">
             <a:avLst/>
@@ -22189,8 +22189,8 @@
         </p:nvSpPr>
         <p:spPr>
           <a:xfrm>
-            <a:off x="2935605" y="2502218"/>
-            <a:ext cx="448342" cy="274320"/>
+            <a:off x="2935605" y="2521268"/>
+            <a:ext cx="494753" cy="274320"/>
           </a:xfrm>
           <a:prstGeom prst="rect">
             <a:avLst/>
@@ -22229,8 +22229,8 @@
         </p:nvSpPr>
         <p:spPr>
           <a:xfrm>
-            <a:off x="3360420" y="2550795"/>
-            <a:ext cx="568357" cy="182880"/>
+            <a:off x="2941320" y="2779395"/>
+            <a:ext cx="709949" cy="182880"/>
           </a:xfrm>
           <a:prstGeom prst="rect">
             <a:avLst/>
@@ -22269,8 +22269,8 @@
         </p:nvSpPr>
         <p:spPr>
           <a:xfrm>
-            <a:off x="2940368" y="2866549"/>
-            <a:ext cx="1306354" cy="198120"/>
+            <a:off x="2940368" y="3037999"/>
+            <a:ext cx="1436563" cy="198120"/>
           </a:xfrm>
           <a:prstGeom prst="rect">
             <a:avLst/>
@@ -22310,7 +22310,7 @@
         <p:spPr>
           <a:xfrm>
             <a:off x="2942272" y="3530441"/>
-            <a:ext cx="261937" cy="167640"/>
+            <a:ext cx="286421" cy="167640"/>
           </a:xfrm>
           <a:prstGeom prst="rect">
             <a:avLst/>
@@ -22350,7 +22350,7 @@
         <p:spPr>
           <a:xfrm>
             <a:off x="2939415" y="3715702"/>
-            <a:ext cx="751261" cy="213360"/>
+            <a:ext cx="876370" cy="213360"/>
           </a:xfrm>
           <a:prstGeom prst="rect">
             <a:avLst/>
@@ -22488,7 +22488,7 @@
         <p:spPr>
           <a:xfrm>
             <a:off x="5332095" y="2107882"/>
-            <a:ext cx="320245" cy="335280"/>
+            <a:ext cx="383997" cy="335280"/>
           </a:xfrm>
           <a:prstGeom prst="rect">
             <a:avLst/>
@@ -22527,8 +22527,8 @@
         </p:nvSpPr>
         <p:spPr>
           <a:xfrm>
-            <a:off x="5335905" y="2502218"/>
-            <a:ext cx="448342" cy="274320"/>
+            <a:off x="5335905" y="2521268"/>
+            <a:ext cx="494753" cy="274320"/>
           </a:xfrm>
           <a:prstGeom prst="rect">
             <a:avLst/>
@@ -22567,8 +22567,8 @@
         </p:nvSpPr>
         <p:spPr>
           <a:xfrm>
-            <a:off x="5760720" y="2550795"/>
-            <a:ext cx="522351" cy="182880"/>
+            <a:off x="5341620" y="2779395"/>
+            <a:ext cx="650326" cy="182880"/>
           </a:xfrm>
           <a:prstGeom prst="rect">
             <a:avLst/>
@@ -22607,8 +22607,8 @@
         </p:nvSpPr>
         <p:spPr>
           <a:xfrm>
-            <a:off x="5340668" y="2866549"/>
-            <a:ext cx="1092756" cy="198120"/>
+            <a:off x="5340668" y="3037999"/>
+            <a:ext cx="1255090" cy="198120"/>
           </a:xfrm>
           <a:prstGeom prst="rect">
             <a:avLst/>
@@ -22648,7 +22648,7 @@
         <p:spPr>
           <a:xfrm>
             <a:off x="5342572" y="3530441"/>
-            <a:ext cx="261937" cy="167640"/>
+            <a:ext cx="286421" cy="167640"/>
           </a:xfrm>
           <a:prstGeom prst="rect">
             <a:avLst/>
@@ -22688,7 +22688,7 @@
         <p:spPr>
           <a:xfrm>
             <a:off x="5339715" y="3715702"/>
-            <a:ext cx="920332" cy="213360"/>
+            <a:ext cx="1108107" cy="213360"/>
           </a:xfrm>
           <a:prstGeom prst="rect">
             <a:avLst/>
@@ -22826,7 +22826,7 @@
         <p:spPr>
           <a:xfrm>
             <a:off x="7732395" y="2107882"/>
-            <a:ext cx="320245" cy="335280"/>
+            <a:ext cx="383997" cy="335280"/>
           </a:xfrm>
           <a:prstGeom prst="rect">
             <a:avLst/>
@@ -22865,8 +22865,8 @@
         </p:nvSpPr>
         <p:spPr>
           <a:xfrm>
-            <a:off x="7736205" y="2502218"/>
-            <a:ext cx="655368" cy="274320"/>
+            <a:off x="7736205" y="2521268"/>
+            <a:ext cx="724985" cy="274320"/>
           </a:xfrm>
           <a:prstGeom prst="rect">
             <a:avLst/>
@@ -22905,8 +22905,8 @@
         </p:nvSpPr>
         <p:spPr>
           <a:xfrm>
-            <a:off x="8161020" y="2550795"/>
-            <a:ext cx="785241" cy="182880"/>
+            <a:off x="7741920" y="2779395"/>
+            <a:ext cx="973996" cy="182880"/>
           </a:xfrm>
           <a:prstGeom prst="rect">
             <a:avLst/>
@@ -22945,8 +22945,8 @@
         </p:nvSpPr>
         <p:spPr>
           <a:xfrm>
-            <a:off x="7740968" y="2866549"/>
-            <a:ext cx="957477" cy="198120"/>
+            <a:off x="7740968" y="3037999"/>
+            <a:ext cx="1061314" cy="198120"/>
           </a:xfrm>
           <a:prstGeom prst="rect">
             <a:avLst/>
@@ -22986,7 +22986,7 @@
         <p:spPr>
           <a:xfrm>
             <a:off x="7742872" y="3530441"/>
-            <a:ext cx="261937" cy="167640"/>
+            <a:ext cx="286421" cy="167640"/>
           </a:xfrm>
           <a:prstGeom prst="rect">
             <a:avLst/>
@@ -23026,7 +23026,7 @@
         <p:spPr>
           <a:xfrm>
             <a:off x="7740015" y="3715702"/>
-            <a:ext cx="662699" cy="213360"/>
+            <a:ext cx="767525" cy="213360"/>
           </a:xfrm>
           <a:prstGeom prst="rect">
             <a:avLst/>
@@ -23164,7 +23164,7 @@
         <p:spPr>
           <a:xfrm>
             <a:off x="10132695" y="2107882"/>
-            <a:ext cx="320245" cy="335280"/>
+            <a:ext cx="383997" cy="335280"/>
           </a:xfrm>
           <a:prstGeom prst="rect">
             <a:avLst/>
@@ -23203,8 +23203,8 @@
         </p:nvSpPr>
         <p:spPr>
           <a:xfrm>
-            <a:off x="10136505" y="2502218"/>
-            <a:ext cx="448342" cy="274320"/>
+            <a:off x="10136505" y="2521268"/>
+            <a:ext cx="494753" cy="274320"/>
           </a:xfrm>
           <a:prstGeom prst="rect">
             <a:avLst/>
@@ -23243,8 +23243,8 @@
         </p:nvSpPr>
         <p:spPr>
           <a:xfrm>
-            <a:off x="10561320" y="2550795"/>
-            <a:ext cx="450056" cy="182880"/>
+            <a:off x="10142220" y="2779395"/>
+            <a:ext cx="562310" cy="182880"/>
           </a:xfrm>
           <a:prstGeom prst="rect">
             <a:avLst/>
@@ -23283,8 +23283,8 @@
         </p:nvSpPr>
         <p:spPr>
           <a:xfrm>
-            <a:off x="10141268" y="2866549"/>
-            <a:ext cx="957477" cy="198120"/>
+            <a:off x="10141268" y="3037999"/>
+            <a:ext cx="1061314" cy="198120"/>
           </a:xfrm>
           <a:prstGeom prst="rect">
             <a:avLst/>
@@ -23324,7 +23324,7 @@
         <p:spPr>
           <a:xfrm>
             <a:off x="10143172" y="3530441"/>
-            <a:ext cx="261937" cy="167640"/>
+            <a:ext cx="286421" cy="167640"/>
           </a:xfrm>
           <a:prstGeom prst="rect">
             <a:avLst/>
@@ -23364,7 +23364,7 @@
         <p:spPr>
           <a:xfrm>
             <a:off x="10140315" y="3715702"/>
-            <a:ext cx="694904" cy="213360"/>
+            <a:ext cx="802636" cy="213360"/>
           </a:xfrm>
           <a:prstGeom prst="rect">
             <a:avLst/>
@@ -23551,8 +23551,8 @@
         </p:nvSpPr>
         <p:spPr>
           <a:xfrm>
-            <a:off x="4997696" y="4306252"/>
-            <a:ext cx="2196608" cy="213360"/>
+            <a:off x="4880259" y="4306252"/>
+            <a:ext cx="2431483" cy="213360"/>
           </a:xfrm>
           <a:prstGeom prst="rect">
             <a:avLst/>
@@ -23614,7 +23614,7 @@
         <p:spPr>
           <a:xfrm>
             <a:off x="557212" y="5898356"/>
-            <a:ext cx="4957762" cy="228600"/>
+            <a:ext cx="5458568" cy="228600"/>
           </a:xfrm>
           <a:prstGeom prst="rect">
             <a:avLst/>
